--- a/reports/Apagon_April28.pptx
+++ b/reports/Apagon_April28.pptx
@@ -5,7 +5,7 @@
     <p:sldMasterId id="2147483648" r:id="rId3"/>
   </p:sldMasterIdLst>
   <p:notesMasterIdLst>
-    <p:notesMasterId r:id="rId32"/>
+    <p:notesMasterId r:id="rId33"/>
   </p:notesMasterIdLst>
   <p:sldIdLst>
     <p:sldId id="256" r:id="rId4"/>
@@ -25,17 +25,18 @@
     <p:sldId id="337" r:id="rId18"/>
     <p:sldId id="366" r:id="rId19"/>
     <p:sldId id="367" r:id="rId20"/>
-    <p:sldId id="368" r:id="rId21"/>
-    <p:sldId id="342" r:id="rId22"/>
-    <p:sldId id="369" r:id="rId23"/>
-    <p:sldId id="370" r:id="rId24"/>
-    <p:sldId id="371" r:id="rId25"/>
-    <p:sldId id="372" r:id="rId26"/>
-    <p:sldId id="334" r:id="rId27"/>
-    <p:sldId id="260" r:id="rId28"/>
-    <p:sldId id="261" r:id="rId29"/>
-    <p:sldId id="311" r:id="rId30"/>
-    <p:sldId id="310" r:id="rId31"/>
+    <p:sldId id="374" r:id="rId21"/>
+    <p:sldId id="368" r:id="rId22"/>
+    <p:sldId id="342" r:id="rId23"/>
+    <p:sldId id="369" r:id="rId24"/>
+    <p:sldId id="370" r:id="rId25"/>
+    <p:sldId id="371" r:id="rId26"/>
+    <p:sldId id="372" r:id="rId27"/>
+    <p:sldId id="334" r:id="rId28"/>
+    <p:sldId id="260" r:id="rId29"/>
+    <p:sldId id="261" r:id="rId30"/>
+    <p:sldId id="311" r:id="rId31"/>
+    <p:sldId id="310" r:id="rId32"/>
   </p:sldIdLst>
   <p:sldSz cx="12192000" cy="6858000"/>
   <p:notesSz cx="6858000" cy="9144000"/>
@@ -314,7 +315,7 @@
               <a:pPr>
                 <a:defRPr/>
               </a:pPr>
-              <a:t>8/5/25</a:t>
+              <a:t>19/5/25</a:t>
             </a:fld>
             <a:endParaRPr lang="es-ES"/>
           </a:p>
@@ -1151,7 +1152,7 @@
                 <a:latin typeface="Cabin Regular" pitchFamily="2" charset="0"/>
               </a:rPr>
               <a:pPr/>
-              <a:t>27</a:t>
+              <a:t>28</a:t>
             </a:fld>
             <a:endParaRPr lang="es-ES" altLang="es-ES">
               <a:latin typeface="Cabin Regular" pitchFamily="2" charset="0"/>
@@ -1321,7 +1322,7 @@
             </a:pPr>
             <a:fld id="{17C4E9E0-B3F9-4104-BB39-F8E96513EFFE}" type="datetime1">
               <a:rPr lang="es-ES" smtClean="0"/>
-              <a:t>8/5/25</a:t>
+              <a:t>19/5/25</a:t>
             </a:fld>
             <a:endParaRPr lang="es-ES"/>
           </a:p>
@@ -1517,7 +1518,7 @@
             </a:pPr>
             <a:fld id="{68DF384E-2141-45FA-86B8-4035FECD32BB}" type="datetime1">
               <a:rPr lang="es-ES" smtClean="0"/>
-              <a:t>8/5/25</a:t>
+              <a:t>19/5/25</a:t>
             </a:fld>
             <a:endParaRPr lang="es-ES"/>
           </a:p>
@@ -1723,7 +1724,7 @@
             </a:pPr>
             <a:fld id="{4704F67A-A11F-44C2-A1E8-90455DDFC625}" type="datetime1">
               <a:rPr lang="es-ES" smtClean="0"/>
-              <a:t>8/5/25</a:t>
+              <a:t>19/5/25</a:t>
             </a:fld>
             <a:endParaRPr lang="es-ES"/>
           </a:p>
@@ -1934,7 +1935,7 @@
             </a:pPr>
             <a:fld id="{AB261817-F231-4105-ACC8-75380DF33C1E}" type="datetime1">
               <a:rPr lang="es-ES" smtClean="0"/>
-              <a:t>8/5/25</a:t>
+              <a:t>19/5/25</a:t>
             </a:fld>
             <a:endParaRPr lang="es-ES"/>
           </a:p>
@@ -2365,7 +2366,7 @@
             </a:pPr>
             <a:fld id="{8133D45C-A159-4290-849D-4C55782B747E}" type="datetime1">
               <a:rPr lang="es-ES" smtClean="0"/>
-              <a:t>8/5/25</a:t>
+              <a:t>19/5/25</a:t>
             </a:fld>
             <a:endParaRPr lang="es-ES"/>
           </a:p>
@@ -2603,7 +2604,7 @@
             </a:pPr>
             <a:fld id="{40C8C649-08CF-4E01-8905-C809A36F6021}" type="datetime1">
               <a:rPr lang="es-ES" smtClean="0"/>
-              <a:t>8/5/25</a:t>
+              <a:t>19/5/25</a:t>
             </a:fld>
             <a:endParaRPr lang="es-ES"/>
           </a:p>
@@ -2994,7 +2995,7 @@
             </a:pPr>
             <a:fld id="{D0BFE5C1-FFDC-425F-A1F2-1672BC227ACA}" type="datetime1">
               <a:rPr lang="es-ES" smtClean="0"/>
-              <a:t>8/5/25</a:t>
+              <a:t>19/5/25</a:t>
             </a:fld>
             <a:endParaRPr lang="es-ES"/>
           </a:p>
@@ -3158,7 +3159,7 @@
             </a:pPr>
             <a:fld id="{43EAD619-8BAB-49A3-B0CE-2A9D98840EB9}" type="datetime1">
               <a:rPr lang="es-ES" smtClean="0"/>
-              <a:t>8/5/25</a:t>
+              <a:t>19/5/25</a:t>
             </a:fld>
             <a:endParaRPr lang="es-ES"/>
           </a:p>
@@ -3294,7 +3295,7 @@
             </a:pPr>
             <a:fld id="{D99459DC-3678-4699-A046-149B616B5321}" type="datetime1">
               <a:rPr lang="es-ES" smtClean="0"/>
-              <a:t>8/5/25</a:t>
+              <a:t>19/5/25</a:t>
             </a:fld>
             <a:endParaRPr lang="es-ES"/>
           </a:p>
@@ -3606,7 +3607,7 @@
             </a:pPr>
             <a:fld id="{40297841-9C7B-4697-A49A-0D2556730D1A}" type="datetime1">
               <a:rPr lang="es-ES" smtClean="0"/>
-              <a:t>8/5/25</a:t>
+              <a:t>19/5/25</a:t>
             </a:fld>
             <a:endParaRPr lang="es-ES"/>
           </a:p>
@@ -3923,7 +3924,7 @@
             </a:pPr>
             <a:fld id="{3FD2BDBA-CD70-4054-9E2A-88A88D237B78}" type="datetime1">
               <a:rPr lang="es-ES" smtClean="0"/>
-              <a:t>8/5/25</a:t>
+              <a:t>19/5/25</a:t>
             </a:fld>
             <a:endParaRPr lang="es-ES"/>
           </a:p>
@@ -4196,7 +4197,7 @@
             </a:pPr>
             <a:fld id="{7BAEFEA7-FA12-4EE1-A405-B5F3690C8AD7}" type="datetime1">
               <a:rPr lang="es-ES" smtClean="0"/>
-              <a:t>8/5/25</a:t>
+              <a:t>19/5/25</a:t>
             </a:fld>
             <a:endParaRPr lang="es-ES"/>
           </a:p>
@@ -5891,8 +5892,8 @@
         </p:nvSpPr>
         <p:spPr>
           <a:xfrm>
-            <a:off x="1292225" y="5564188"/>
-            <a:ext cx="9709150" cy="923925"/>
+            <a:off x="1292225" y="5764027"/>
+            <a:ext cx="9709150" cy="646331"/>
           </a:xfrm>
           <a:prstGeom prst="rect">
             <a:avLst/>
@@ -6055,39 +6056,9 @@
                 <a:ea typeface="Open Sans"/>
                 <a:cs typeface="Open Sans"/>
               </a:rPr>
-              <a:t> – </a:t>
-            </a:r>
-            <a:r>
-              <a:rPr lang="es-ES" dirty="0" err="1">
-                <a:latin typeface="Cabin"/>
-                <a:ea typeface="Open Sans"/>
-                <a:cs typeface="Open Sans"/>
-              </a:rPr>
-              <a:t>lemur@uniovi.es</a:t>
-            </a:r>
-            <a:r>
-              <a:rPr lang="es-ES" dirty="0">
-                <a:latin typeface="Cabin"/>
-                <a:ea typeface="Open Sans"/>
-                <a:cs typeface="Open Sans"/>
-              </a:rPr>
-              <a:t> </a:t>
+              <a:t> – lemur@uniovi.es </a:t>
             </a:r>
             <a:endParaRPr lang="es-ES" dirty="0"/>
-          </a:p>
-          <a:p>
-            <a:pPr eaLnBrk="1" fontAlgn="auto" hangingPunct="1">
-              <a:spcBef>
-                <a:spcPts val="0"/>
-              </a:spcBef>
-              <a:spcAft>
-                <a:spcPts val="0"/>
-              </a:spcAft>
-              <a:defRPr/>
-            </a:pPr>
-            <a:endParaRPr lang="es-ES" dirty="0">
-              <a:latin typeface="Cabin Regular" pitchFamily="2" charset="77"/>
-            </a:endParaRPr>
           </a:p>
         </p:txBody>
       </p:sp>
@@ -6242,8 +6213,8 @@
         </p:nvSpPr>
         <p:spPr>
           <a:xfrm>
-            <a:off x="711432" y="4516031"/>
-            <a:ext cx="10764764" cy="584775"/>
+            <a:off x="713618" y="4280365"/>
+            <a:ext cx="10764764" cy="646331"/>
           </a:xfrm>
           <a:prstGeom prst="rect">
             <a:avLst/>
@@ -6382,7 +6353,7 @@
           <a:p>
             <a:pPr algn="ctr"/>
             <a:r>
-              <a:rPr lang="en-US" sz="3200" kern="100" dirty="0">
+              <a:rPr lang="en-US" sz="3600" kern="100" dirty="0">
                 <a:solidFill>
                   <a:schemeClr val="tx2"/>
                 </a:solidFill>
@@ -6392,7 +6363,7 @@
               </a:rPr>
               <a:t>Apagón - April 28, 2025</a:t>
             </a:r>
-            <a:endParaRPr lang="en-US" sz="3200" kern="100" dirty="0">
+            <a:endParaRPr lang="en-US" sz="3600" kern="100" dirty="0">
               <a:solidFill>
                 <a:schemeClr val="tx2"/>
               </a:solidFill>
@@ -6434,6 +6405,176 @@
           </a:prstGeom>
         </p:spPr>
       </p:pic>
+      <p:sp>
+        <p:nvSpPr>
+          <p:cNvPr id="2" name="CuadroTexto 4">
+            <a:extLst>
+              <a:ext uri="{FF2B5EF4-FFF2-40B4-BE49-F238E27FC236}">
+                <a16:creationId xmlns:a16="http://schemas.microsoft.com/office/drawing/2014/main" id="{69978582-A0E4-3481-CFD7-1F782E6F98E8}"/>
+              </a:ext>
+            </a:extLst>
+          </p:cNvPr>
+          <p:cNvSpPr txBox="1"/>
+          <p:nvPr/>
+        </p:nvSpPr>
+        <p:spPr>
+          <a:xfrm>
+            <a:off x="3651071" y="5105865"/>
+            <a:ext cx="4889857" cy="461665"/>
+          </a:xfrm>
+          <a:prstGeom prst="rect">
+            <a:avLst/>
+          </a:prstGeom>
+          <a:noFill/>
+        </p:spPr>
+        <p:txBody>
+          <a:bodyPr wrap="square" lIns="91440" tIns="45720" rIns="91440" bIns="45720" anchor="t">
+            <a:spAutoFit/>
+          </a:bodyPr>
+          <a:lstStyle>
+            <a:defPPr>
+              <a:defRPr lang="es-ES"/>
+            </a:defPPr>
+            <a:lvl1pPr algn="l" rtl="0" eaLnBrk="0" fontAlgn="base" hangingPunct="0">
+              <a:spcBef>
+                <a:spcPct val="0"/>
+              </a:spcBef>
+              <a:spcAft>
+                <a:spcPct val="0"/>
+              </a:spcAft>
+              <a:defRPr kern="1200">
+                <a:solidFill>
+                  <a:schemeClr val="tx1"/>
+                </a:solidFill>
+                <a:latin typeface="Calibri" panose="020F0502020204030204" pitchFamily="34" charset="0"/>
+                <a:ea typeface="+mn-ea"/>
+                <a:cs typeface="+mn-cs"/>
+              </a:defRPr>
+            </a:lvl1pPr>
+            <a:lvl2pPr marL="457200" algn="l" rtl="0" eaLnBrk="0" fontAlgn="base" hangingPunct="0">
+              <a:spcBef>
+                <a:spcPct val="0"/>
+              </a:spcBef>
+              <a:spcAft>
+                <a:spcPct val="0"/>
+              </a:spcAft>
+              <a:defRPr kern="1200">
+                <a:solidFill>
+                  <a:schemeClr val="tx1"/>
+                </a:solidFill>
+                <a:latin typeface="Calibri" panose="020F0502020204030204" pitchFamily="34" charset="0"/>
+                <a:ea typeface="+mn-ea"/>
+                <a:cs typeface="+mn-cs"/>
+              </a:defRPr>
+            </a:lvl2pPr>
+            <a:lvl3pPr marL="914400" algn="l" rtl="0" eaLnBrk="0" fontAlgn="base" hangingPunct="0">
+              <a:spcBef>
+                <a:spcPct val="0"/>
+              </a:spcBef>
+              <a:spcAft>
+                <a:spcPct val="0"/>
+              </a:spcAft>
+              <a:defRPr kern="1200">
+                <a:solidFill>
+                  <a:schemeClr val="tx1"/>
+                </a:solidFill>
+                <a:latin typeface="Calibri" panose="020F0502020204030204" pitchFamily="34" charset="0"/>
+                <a:ea typeface="+mn-ea"/>
+                <a:cs typeface="+mn-cs"/>
+              </a:defRPr>
+            </a:lvl3pPr>
+            <a:lvl4pPr marL="1371600" algn="l" rtl="0" eaLnBrk="0" fontAlgn="base" hangingPunct="0">
+              <a:spcBef>
+                <a:spcPct val="0"/>
+              </a:spcBef>
+              <a:spcAft>
+                <a:spcPct val="0"/>
+              </a:spcAft>
+              <a:defRPr kern="1200">
+                <a:solidFill>
+                  <a:schemeClr val="tx1"/>
+                </a:solidFill>
+                <a:latin typeface="Calibri" panose="020F0502020204030204" pitchFamily="34" charset="0"/>
+                <a:ea typeface="+mn-ea"/>
+                <a:cs typeface="+mn-cs"/>
+              </a:defRPr>
+            </a:lvl4pPr>
+            <a:lvl5pPr marL="1828800" algn="l" rtl="0" eaLnBrk="0" fontAlgn="base" hangingPunct="0">
+              <a:spcBef>
+                <a:spcPct val="0"/>
+              </a:spcBef>
+              <a:spcAft>
+                <a:spcPct val="0"/>
+              </a:spcAft>
+              <a:defRPr kern="1200">
+                <a:solidFill>
+                  <a:schemeClr val="tx1"/>
+                </a:solidFill>
+                <a:latin typeface="Calibri" panose="020F0502020204030204" pitchFamily="34" charset="0"/>
+                <a:ea typeface="+mn-ea"/>
+                <a:cs typeface="+mn-cs"/>
+              </a:defRPr>
+            </a:lvl5pPr>
+            <a:lvl6pPr marL="2286000" algn="l" defTabSz="914400" rtl="0" eaLnBrk="1" latinLnBrk="0" hangingPunct="1">
+              <a:defRPr kern="1200">
+                <a:solidFill>
+                  <a:schemeClr val="tx1"/>
+                </a:solidFill>
+                <a:latin typeface="Calibri" panose="020F0502020204030204" pitchFamily="34" charset="0"/>
+                <a:ea typeface="+mn-ea"/>
+                <a:cs typeface="+mn-cs"/>
+              </a:defRPr>
+            </a:lvl6pPr>
+            <a:lvl7pPr marL="2743200" algn="l" defTabSz="914400" rtl="0" eaLnBrk="1" latinLnBrk="0" hangingPunct="1">
+              <a:defRPr kern="1200">
+                <a:solidFill>
+                  <a:schemeClr val="tx1"/>
+                </a:solidFill>
+                <a:latin typeface="Calibri" panose="020F0502020204030204" pitchFamily="34" charset="0"/>
+                <a:ea typeface="+mn-ea"/>
+                <a:cs typeface="+mn-cs"/>
+              </a:defRPr>
+            </a:lvl7pPr>
+            <a:lvl8pPr marL="3200400" algn="l" defTabSz="914400" rtl="0" eaLnBrk="1" latinLnBrk="0" hangingPunct="1">
+              <a:defRPr kern="1200">
+                <a:solidFill>
+                  <a:schemeClr val="tx1"/>
+                </a:solidFill>
+                <a:latin typeface="Calibri" panose="020F0502020204030204" pitchFamily="34" charset="0"/>
+                <a:ea typeface="+mn-ea"/>
+                <a:cs typeface="+mn-cs"/>
+              </a:defRPr>
+            </a:lvl8pPr>
+            <a:lvl9pPr marL="3657600" algn="l" defTabSz="914400" rtl="0" eaLnBrk="1" latinLnBrk="0" hangingPunct="1">
+              <a:defRPr kern="1200">
+                <a:solidFill>
+                  <a:schemeClr val="tx1"/>
+                </a:solidFill>
+                <a:latin typeface="Calibri" panose="020F0502020204030204" pitchFamily="34" charset="0"/>
+                <a:ea typeface="+mn-ea"/>
+                <a:cs typeface="+mn-cs"/>
+              </a:defRPr>
+            </a:lvl9pPr>
+          </a:lstStyle>
+          <a:p>
+            <a:pPr algn="ctr"/>
+            <a:r>
+              <a:rPr lang="en-US" sz="2400" i="1" kern="100" dirty="0">
+                <a:latin typeface="Calibri"/>
+                <a:ea typeface="Calibri"/>
+                <a:cs typeface="Calibri"/>
+              </a:rPr>
+              <a:t>Update: May 19, 2025</a:t>
+            </a:r>
+            <a:endParaRPr lang="en-US" sz="2400" i="1" kern="100" dirty="0">
+              <a:effectLst/>
+              <a:latin typeface="Calibri"/>
+              <a:ea typeface="Calibri"/>
+              <a:cs typeface="Calibri"/>
+            </a:endParaRPr>
+          </a:p>
+        </p:txBody>
+      </p:sp>
     </p:spTree>
   </p:cSld>
   <p:clrMapOvr>
@@ -10519,8 +10660,17 @@
           <a:p>
             <a:r>
               <a:rPr lang="en-US" dirty="0"/>
-              <a:t>Inertia Estimates for April 28, 2025</a:t>
-            </a:r>
+              <a:t>Inertia </a:t>
+            </a:r>
+            <a:r>
+              <a:rPr lang="en-US" dirty="0" err="1"/>
+              <a:t>ESTIMATion</a:t>
+            </a:r>
+            <a:r>
+              <a:rPr lang="en-US"/>
+              <a:t> Methods – 1 of 2</a:t>
+            </a:r>
+            <a:endParaRPr lang="en-US" dirty="0"/>
           </a:p>
         </p:txBody>
       </p:sp>
@@ -10586,12 +10736,275 @@
           </a:p>
         </p:txBody>
       </p:sp>
+      <p:sp>
+        <p:nvSpPr>
+          <p:cNvPr id="11" name="TextBox 10">
+            <a:extLst>
+              <a:ext uri="{FF2B5EF4-FFF2-40B4-BE49-F238E27FC236}">
+                <a16:creationId xmlns:a16="http://schemas.microsoft.com/office/drawing/2014/main" id="{C936BCBC-EDA6-5FE7-603F-FCF2A6583A0D}"/>
+              </a:ext>
+            </a:extLst>
+          </p:cNvPr>
+          <p:cNvSpPr txBox="1"/>
+          <p:nvPr/>
+        </p:nvSpPr>
+        <p:spPr>
+          <a:xfrm>
+            <a:off x="224287" y="6358010"/>
+            <a:ext cx="5072332" cy="415498"/>
+          </a:xfrm>
+          <a:prstGeom prst="rect">
+            <a:avLst/>
+          </a:prstGeom>
+          <a:solidFill>
+            <a:srgbClr val="E9E9E9"/>
+          </a:solidFill>
+        </p:spPr>
+        <p:txBody>
+          <a:bodyPr wrap="square" rtlCol="0">
+            <a:spAutoFit/>
+          </a:bodyPr>
+          <a:lstStyle/>
+          <a:p>
+            <a:r>
+              <a:rPr lang="en-US" sz="1000" dirty="0"/>
+              <a:t>Inertia estimates are based on standard inertial constants for different generation categories as published in </a:t>
+            </a:r>
+            <a:r>
+              <a:rPr lang="en-US" sz="1000" dirty="0">
+                <a:hlinkClick r:id="rId2"/>
+              </a:rPr>
+              <a:t>“Inertia and Rate of Change of Frequency (RoCoF)”, ENTSO-E, 16 Dec. 2020 </a:t>
+            </a:r>
+            <a:endParaRPr lang="en-US" sz="1000" dirty="0"/>
+          </a:p>
+        </p:txBody>
+      </p:sp>
+      <p:sp>
+        <p:nvSpPr>
+          <p:cNvPr id="12" name="Content Placeholder 2">
+            <a:extLst>
+              <a:ext uri="{FF2B5EF4-FFF2-40B4-BE49-F238E27FC236}">
+                <a16:creationId xmlns:a16="http://schemas.microsoft.com/office/drawing/2014/main" id="{319F0CED-BA04-2573-F0A9-491B94DF9665}"/>
+              </a:ext>
+            </a:extLst>
+          </p:cNvPr>
+          <p:cNvSpPr>
+            <a:spLocks noGrp="1"/>
+          </p:cNvSpPr>
+          <p:nvPr>
+            <p:ph idx="1"/>
+          </p:nvPr>
+        </p:nvSpPr>
+        <p:spPr>
+          <a:xfrm>
+            <a:off x="374187" y="1147313"/>
+            <a:ext cx="11550770" cy="5273738"/>
+          </a:xfrm>
+        </p:spPr>
+        <p:txBody>
+          <a:bodyPr/>
+          <a:lstStyle/>
+          <a:p>
+            <a:r>
+              <a:rPr lang="en-US" dirty="0"/>
+              <a:t>Inertia estimates are </a:t>
+            </a:r>
+            <a:r>
+              <a:rPr lang="en-US" i="1" dirty="0"/>
+              <a:t>inferred</a:t>
+            </a:r>
+            <a:r>
+              <a:rPr lang="en-US" dirty="0"/>
+              <a:t>, not directly measured, thus subject to assumptions and limited information.</a:t>
+            </a:r>
+          </a:p>
+          <a:p>
+            <a:endParaRPr lang="en-US" dirty="0"/>
+          </a:p>
+          <a:p>
+            <a:r>
+              <a:rPr lang="en-US" dirty="0"/>
+              <a:t>ENTSO-E ”Project Inertia” has published basic methods for estimating kinetic inertia, which we utilize in the following slides. These estimates are likely too low because they do not include:</a:t>
+            </a:r>
+          </a:p>
+          <a:p>
+            <a:pPr lvl="1"/>
+            <a:r>
+              <a:rPr lang="en-US" dirty="0"/>
+              <a:t>Non-generating inertia contributors (e.g. synchronous compensators)</a:t>
+            </a:r>
+          </a:p>
+          <a:p>
+            <a:pPr lvl="1"/>
+            <a:r>
+              <a:rPr lang="en-US" dirty="0"/>
+              <a:t>Inertia for plants operating below nominal capacity</a:t>
+            </a:r>
+          </a:p>
+          <a:p>
+            <a:pPr lvl="1"/>
+            <a:r>
+              <a:rPr lang="en-US" dirty="0"/>
+              <a:t>”Synthetic” inertia from inverter-based resources</a:t>
+            </a:r>
+          </a:p>
+          <a:p>
+            <a:pPr lvl="1"/>
+            <a:endParaRPr lang="en-US" dirty="0"/>
+          </a:p>
+          <a:p>
+            <a:pPr lvl="1"/>
+            <a:endParaRPr lang="en-US" dirty="0"/>
+          </a:p>
+          <a:p>
+            <a:endParaRPr lang="en-US" dirty="0"/>
+          </a:p>
+          <a:p>
+            <a:pPr lvl="1"/>
+            <a:endParaRPr lang="en-US" dirty="0"/>
+          </a:p>
+          <a:p>
+            <a:pPr lvl="1"/>
+            <a:endParaRPr lang="en-US" dirty="0"/>
+          </a:p>
+          <a:p>
+            <a:endParaRPr lang="en-US" dirty="0"/>
+          </a:p>
+        </p:txBody>
+      </p:sp>
+    </p:spTree>
+    <p:extLst>
+      <p:ext uri="{BB962C8B-B14F-4D97-AF65-F5344CB8AC3E}">
+        <p14:creationId xmlns:p14="http://schemas.microsoft.com/office/powerpoint/2010/main" val="3406544206"/>
+      </p:ext>
+    </p:extLst>
+  </p:cSld>
+  <p:clrMapOvr>
+    <a:masterClrMapping/>
+  </p:clrMapOvr>
+</p:sld>
+</file>
+
+<file path=ppt/slides/slide18.xml><?xml version="1.0" encoding="utf-8"?>
+<p:sld xmlns:a="http://schemas.openxmlformats.org/drawingml/2006/main" xmlns:r="http://schemas.openxmlformats.org/officeDocument/2006/relationships" xmlns:p="http://schemas.openxmlformats.org/presentationml/2006/main">
+  <p:cSld>
+    <p:spTree>
+      <p:nvGrpSpPr>
+        <p:cNvPr id="1" name="">
+          <a:extLst>
+            <a:ext uri="{FF2B5EF4-FFF2-40B4-BE49-F238E27FC236}">
+              <a16:creationId xmlns:a16="http://schemas.microsoft.com/office/drawing/2014/main" id="{7B5E01A9-B350-8630-8951-82031A5C5EDD}"/>
+            </a:ext>
+          </a:extLst>
+        </p:cNvPr>
+        <p:cNvGrpSpPr/>
+        <p:nvPr/>
+      </p:nvGrpSpPr>
+      <p:grpSpPr>
+        <a:xfrm>
+          <a:off x="0" y="0"/>
+          <a:ext cx="0" cy="0"/>
+          <a:chOff x="0" y="0"/>
+          <a:chExt cx="0" cy="0"/>
+        </a:xfrm>
+      </p:grpSpPr>
+      <p:sp>
+        <p:nvSpPr>
+          <p:cNvPr id="2" name="Title 1">
+            <a:extLst>
+              <a:ext uri="{FF2B5EF4-FFF2-40B4-BE49-F238E27FC236}">
+                <a16:creationId xmlns:a16="http://schemas.microsoft.com/office/drawing/2014/main" id="{10F17DE0-D7A3-9C4D-A66A-45F43B9DB36F}"/>
+              </a:ext>
+            </a:extLst>
+          </p:cNvPr>
+          <p:cNvSpPr>
+            <a:spLocks noGrp="1"/>
+          </p:cNvSpPr>
+          <p:nvPr>
+            <p:ph type="title"/>
+          </p:nvPr>
+        </p:nvSpPr>
+        <p:spPr/>
+        <p:txBody>
+          <a:bodyPr/>
+          <a:lstStyle/>
+          <a:p>
+            <a:r>
+              <a:rPr lang="en-US" dirty="0"/>
+              <a:t>Inertia Estimates for April 28, 2025</a:t>
+            </a:r>
+          </a:p>
+        </p:txBody>
+      </p:sp>
+      <p:sp>
+        <p:nvSpPr>
+          <p:cNvPr id="4" name="Footer Placeholder 3">
+            <a:extLst>
+              <a:ext uri="{FF2B5EF4-FFF2-40B4-BE49-F238E27FC236}">
+                <a16:creationId xmlns:a16="http://schemas.microsoft.com/office/drawing/2014/main" id="{14C87134-2289-882C-7493-55627E298570}"/>
+              </a:ext>
+            </a:extLst>
+          </p:cNvPr>
+          <p:cNvSpPr>
+            <a:spLocks noGrp="1"/>
+          </p:cNvSpPr>
+          <p:nvPr>
+            <p:ph type="ftr" sz="quarter" idx="11"/>
+          </p:nvPr>
+        </p:nvSpPr>
+        <p:spPr/>
+        <p:txBody>
+          <a:bodyPr/>
+          <a:lstStyle/>
+          <a:p>
+            <a:pPr>
+              <a:defRPr/>
+            </a:pPr>
+            <a:r>
+              <a:rPr lang="en-US"/>
+              <a:t>Apagón – April 28, 2025</a:t>
+            </a:r>
+            <a:endParaRPr lang="es-ES" dirty="0"/>
+          </a:p>
+        </p:txBody>
+      </p:sp>
+      <p:sp>
+        <p:nvSpPr>
+          <p:cNvPr id="5" name="Slide Number Placeholder 4">
+            <a:extLst>
+              <a:ext uri="{FF2B5EF4-FFF2-40B4-BE49-F238E27FC236}">
+                <a16:creationId xmlns:a16="http://schemas.microsoft.com/office/drawing/2014/main" id="{41A5A8F4-4F1D-8CD5-CF72-24A3243466E1}"/>
+              </a:ext>
+            </a:extLst>
+          </p:cNvPr>
+          <p:cNvSpPr>
+            <a:spLocks noGrp="1"/>
+          </p:cNvSpPr>
+          <p:nvPr>
+            <p:ph type="sldNum" sz="quarter" idx="12"/>
+          </p:nvPr>
+        </p:nvSpPr>
+        <p:spPr/>
+        <p:txBody>
+          <a:bodyPr/>
+          <a:lstStyle/>
+          <a:p>
+            <a:fld id="{D86B3D54-5C84-4380-B90C-31F636633DA2}" type="slidenum">
+              <a:rPr lang="es-ES" altLang="es-ES" smtClean="0"/>
+              <a:pPr/>
+              <a:t>18</a:t>
+            </a:fld>
+            <a:endParaRPr lang="es-ES" altLang="es-ES"/>
+          </a:p>
+        </p:txBody>
+      </p:sp>
       <p:pic>
         <p:nvPicPr>
           <p:cNvPr id="6" name="Picture 5" descr="A graph of different colored lines&#10;&#10;AI-generated content may be incorrect.">
             <a:extLst>
               <a:ext uri="{FF2B5EF4-FFF2-40B4-BE49-F238E27FC236}">
-                <a16:creationId xmlns:a16="http://schemas.microsoft.com/office/drawing/2014/main" id="{556433A9-5A11-47B8-A747-2E4F42E73149}"/>
+                <a16:creationId xmlns:a16="http://schemas.microsoft.com/office/drawing/2014/main" id="{0152CA70-5D77-0A38-B2AF-DF2B8984517B}"/>
               </a:ext>
             </a:extLst>
           </p:cNvPr>
@@ -10619,7 +11032,7 @@
           <p:cNvPr id="7" name="TextBox 6">
             <a:extLst>
               <a:ext uri="{FF2B5EF4-FFF2-40B4-BE49-F238E27FC236}">
-                <a16:creationId xmlns:a16="http://schemas.microsoft.com/office/drawing/2014/main" id="{66717C22-833B-8D86-EE3E-83023CA5D925}"/>
+                <a16:creationId xmlns:a16="http://schemas.microsoft.com/office/drawing/2014/main" id="{970581DF-0056-F77B-645A-57C2DF43B04A}"/>
               </a:ext>
             </a:extLst>
           </p:cNvPr>
@@ -10656,7 +11069,7 @@
           <p:cNvPr id="8" name="Straight Arrow Connector 7">
             <a:extLst>
               <a:ext uri="{FF2B5EF4-FFF2-40B4-BE49-F238E27FC236}">
-                <a16:creationId xmlns:a16="http://schemas.microsoft.com/office/drawing/2014/main" id="{BFEC7FD3-0181-FD89-35D3-B59B71E1F73D}"/>
+                <a16:creationId xmlns:a16="http://schemas.microsoft.com/office/drawing/2014/main" id="{F6CFFC42-CEC7-0208-DAC6-BDC31F46B067}"/>
               </a:ext>
             </a:extLst>
           </p:cNvPr>
@@ -10700,7 +11113,7 @@
           <p:cNvPr id="9" name="Straight Arrow Connector 8">
             <a:extLst>
               <a:ext uri="{FF2B5EF4-FFF2-40B4-BE49-F238E27FC236}">
-                <a16:creationId xmlns:a16="http://schemas.microsoft.com/office/drawing/2014/main" id="{6C0280CA-F9FF-7CFD-B4F9-9853BB2575EB}"/>
+                <a16:creationId xmlns:a16="http://schemas.microsoft.com/office/drawing/2014/main" id="{64C5CF74-A24A-127F-E93E-DA1CD343B302}"/>
               </a:ext>
             </a:extLst>
           </p:cNvPr>
@@ -10744,7 +11157,7 @@
           <p:cNvPr id="10" name="TextBox 9">
             <a:extLst>
               <a:ext uri="{FF2B5EF4-FFF2-40B4-BE49-F238E27FC236}">
-                <a16:creationId xmlns:a16="http://schemas.microsoft.com/office/drawing/2014/main" id="{FFD4119C-C936-36AF-369E-EE697D8DEEB8}"/>
+                <a16:creationId xmlns:a16="http://schemas.microsoft.com/office/drawing/2014/main" id="{352F5FE3-ABB1-1507-5CA7-B46F7ABE522B}"/>
               </a:ext>
             </a:extLst>
           </p:cNvPr>
@@ -10781,7 +11194,7 @@
           <p:cNvPr id="11" name="TextBox 10">
             <a:extLst>
               <a:ext uri="{FF2B5EF4-FFF2-40B4-BE49-F238E27FC236}">
-                <a16:creationId xmlns:a16="http://schemas.microsoft.com/office/drawing/2014/main" id="{C936BCBC-EDA6-5FE7-603F-FCF2A6583A0D}"/>
+                <a16:creationId xmlns:a16="http://schemas.microsoft.com/office/drawing/2014/main" id="{5F6B4082-F248-3A42-DB91-65D9E994FF68}"/>
               </a:ext>
             </a:extLst>
           </p:cNvPr>
@@ -10825,7 +11238,7 @@
           <p:cNvPr id="3" name="Imagen 5">
             <a:extLst>
               <a:ext uri="{FF2B5EF4-FFF2-40B4-BE49-F238E27FC236}">
-                <a16:creationId xmlns:a16="http://schemas.microsoft.com/office/drawing/2014/main" id="{83B00AE4-C213-1C5D-9CCF-FF441060674F}"/>
+                <a16:creationId xmlns:a16="http://schemas.microsoft.com/office/drawing/2014/main" id="{FAD4F4F3-81BC-783C-7F29-F4FA92810E8B}"/>
               </a:ext>
             </a:extLst>
           </p:cNvPr>
@@ -10883,7 +11296,7 @@
     </p:spTree>
     <p:extLst>
       <p:ext uri="{BB962C8B-B14F-4D97-AF65-F5344CB8AC3E}">
-        <p14:creationId xmlns:p14="http://schemas.microsoft.com/office/powerpoint/2010/main" val="3406544206"/>
+        <p14:creationId xmlns:p14="http://schemas.microsoft.com/office/powerpoint/2010/main" val="3818511960"/>
       </p:ext>
     </p:extLst>
   </p:cSld>
@@ -10893,7 +11306,7 @@
 </p:sld>
 </file>
 
-<file path=ppt/slides/slide18.xml><?xml version="1.0" encoding="utf-8"?>
+<file path=ppt/slides/slide19.xml><?xml version="1.0" encoding="utf-8"?>
 <p:sld xmlns:a="http://schemas.openxmlformats.org/drawingml/2006/main" xmlns:r="http://schemas.openxmlformats.org/officeDocument/2006/relationships" xmlns:p="http://schemas.openxmlformats.org/presentationml/2006/main">
   <p:cSld>
     <p:spTree>
@@ -11025,7 +11438,7 @@
             <a:fld id="{D86B3D54-5C84-4380-B90C-31F636633DA2}" type="slidenum">
               <a:rPr lang="es-ES" altLang="es-ES" smtClean="0"/>
               <a:pPr/>
-              <a:t>18</a:t>
+              <a:t>19</a:t>
             </a:fld>
             <a:endParaRPr lang="es-ES" altLang="es-ES"/>
           </a:p>
@@ -11130,8 +11543,8 @@
         </p:nvCxnSpPr>
         <p:spPr>
           <a:xfrm flipH="1">
-            <a:off x="6660859" y="4065175"/>
-            <a:ext cx="1131569" cy="474820"/>
+            <a:off x="6866751" y="3722222"/>
+            <a:ext cx="1131569" cy="151654"/>
           </a:xfrm>
           <a:prstGeom prst="straightConnector1">
             <a:avLst/>
@@ -11172,8 +11585,8 @@
         </p:nvSpPr>
         <p:spPr>
           <a:xfrm>
-            <a:off x="7792428" y="3695843"/>
-            <a:ext cx="2635088" cy="738664"/>
+            <a:off x="7998320" y="3029724"/>
+            <a:ext cx="2635088" cy="1384995"/>
           </a:xfrm>
           <a:prstGeom prst="rect">
             <a:avLst/>
@@ -11191,6 +11604,15 @@
             <a:r>
               <a:rPr lang="en-US" sz="1400" dirty="0"/>
               <a:t>Synthetic inertia could have kept total inertia above the ENTSO-E recommended minimum.</a:t>
+            </a:r>
+          </a:p>
+          <a:p>
+            <a:endParaRPr lang="en-US" sz="1400" dirty="0"/>
+          </a:p>
+          <a:p>
+            <a:r>
+              <a:rPr lang="en-US" sz="1400" dirty="0"/>
+              <a:t>33% of all solar acting with virtual inertia of H=4 seconds</a:t>
             </a:r>
           </a:p>
         </p:txBody>
@@ -11243,318 +11665,6 @@
     <p:extLst>
       <p:ext uri="{BB962C8B-B14F-4D97-AF65-F5344CB8AC3E}">
         <p14:creationId xmlns:p14="http://schemas.microsoft.com/office/powerpoint/2010/main" val="294326145"/>
-      </p:ext>
-    </p:extLst>
-  </p:cSld>
-  <p:clrMapOvr>
-    <a:masterClrMapping/>
-  </p:clrMapOvr>
-</p:sld>
-</file>
-
-<file path=ppt/slides/slide19.xml><?xml version="1.0" encoding="utf-8"?>
-<p:sld xmlns:a="http://schemas.openxmlformats.org/drawingml/2006/main" xmlns:r="http://schemas.openxmlformats.org/officeDocument/2006/relationships" xmlns:p="http://schemas.openxmlformats.org/presentationml/2006/main">
-  <p:cSld>
-    <p:spTree>
-      <p:nvGrpSpPr>
-        <p:cNvPr id="1" name="">
-          <a:extLst>
-            <a:ext uri="{FF2B5EF4-FFF2-40B4-BE49-F238E27FC236}">
-              <a16:creationId xmlns:a16="http://schemas.microsoft.com/office/drawing/2014/main" id="{27A9FE06-D87F-CD98-5A22-A4614CBA6AF7}"/>
-            </a:ext>
-          </a:extLst>
-        </p:cNvPr>
-        <p:cNvGrpSpPr/>
-        <p:nvPr/>
-      </p:nvGrpSpPr>
-      <p:grpSpPr>
-        <a:xfrm>
-          <a:off x="0" y="0"/>
-          <a:ext cx="0" cy="0"/>
-          <a:chOff x="0" y="0"/>
-          <a:chExt cx="0" cy="0"/>
-        </a:xfrm>
-      </p:grpSpPr>
-      <p:sp>
-        <p:nvSpPr>
-          <p:cNvPr id="3" name="Slide Number Placeholder 2">
-            <a:extLst>
-              <a:ext uri="{FF2B5EF4-FFF2-40B4-BE49-F238E27FC236}">
-                <a16:creationId xmlns:a16="http://schemas.microsoft.com/office/drawing/2014/main" id="{DA1AC263-A9D9-91B5-039E-B431D5DB201A}"/>
-              </a:ext>
-            </a:extLst>
-          </p:cNvPr>
-          <p:cNvSpPr>
-            <a:spLocks noGrp="1"/>
-          </p:cNvSpPr>
-          <p:nvPr>
-            <p:ph type="sldNum" sz="quarter" idx="12"/>
-          </p:nvPr>
-        </p:nvSpPr>
-        <p:spPr/>
-        <p:txBody>
-          <a:bodyPr/>
-          <a:lstStyle/>
-          <a:p>
-            <a:fld id="{F80BEE8C-9BC8-4092-9420-3642836EC31C}" type="slidenum">
-              <a:rPr lang="es-ES" altLang="es-ES" smtClean="0"/>
-              <a:pPr/>
-              <a:t>19</a:t>
-            </a:fld>
-            <a:endParaRPr lang="es-ES" altLang="es-ES"/>
-          </a:p>
-        </p:txBody>
-      </p:sp>
-      <p:pic>
-        <p:nvPicPr>
-          <p:cNvPr id="6" name="Picture 5">
-            <a:extLst>
-              <a:ext uri="{FF2B5EF4-FFF2-40B4-BE49-F238E27FC236}">
-                <a16:creationId xmlns:a16="http://schemas.microsoft.com/office/drawing/2014/main" id="{916C186E-C540-88CF-BABC-2141192D1A13}"/>
-              </a:ext>
-            </a:extLst>
-          </p:cNvPr>
-          <p:cNvPicPr>
-            <a:picLocks noChangeAspect="1"/>
-          </p:cNvPicPr>
-          <p:nvPr/>
-        </p:nvPicPr>
-        <p:blipFill>
-          <a:blip r:embed="rId2"/>
-          <a:stretch>
-            <a:fillRect/>
-          </a:stretch>
-        </p:blipFill>
-        <p:spPr>
-          <a:xfrm>
-            <a:off x="211175" y="424741"/>
-            <a:ext cx="6740450" cy="5898728"/>
-          </a:xfrm>
-          <a:prstGeom prst="rect">
-            <a:avLst/>
-          </a:prstGeom>
-        </p:spPr>
-      </p:pic>
-      <p:sp>
-        <p:nvSpPr>
-          <p:cNvPr id="7" name="TextBox 6">
-            <a:extLst>
-              <a:ext uri="{FF2B5EF4-FFF2-40B4-BE49-F238E27FC236}">
-                <a16:creationId xmlns:a16="http://schemas.microsoft.com/office/drawing/2014/main" id="{12DCF635-0D85-AB20-C537-D8700FC9D89A}"/>
-              </a:ext>
-            </a:extLst>
-          </p:cNvPr>
-          <p:cNvSpPr txBox="1"/>
-          <p:nvPr/>
-        </p:nvSpPr>
-        <p:spPr>
-          <a:xfrm>
-            <a:off x="211175" y="6538912"/>
-            <a:ext cx="3827425" cy="215444"/>
-          </a:xfrm>
-          <a:prstGeom prst="rect">
-            <a:avLst/>
-          </a:prstGeom>
-          <a:noFill/>
-        </p:spPr>
-        <p:txBody>
-          <a:bodyPr wrap="square" rtlCol="0">
-            <a:spAutoFit/>
-          </a:bodyPr>
-          <a:lstStyle/>
-          <a:p>
-            <a:r>
-              <a:rPr lang="en-US" sz="800" dirty="0"/>
-              <a:t>Source: </a:t>
-            </a:r>
-            <a:r>
-              <a:rPr lang="en-US" sz="800" dirty="0">
-                <a:hlinkClick r:id="rId3"/>
-              </a:rPr>
-              <a:t>El Pais, “</a:t>
-            </a:r>
-            <a:r>
-              <a:rPr lang="en-US" sz="800" b="1" i="0" dirty="0">
-                <a:solidFill>
-                  <a:srgbClr val="111111"/>
-                </a:solidFill>
-                <a:effectLst/>
-                <a:latin typeface="MajritTx"/>
-                <a:hlinkClick r:id="rId3"/>
-              </a:rPr>
-              <a:t>¿Qué causó el apagón? </a:t>
-            </a:r>
-            <a:r>
-              <a:rPr lang="en-US" sz="800" b="1" i="0" dirty="0" err="1">
-                <a:solidFill>
-                  <a:srgbClr val="111111"/>
-                </a:solidFill>
-                <a:effectLst/>
-                <a:latin typeface="MajritTx"/>
-                <a:hlinkClick r:id="rId3"/>
-              </a:rPr>
-              <a:t>Explicación</a:t>
-            </a:r>
-            <a:r>
-              <a:rPr lang="en-US" sz="800" b="1" i="0" dirty="0">
-                <a:solidFill>
-                  <a:srgbClr val="111111"/>
-                </a:solidFill>
-                <a:effectLst/>
-                <a:latin typeface="MajritTx"/>
-                <a:hlinkClick r:id="rId3"/>
-              </a:rPr>
-              <a:t> visual y breve de lo que </a:t>
-            </a:r>
-            <a:r>
-              <a:rPr lang="en-US" sz="800" b="1" i="0" dirty="0" err="1">
-                <a:solidFill>
-                  <a:srgbClr val="111111"/>
-                </a:solidFill>
-                <a:effectLst/>
-                <a:latin typeface="MajritTx"/>
-                <a:hlinkClick r:id="rId3"/>
-              </a:rPr>
-              <a:t>sabemos</a:t>
-            </a:r>
-            <a:r>
-              <a:rPr lang="en-US" sz="800" b="1" i="0" dirty="0">
-                <a:solidFill>
-                  <a:srgbClr val="111111"/>
-                </a:solidFill>
-                <a:effectLst/>
-                <a:latin typeface="MajritTx"/>
-                <a:hlinkClick r:id="rId3"/>
-              </a:rPr>
-              <a:t>”</a:t>
-            </a:r>
-            <a:endParaRPr lang="en-US" sz="800" b="1" i="0" dirty="0">
-              <a:solidFill>
-                <a:srgbClr val="111111"/>
-              </a:solidFill>
-              <a:effectLst/>
-              <a:latin typeface="MajritTx"/>
-            </a:endParaRPr>
-          </a:p>
-        </p:txBody>
-      </p:sp>
-      <p:sp>
-        <p:nvSpPr>
-          <p:cNvPr id="9" name="TextBox 8">
-            <a:extLst>
-              <a:ext uri="{FF2B5EF4-FFF2-40B4-BE49-F238E27FC236}">
-                <a16:creationId xmlns:a16="http://schemas.microsoft.com/office/drawing/2014/main" id="{067C6305-2230-D18D-FB7A-A3EE39A6C58A}"/>
-              </a:ext>
-            </a:extLst>
-          </p:cNvPr>
-          <p:cNvSpPr txBox="1"/>
-          <p:nvPr/>
-        </p:nvSpPr>
-        <p:spPr>
-          <a:xfrm>
-            <a:off x="6951625" y="4483632"/>
-            <a:ext cx="2743201" cy="646331"/>
-          </a:xfrm>
-          <a:prstGeom prst="rect">
-            <a:avLst/>
-          </a:prstGeom>
-          <a:solidFill>
-            <a:srgbClr val="E9E9E9"/>
-          </a:solidFill>
-        </p:spPr>
-        <p:txBody>
-          <a:bodyPr wrap="square" rtlCol="0">
-            <a:spAutoFit/>
-          </a:bodyPr>
-          <a:lstStyle/>
-          <a:p>
-            <a:pPr algn="ctr"/>
-            <a:r>
-              <a:rPr lang="en-US" dirty="0"/>
-              <a:t>Iberian connection to France is relatively weak.</a:t>
-            </a:r>
-          </a:p>
-        </p:txBody>
-      </p:sp>
-      <p:sp>
-        <p:nvSpPr>
-          <p:cNvPr id="10" name="TextBox 9">
-            <a:extLst>
-              <a:ext uri="{FF2B5EF4-FFF2-40B4-BE49-F238E27FC236}">
-                <a16:creationId xmlns:a16="http://schemas.microsoft.com/office/drawing/2014/main" id="{2C9AE285-6AA8-C2B0-0B83-F230945DFCF2}"/>
-              </a:ext>
-            </a:extLst>
-          </p:cNvPr>
-          <p:cNvSpPr txBox="1"/>
-          <p:nvPr/>
-        </p:nvSpPr>
-        <p:spPr>
-          <a:xfrm>
-            <a:off x="6951625" y="3224107"/>
-            <a:ext cx="2743201" cy="923330"/>
-          </a:xfrm>
-          <a:prstGeom prst="rect">
-            <a:avLst/>
-          </a:prstGeom>
-          <a:solidFill>
-            <a:srgbClr val="E9E9E9"/>
-          </a:solidFill>
-        </p:spPr>
-        <p:txBody>
-          <a:bodyPr wrap="square" rtlCol="0">
-            <a:spAutoFit/>
-          </a:bodyPr>
-          <a:lstStyle/>
-          <a:p>
-            <a:pPr algn="ctr"/>
-            <a:r>
-              <a:rPr lang="en-US" dirty="0"/>
-              <a:t>France, Germany, and Italy have relatively strong interchange capacity.</a:t>
-            </a:r>
-          </a:p>
-        </p:txBody>
-      </p:sp>
-      <p:sp>
-        <p:nvSpPr>
-          <p:cNvPr id="5" name="Footer Placeholder 3">
-            <a:extLst>
-              <a:ext uri="{FF2B5EF4-FFF2-40B4-BE49-F238E27FC236}">
-                <a16:creationId xmlns:a16="http://schemas.microsoft.com/office/drawing/2014/main" id="{1B460CDF-00FE-35AC-7A11-7DD9A8149FF0}"/>
-              </a:ext>
-            </a:extLst>
-          </p:cNvPr>
-          <p:cNvSpPr>
-            <a:spLocks noGrp="1"/>
-          </p:cNvSpPr>
-          <p:nvPr>
-            <p:ph type="ftr" sz="quarter" idx="11"/>
-          </p:nvPr>
-        </p:nvSpPr>
-        <p:spPr>
-          <a:xfrm>
-            <a:off x="4038600" y="6558454"/>
-            <a:ext cx="4114800" cy="213285"/>
-          </a:xfrm>
-        </p:spPr>
-        <p:txBody>
-          <a:bodyPr/>
-          <a:lstStyle/>
-          <a:p>
-            <a:pPr>
-              <a:defRPr/>
-            </a:pPr>
-            <a:r>
-              <a:rPr lang="en-US" dirty="0"/>
-              <a:t>Apagón – April 28, 2025</a:t>
-            </a:r>
-            <a:endParaRPr lang="es-ES" dirty="0"/>
-          </a:p>
-        </p:txBody>
-      </p:sp>
-    </p:spTree>
-    <p:extLst>
-      <p:ext uri="{BB962C8B-B14F-4D97-AF65-F5344CB8AC3E}">
-        <p14:creationId xmlns:p14="http://schemas.microsoft.com/office/powerpoint/2010/main" val="2798147420"/>
       </p:ext>
     </p:extLst>
   </p:cSld>
@@ -11597,25 +11707,30 @@
             <p:ph idx="1"/>
           </p:nvPr>
         </p:nvSpPr>
-        <p:spPr/>
+        <p:spPr>
+          <a:xfrm>
+            <a:off x="294734" y="1073645"/>
+            <a:ext cx="7106730" cy="5171880"/>
+          </a:xfrm>
+        </p:spPr>
         <p:txBody>
           <a:bodyPr/>
           <a:lstStyle/>
           <a:p>
             <a:r>
-              <a:rPr lang="en-US" dirty="0"/>
+              <a:rPr lang="en-US" sz="2400" dirty="0"/>
               <a:t>LEMUR believes there are perfectly plausible technical explanations for the Iberian blackout of April 28, 2025. </a:t>
             </a:r>
           </a:p>
           <a:p>
             <a:r>
-              <a:rPr lang="en-US" dirty="0"/>
+              <a:rPr lang="en-US" sz="2400" dirty="0"/>
               <a:t>We are focused on the technical explanations which can be justified with knowledge of the physical infrastructure. In other words, we are not, currently, considering cyber-attacks, human errors, or extraordinary meteorological conditions.</a:t>
             </a:r>
           </a:p>
           <a:p>
             <a:r>
-              <a:rPr lang="en-US" i="1" dirty="0">
+              <a:rPr lang="en-US" sz="2400" i="1" dirty="0">
                 <a:solidFill>
                   <a:srgbClr val="C00000"/>
                 </a:solidFill>
@@ -11623,17 +11738,17 @@
               <a:t>For now</a:t>
             </a:r>
             <a:r>
-              <a:rPr lang="en-US" dirty="0"/>
+              <a:rPr lang="en-US" sz="2400" dirty="0"/>
               <a:t>, we are simply presenting what data we have and will use as a basis for much more engineering analysis.</a:t>
             </a:r>
           </a:p>
           <a:p>
             <a:r>
-              <a:rPr lang="en-US" dirty="0"/>
+              <a:rPr lang="en-US" sz="2400" dirty="0"/>
               <a:t>We are NOT presenting conclusions about root causes! (</a:t>
             </a:r>
             <a:r>
-              <a:rPr lang="en-US" dirty="0">
+              <a:rPr lang="en-US" sz="2400" dirty="0">
                 <a:solidFill>
                   <a:srgbClr val="C00000"/>
                 </a:solidFill>
@@ -11641,7 +11756,7 @@
               <a:t>yet…</a:t>
             </a:r>
             <a:r>
-              <a:rPr lang="en-US" dirty="0"/>
+              <a:rPr lang="en-US" sz="2400" dirty="0"/>
               <a:t>)</a:t>
             </a:r>
           </a:p>
@@ -11737,6 +11852,325 @@
               <a:t>2</a:t>
             </a:fld>
             <a:endParaRPr lang="es-ES" altLang="es-ES"/>
+          </a:p>
+        </p:txBody>
+      </p:sp>
+      <p:sp>
+        <p:nvSpPr>
+          <p:cNvPr id="6" name="Content Placeholder 1">
+            <a:extLst>
+              <a:ext uri="{FF2B5EF4-FFF2-40B4-BE49-F238E27FC236}">
+                <a16:creationId xmlns:a16="http://schemas.microsoft.com/office/drawing/2014/main" id="{E432E122-B67A-A98F-6916-D0B989B47D8C}"/>
+              </a:ext>
+            </a:extLst>
+          </p:cNvPr>
+          <p:cNvSpPr txBox="1">
+            <a:spLocks/>
+          </p:cNvSpPr>
+          <p:nvPr/>
+        </p:nvSpPr>
+        <p:spPr bwMode="auto">
+          <a:xfrm>
+            <a:off x="7677511" y="1073645"/>
+            <a:ext cx="4219755" cy="5171880"/>
+          </a:xfrm>
+          <a:prstGeom prst="rect">
+            <a:avLst/>
+          </a:prstGeom>
+          <a:noFill/>
+          <a:ln>
+            <a:noFill/>
+          </a:ln>
+          <a:extLst>
+            <a:ext uri="{909E8E84-426E-40DD-AFC4-6F175D3DCCD1}">
+              <a14:hiddenFill xmlns:a14="http://schemas.microsoft.com/office/drawing/2010/main">
+                <a:solidFill>
+                  <a:srgbClr val="FFFFFF"/>
+                </a:solidFill>
+              </a14:hiddenFill>
+            </a:ext>
+            <a:ext uri="{91240B29-F687-4F45-9708-019B960494DF}">
+              <a14:hiddenLine xmlns:a14="http://schemas.microsoft.com/office/drawing/2010/main" w="9525">
+                <a:solidFill>
+                  <a:srgbClr val="000000"/>
+                </a:solidFill>
+                <a:miter lim="800000"/>
+                <a:headEnd/>
+                <a:tailEnd/>
+              </a14:hiddenLine>
+            </a:ext>
+          </a:extLst>
+        </p:spPr>
+        <p:txBody>
+          <a:bodyPr vert="horz" wrap="square" lIns="91440" tIns="45720" rIns="91440" bIns="45720" numCol="1" anchor="t" anchorCtr="0" compatLnSpc="1">
+            <a:prstTxWarp prst="textNoShape">
+              <a:avLst/>
+            </a:prstTxWarp>
+          </a:bodyPr>
+          <a:lstStyle>
+            <a:lvl1pPr marL="228600" indent="-228600" algn="l" rtl="0" fontAlgn="base">
+              <a:lnSpc>
+                <a:spcPct val="90000"/>
+              </a:lnSpc>
+              <a:spcBef>
+                <a:spcPts val="1000"/>
+              </a:spcBef>
+              <a:spcAft>
+                <a:spcPct val="0"/>
+              </a:spcAft>
+              <a:buFont typeface="Arial" panose="020B0604020202020204" pitchFamily="34" charset="0"/>
+              <a:buChar char="•"/>
+              <a:defRPr sz="2800" kern="1200">
+                <a:solidFill>
+                  <a:schemeClr val="tx1"/>
+                </a:solidFill>
+                <a:latin typeface="Cabin Regular" pitchFamily="2" charset="77"/>
+                <a:ea typeface="+mn-ea"/>
+                <a:cs typeface="+mn-cs"/>
+              </a:defRPr>
+            </a:lvl1pPr>
+            <a:lvl2pPr marL="685800" indent="-228600" algn="l" rtl="0" fontAlgn="base">
+              <a:lnSpc>
+                <a:spcPct val="90000"/>
+              </a:lnSpc>
+              <a:spcBef>
+                <a:spcPts val="500"/>
+              </a:spcBef>
+              <a:spcAft>
+                <a:spcPct val="0"/>
+              </a:spcAft>
+              <a:buFont typeface="Arial" panose="020B0604020202020204" pitchFamily="34" charset="0"/>
+              <a:buChar char="•"/>
+              <a:defRPr sz="2400" kern="1200">
+                <a:solidFill>
+                  <a:schemeClr val="tx1"/>
+                </a:solidFill>
+                <a:latin typeface="+mn-lt"/>
+                <a:ea typeface="+mn-ea"/>
+                <a:cs typeface="+mn-cs"/>
+              </a:defRPr>
+            </a:lvl2pPr>
+            <a:lvl3pPr marL="1143000" indent="-228600" algn="l" rtl="0" fontAlgn="base">
+              <a:lnSpc>
+                <a:spcPct val="90000"/>
+              </a:lnSpc>
+              <a:spcBef>
+                <a:spcPts val="500"/>
+              </a:spcBef>
+              <a:spcAft>
+                <a:spcPct val="0"/>
+              </a:spcAft>
+              <a:buFont typeface="Arial" panose="020B0604020202020204" pitchFamily="34" charset="0"/>
+              <a:buChar char="•"/>
+              <a:defRPr sz="2000" kern="1200">
+                <a:solidFill>
+                  <a:schemeClr val="tx1"/>
+                </a:solidFill>
+                <a:latin typeface="+mn-lt"/>
+                <a:ea typeface="+mn-ea"/>
+                <a:cs typeface="+mn-cs"/>
+              </a:defRPr>
+            </a:lvl3pPr>
+            <a:lvl4pPr marL="1600200" indent="-228600" algn="l" rtl="0" fontAlgn="base">
+              <a:lnSpc>
+                <a:spcPct val="90000"/>
+              </a:lnSpc>
+              <a:spcBef>
+                <a:spcPts val="500"/>
+              </a:spcBef>
+              <a:spcAft>
+                <a:spcPct val="0"/>
+              </a:spcAft>
+              <a:buFont typeface="Arial" panose="020B0604020202020204" pitchFamily="34" charset="0"/>
+              <a:buChar char="•"/>
+              <a:defRPr kern="1200">
+                <a:solidFill>
+                  <a:schemeClr val="tx1"/>
+                </a:solidFill>
+                <a:latin typeface="+mn-lt"/>
+                <a:ea typeface="+mn-ea"/>
+                <a:cs typeface="+mn-cs"/>
+              </a:defRPr>
+            </a:lvl4pPr>
+            <a:lvl5pPr marL="2057400" indent="-228600" algn="l" rtl="0" fontAlgn="base">
+              <a:lnSpc>
+                <a:spcPct val="90000"/>
+              </a:lnSpc>
+              <a:spcBef>
+                <a:spcPts val="500"/>
+              </a:spcBef>
+              <a:spcAft>
+                <a:spcPct val="0"/>
+              </a:spcAft>
+              <a:buFont typeface="Arial" panose="020B0604020202020204" pitchFamily="34" charset="0"/>
+              <a:buChar char="•"/>
+              <a:defRPr kern="1200">
+                <a:solidFill>
+                  <a:schemeClr val="tx1"/>
+                </a:solidFill>
+                <a:latin typeface="+mn-lt"/>
+                <a:ea typeface="+mn-ea"/>
+                <a:cs typeface="+mn-cs"/>
+              </a:defRPr>
+            </a:lvl5pPr>
+            <a:lvl6pPr marL="2514600" indent="-228600" algn="l" defTabSz="914400" rtl="0" eaLnBrk="1" latinLnBrk="0" hangingPunct="1">
+              <a:lnSpc>
+                <a:spcPct val="90000"/>
+              </a:lnSpc>
+              <a:spcBef>
+                <a:spcPts val="500"/>
+              </a:spcBef>
+              <a:buFont typeface="Arial" panose="020B0604020202020204" pitchFamily="34" charset="0"/>
+              <a:buChar char="•"/>
+              <a:defRPr sz="1800" kern="1200">
+                <a:solidFill>
+                  <a:schemeClr val="tx1"/>
+                </a:solidFill>
+                <a:latin typeface="+mn-lt"/>
+                <a:ea typeface="+mn-ea"/>
+                <a:cs typeface="+mn-cs"/>
+              </a:defRPr>
+            </a:lvl6pPr>
+            <a:lvl7pPr marL="2971800" indent="-228600" algn="l" defTabSz="914400" rtl="0" eaLnBrk="1" latinLnBrk="0" hangingPunct="1">
+              <a:lnSpc>
+                <a:spcPct val="90000"/>
+              </a:lnSpc>
+              <a:spcBef>
+                <a:spcPts val="500"/>
+              </a:spcBef>
+              <a:buFont typeface="Arial" panose="020B0604020202020204" pitchFamily="34" charset="0"/>
+              <a:buChar char="•"/>
+              <a:defRPr sz="1800" kern="1200">
+                <a:solidFill>
+                  <a:schemeClr val="tx1"/>
+                </a:solidFill>
+                <a:latin typeface="+mn-lt"/>
+                <a:ea typeface="+mn-ea"/>
+                <a:cs typeface="+mn-cs"/>
+              </a:defRPr>
+            </a:lvl7pPr>
+            <a:lvl8pPr marL="3429000" indent="-228600" algn="l" defTabSz="914400" rtl="0" eaLnBrk="1" latinLnBrk="0" hangingPunct="1">
+              <a:lnSpc>
+                <a:spcPct val="90000"/>
+              </a:lnSpc>
+              <a:spcBef>
+                <a:spcPts val="500"/>
+              </a:spcBef>
+              <a:buFont typeface="Arial" panose="020B0604020202020204" pitchFamily="34" charset="0"/>
+              <a:buChar char="•"/>
+              <a:defRPr sz="1800" kern="1200">
+                <a:solidFill>
+                  <a:schemeClr val="tx1"/>
+                </a:solidFill>
+                <a:latin typeface="+mn-lt"/>
+                <a:ea typeface="+mn-ea"/>
+                <a:cs typeface="+mn-cs"/>
+              </a:defRPr>
+            </a:lvl8pPr>
+            <a:lvl9pPr marL="3886200" indent="-228600" algn="l" defTabSz="914400" rtl="0" eaLnBrk="1" latinLnBrk="0" hangingPunct="1">
+              <a:lnSpc>
+                <a:spcPct val="90000"/>
+              </a:lnSpc>
+              <a:spcBef>
+                <a:spcPts val="500"/>
+              </a:spcBef>
+              <a:buFont typeface="Arial" panose="020B0604020202020204" pitchFamily="34" charset="0"/>
+              <a:buChar char="•"/>
+              <a:defRPr sz="1800" kern="1200">
+                <a:solidFill>
+                  <a:schemeClr val="tx1"/>
+                </a:solidFill>
+                <a:latin typeface="+mn-lt"/>
+                <a:ea typeface="+mn-ea"/>
+                <a:cs typeface="+mn-cs"/>
+              </a:defRPr>
+            </a:lvl9pPr>
+          </a:lstStyle>
+          <a:p>
+            <a:pPr marL="0" indent="0" eaLnBrk="1" hangingPunct="1">
+              <a:buNone/>
+            </a:pPr>
+            <a:r>
+              <a:rPr lang="en-US" sz="2400" dirty="0"/>
+              <a:t>LEMUR Team</a:t>
+            </a:r>
+            <a:endParaRPr lang="en-US" sz="2000" dirty="0"/>
+          </a:p>
+          <a:p>
+            <a:pPr eaLnBrk="1" hangingPunct="1"/>
+            <a:r>
+              <a:rPr lang="en-US" sz="2000" dirty="0"/>
+              <a:t>Lead Authors:</a:t>
+            </a:r>
+          </a:p>
+          <a:p>
+            <a:pPr lvl="1" eaLnBrk="1" hangingPunct="1"/>
+            <a:r>
+              <a:rPr lang="en-US" sz="1600" dirty="0"/>
+              <a:t>Bryan Murray, P.E. – PhD Candidate</a:t>
+            </a:r>
+          </a:p>
+          <a:p>
+            <a:pPr eaLnBrk="1" hangingPunct="1"/>
+            <a:r>
+              <a:rPr lang="en-US" sz="2000" dirty="0"/>
+              <a:t>Reviewers:</a:t>
+            </a:r>
+          </a:p>
+          <a:p>
+            <a:pPr lvl="1" eaLnBrk="1" hangingPunct="1"/>
+            <a:r>
+              <a:rPr lang="en-US" sz="1600" dirty="0"/>
+              <a:t>Dr. Pablo García Fernández</a:t>
+            </a:r>
+          </a:p>
+          <a:p>
+            <a:pPr lvl="1" eaLnBrk="1" hangingPunct="1"/>
+            <a:r>
+              <a:rPr lang="en-US" sz="1600" dirty="0"/>
+              <a:t>Dr. Ángel Navarro-Rodriguez</a:t>
+            </a:r>
+          </a:p>
+          <a:p>
+            <a:pPr lvl="1" eaLnBrk="1" hangingPunct="1"/>
+            <a:r>
+              <a:rPr lang="en-US" sz="1600" dirty="0"/>
+              <a:t>Dr. Cristian Blanco Charro</a:t>
+            </a:r>
+          </a:p>
+          <a:p>
+            <a:pPr lvl="1" eaLnBrk="1" hangingPunct="1"/>
+            <a:r>
+              <a:rPr lang="en-US" sz="1600" dirty="0"/>
+              <a:t>Dr. Pablo </a:t>
+            </a:r>
+            <a:r>
+              <a:rPr lang="en-US" sz="1600" dirty="0" err="1"/>
+              <a:t>Arboleya</a:t>
+            </a:r>
+            <a:r>
+              <a:rPr lang="en-US" sz="1600" dirty="0"/>
+              <a:t> </a:t>
+            </a:r>
+            <a:r>
+              <a:rPr lang="en-US" sz="1600" dirty="0" err="1"/>
+              <a:t>Arboleya</a:t>
+            </a:r>
+            <a:endParaRPr lang="en-US" sz="1600" dirty="0"/>
+          </a:p>
+          <a:p>
+            <a:pPr lvl="1" eaLnBrk="1" hangingPunct="1"/>
+            <a:r>
+              <a:rPr lang="en-US" sz="1600" dirty="0"/>
+              <a:t>Dr. Jorge</a:t>
+            </a:r>
+          </a:p>
+          <a:p>
+            <a:pPr lvl="1" eaLnBrk="1" hangingPunct="1"/>
+            <a:r>
+              <a:rPr lang="en-US" sz="1600" dirty="0"/>
+              <a:t>Dr. Carlos </a:t>
+            </a:r>
           </a:p>
         </p:txBody>
       </p:sp>
@@ -11758,7 +12192,13 @@
   <p:cSld>
     <p:spTree>
       <p:nvGrpSpPr>
-        <p:cNvPr id="1" name=""/>
+        <p:cNvPr id="1" name="">
+          <a:extLst>
+            <a:ext uri="{FF2B5EF4-FFF2-40B4-BE49-F238E27FC236}">
+              <a16:creationId xmlns:a16="http://schemas.microsoft.com/office/drawing/2014/main" id="{27A9FE06-D87F-CD98-5A22-A4614CBA6AF7}"/>
+            </a:ext>
+          </a:extLst>
+        </p:cNvPr>
         <p:cNvGrpSpPr/>
         <p:nvPr/>
       </p:nvGrpSpPr>
@@ -11772,42 +12212,10 @@
       </p:grpSpPr>
       <p:sp>
         <p:nvSpPr>
-          <p:cNvPr id="4" name="Footer Placeholder 3">
-            <a:extLst>
-              <a:ext uri="{FF2B5EF4-FFF2-40B4-BE49-F238E27FC236}">
-                <a16:creationId xmlns:a16="http://schemas.microsoft.com/office/drawing/2014/main" id="{17B6CED3-5FD0-88A0-BD8A-190219981285}"/>
-              </a:ext>
-            </a:extLst>
-          </p:cNvPr>
-          <p:cNvSpPr>
-            <a:spLocks noGrp="1"/>
-          </p:cNvSpPr>
-          <p:nvPr>
-            <p:ph type="ftr" sz="quarter" idx="11"/>
-          </p:nvPr>
-        </p:nvSpPr>
-        <p:spPr/>
-        <p:txBody>
-          <a:bodyPr/>
-          <a:lstStyle/>
-          <a:p>
-            <a:pPr>
-              <a:defRPr/>
-            </a:pPr>
-            <a:r>
-              <a:rPr lang="en-US"/>
-              <a:t>Apagón – April 28, 2025</a:t>
-            </a:r>
-            <a:endParaRPr lang="es-ES" dirty="0"/>
-          </a:p>
-        </p:txBody>
-      </p:sp>
-      <p:sp>
-        <p:nvSpPr>
-          <p:cNvPr id="5" name="Slide Number Placeholder 4">
-            <a:extLst>
-              <a:ext uri="{FF2B5EF4-FFF2-40B4-BE49-F238E27FC236}">
-                <a16:creationId xmlns:a16="http://schemas.microsoft.com/office/drawing/2014/main" id="{DBE197C8-C0AC-DAE8-ACF9-A45E76D3D63C}"/>
+          <p:cNvPr id="3" name="Slide Number Placeholder 2">
+            <a:extLst>
+              <a:ext uri="{FF2B5EF4-FFF2-40B4-BE49-F238E27FC236}">
+                <a16:creationId xmlns:a16="http://schemas.microsoft.com/office/drawing/2014/main" id="{DA1AC263-A9D9-91B5-039E-B431D5DB201A}"/>
               </a:ext>
             </a:extLst>
           </p:cNvPr>
@@ -11823,7 +12231,7 @@
           <a:bodyPr/>
           <a:lstStyle/>
           <a:p>
-            <a:fld id="{D86B3D54-5C84-4380-B90C-31F636633DA2}" type="slidenum">
+            <a:fld id="{F80BEE8C-9BC8-4092-9420-3642836EC31C}" type="slidenum">
               <a:rPr lang="es-ES" altLang="es-ES" smtClean="0"/>
               <a:pPr/>
               <a:t>20</a:t>
@@ -11837,7 +12245,7 @@
           <p:cNvPr id="6" name="Picture 5">
             <a:extLst>
               <a:ext uri="{FF2B5EF4-FFF2-40B4-BE49-F238E27FC236}">
-                <a16:creationId xmlns:a16="http://schemas.microsoft.com/office/drawing/2014/main" id="{62329FDC-2219-0839-5EC5-AE599E7FA205}"/>
+                <a16:creationId xmlns:a16="http://schemas.microsoft.com/office/drawing/2014/main" id="{916C186E-C540-88CF-BABC-2141192D1A13}"/>
               </a:ext>
             </a:extLst>
           </p:cNvPr>
@@ -11854,7 +12262,7 @@
         </p:blipFill>
         <p:spPr>
           <a:xfrm>
-            <a:off x="3513740" y="373678"/>
+            <a:off x="211175" y="424741"/>
             <a:ext cx="6740450" cy="5898728"/>
           </a:xfrm>
           <a:prstGeom prst="rect">
@@ -11867,7 +12275,7 @@
           <p:cNvPr id="7" name="TextBox 6">
             <a:extLst>
               <a:ext uri="{FF2B5EF4-FFF2-40B4-BE49-F238E27FC236}">
-                <a16:creationId xmlns:a16="http://schemas.microsoft.com/office/drawing/2014/main" id="{634114BD-BAAF-702B-7686-C90AEFF2D56C}"/>
+                <a16:creationId xmlns:a16="http://schemas.microsoft.com/office/drawing/2014/main" id="{12DCF635-0D85-AB20-C537-D8700FC9D89A}"/>
               </a:ext>
             </a:extLst>
           </p:cNvPr>
@@ -11967,10 +12375,10 @@
       </p:sp>
       <p:sp>
         <p:nvSpPr>
-          <p:cNvPr id="8" name="TextBox 7">
-            <a:extLst>
-              <a:ext uri="{FF2B5EF4-FFF2-40B4-BE49-F238E27FC236}">
-                <a16:creationId xmlns:a16="http://schemas.microsoft.com/office/drawing/2014/main" id="{ED49347D-8AD7-1F85-1E00-4166C037F424}"/>
+          <p:cNvPr id="9" name="TextBox 8">
+            <a:extLst>
+              <a:ext uri="{FF2B5EF4-FFF2-40B4-BE49-F238E27FC236}">
+                <a16:creationId xmlns:a16="http://schemas.microsoft.com/office/drawing/2014/main" id="{067C6305-2230-D18D-FB7A-A3EE39A6C58A}"/>
               </a:ext>
             </a:extLst>
           </p:cNvPr>
@@ -11979,7 +12387,7 @@
         </p:nvSpPr>
         <p:spPr>
           <a:xfrm>
-            <a:off x="1647645" y="4278383"/>
+            <a:off x="6951625" y="4483632"/>
             <a:ext cx="2743201" cy="646331"/>
           </a:xfrm>
           <a:prstGeom prst="rect">
@@ -12005,10 +12413,10 @@
       </p:sp>
       <p:sp>
         <p:nvSpPr>
-          <p:cNvPr id="9" name="TextBox 8">
-            <a:extLst>
-              <a:ext uri="{FF2B5EF4-FFF2-40B4-BE49-F238E27FC236}">
-                <a16:creationId xmlns:a16="http://schemas.microsoft.com/office/drawing/2014/main" id="{E8027AA4-824C-6757-6D17-FFDEAEE29BB0}"/>
+          <p:cNvPr id="10" name="TextBox 9">
+            <a:extLst>
+              <a:ext uri="{FF2B5EF4-FFF2-40B4-BE49-F238E27FC236}">
+                <a16:creationId xmlns:a16="http://schemas.microsoft.com/office/drawing/2014/main" id="{2C9AE285-6AA8-C2B0-0B83-F230945DFCF2}"/>
               </a:ext>
             </a:extLst>
           </p:cNvPr>
@@ -12017,7 +12425,7 @@
         </p:nvSpPr>
         <p:spPr>
           <a:xfrm>
-            <a:off x="2142139" y="2007362"/>
+            <a:off x="6951625" y="3224107"/>
             <a:ext cx="2743201" cy="923330"/>
           </a:xfrm>
           <a:prstGeom prst="rect">
@@ -12041,10 +12449,47 @@
           </a:p>
         </p:txBody>
       </p:sp>
+      <p:sp>
+        <p:nvSpPr>
+          <p:cNvPr id="5" name="Footer Placeholder 3">
+            <a:extLst>
+              <a:ext uri="{FF2B5EF4-FFF2-40B4-BE49-F238E27FC236}">
+                <a16:creationId xmlns:a16="http://schemas.microsoft.com/office/drawing/2014/main" id="{1B460CDF-00FE-35AC-7A11-7DD9A8149FF0}"/>
+              </a:ext>
+            </a:extLst>
+          </p:cNvPr>
+          <p:cNvSpPr>
+            <a:spLocks noGrp="1"/>
+          </p:cNvSpPr>
+          <p:nvPr>
+            <p:ph type="ftr" sz="quarter" idx="11"/>
+          </p:nvPr>
+        </p:nvSpPr>
+        <p:spPr>
+          <a:xfrm>
+            <a:off x="4038600" y="6558454"/>
+            <a:ext cx="4114800" cy="213285"/>
+          </a:xfrm>
+        </p:spPr>
+        <p:txBody>
+          <a:bodyPr/>
+          <a:lstStyle/>
+          <a:p>
+            <a:pPr>
+              <a:defRPr/>
+            </a:pPr>
+            <a:r>
+              <a:rPr lang="en-US" dirty="0"/>
+              <a:t>Apagón – April 28, 2025</a:t>
+            </a:r>
+            <a:endParaRPr lang="es-ES" dirty="0"/>
+          </a:p>
+        </p:txBody>
+      </p:sp>
     </p:spTree>
     <p:extLst>
       <p:ext uri="{BB962C8B-B14F-4D97-AF65-F5344CB8AC3E}">
-        <p14:creationId xmlns:p14="http://schemas.microsoft.com/office/powerpoint/2010/main" val="1892627839"/>
+        <p14:creationId xmlns:p14="http://schemas.microsoft.com/office/powerpoint/2010/main" val="2798147420"/>
       </p:ext>
     </p:extLst>
   </p:cSld>
@@ -12073,6 +12518,307 @@
       </p:grpSpPr>
       <p:sp>
         <p:nvSpPr>
+          <p:cNvPr id="4" name="Footer Placeholder 3">
+            <a:extLst>
+              <a:ext uri="{FF2B5EF4-FFF2-40B4-BE49-F238E27FC236}">
+                <a16:creationId xmlns:a16="http://schemas.microsoft.com/office/drawing/2014/main" id="{17B6CED3-5FD0-88A0-BD8A-190219981285}"/>
+              </a:ext>
+            </a:extLst>
+          </p:cNvPr>
+          <p:cNvSpPr>
+            <a:spLocks noGrp="1"/>
+          </p:cNvSpPr>
+          <p:nvPr>
+            <p:ph type="ftr" sz="quarter" idx="11"/>
+          </p:nvPr>
+        </p:nvSpPr>
+        <p:spPr/>
+        <p:txBody>
+          <a:bodyPr/>
+          <a:lstStyle/>
+          <a:p>
+            <a:pPr>
+              <a:defRPr/>
+            </a:pPr>
+            <a:r>
+              <a:rPr lang="en-US"/>
+              <a:t>Apagón – April 28, 2025</a:t>
+            </a:r>
+            <a:endParaRPr lang="es-ES" dirty="0"/>
+          </a:p>
+        </p:txBody>
+      </p:sp>
+      <p:sp>
+        <p:nvSpPr>
+          <p:cNvPr id="5" name="Slide Number Placeholder 4">
+            <a:extLst>
+              <a:ext uri="{FF2B5EF4-FFF2-40B4-BE49-F238E27FC236}">
+                <a16:creationId xmlns:a16="http://schemas.microsoft.com/office/drawing/2014/main" id="{DBE197C8-C0AC-DAE8-ACF9-A45E76D3D63C}"/>
+              </a:ext>
+            </a:extLst>
+          </p:cNvPr>
+          <p:cNvSpPr>
+            <a:spLocks noGrp="1"/>
+          </p:cNvSpPr>
+          <p:nvPr>
+            <p:ph type="sldNum" sz="quarter" idx="12"/>
+          </p:nvPr>
+        </p:nvSpPr>
+        <p:spPr/>
+        <p:txBody>
+          <a:bodyPr/>
+          <a:lstStyle/>
+          <a:p>
+            <a:fld id="{D86B3D54-5C84-4380-B90C-31F636633DA2}" type="slidenum">
+              <a:rPr lang="es-ES" altLang="es-ES" smtClean="0"/>
+              <a:pPr/>
+              <a:t>21</a:t>
+            </a:fld>
+            <a:endParaRPr lang="es-ES" altLang="es-ES"/>
+          </a:p>
+        </p:txBody>
+      </p:sp>
+      <p:pic>
+        <p:nvPicPr>
+          <p:cNvPr id="6" name="Picture 5">
+            <a:extLst>
+              <a:ext uri="{FF2B5EF4-FFF2-40B4-BE49-F238E27FC236}">
+                <a16:creationId xmlns:a16="http://schemas.microsoft.com/office/drawing/2014/main" id="{62329FDC-2219-0839-5EC5-AE599E7FA205}"/>
+              </a:ext>
+            </a:extLst>
+          </p:cNvPr>
+          <p:cNvPicPr>
+            <a:picLocks noChangeAspect="1"/>
+          </p:cNvPicPr>
+          <p:nvPr/>
+        </p:nvPicPr>
+        <p:blipFill>
+          <a:blip r:embed="rId2"/>
+          <a:stretch>
+            <a:fillRect/>
+          </a:stretch>
+        </p:blipFill>
+        <p:spPr>
+          <a:xfrm>
+            <a:off x="3513740" y="373678"/>
+            <a:ext cx="6740450" cy="5898728"/>
+          </a:xfrm>
+          <a:prstGeom prst="rect">
+            <a:avLst/>
+          </a:prstGeom>
+        </p:spPr>
+      </p:pic>
+      <p:sp>
+        <p:nvSpPr>
+          <p:cNvPr id="7" name="TextBox 6">
+            <a:extLst>
+              <a:ext uri="{FF2B5EF4-FFF2-40B4-BE49-F238E27FC236}">
+                <a16:creationId xmlns:a16="http://schemas.microsoft.com/office/drawing/2014/main" id="{634114BD-BAAF-702B-7686-C90AEFF2D56C}"/>
+              </a:ext>
+            </a:extLst>
+          </p:cNvPr>
+          <p:cNvSpPr txBox="1"/>
+          <p:nvPr/>
+        </p:nvSpPr>
+        <p:spPr>
+          <a:xfrm>
+            <a:off x="211175" y="6538912"/>
+            <a:ext cx="3827425" cy="215444"/>
+          </a:xfrm>
+          <a:prstGeom prst="rect">
+            <a:avLst/>
+          </a:prstGeom>
+          <a:noFill/>
+        </p:spPr>
+        <p:txBody>
+          <a:bodyPr wrap="square" rtlCol="0">
+            <a:spAutoFit/>
+          </a:bodyPr>
+          <a:lstStyle/>
+          <a:p>
+            <a:r>
+              <a:rPr lang="en-US" sz="800" dirty="0"/>
+              <a:t>Source: </a:t>
+            </a:r>
+            <a:r>
+              <a:rPr lang="en-US" sz="800" dirty="0">
+                <a:hlinkClick r:id="rId3"/>
+              </a:rPr>
+              <a:t>El Pais, “</a:t>
+            </a:r>
+            <a:r>
+              <a:rPr lang="en-US" sz="800" b="1" i="0" dirty="0">
+                <a:solidFill>
+                  <a:srgbClr val="111111"/>
+                </a:solidFill>
+                <a:effectLst/>
+                <a:latin typeface="MajritTx"/>
+                <a:hlinkClick r:id="rId3"/>
+              </a:rPr>
+              <a:t>¿Qué causó el apagón? </a:t>
+            </a:r>
+            <a:r>
+              <a:rPr lang="en-US" sz="800" b="1" i="0" dirty="0" err="1">
+                <a:solidFill>
+                  <a:srgbClr val="111111"/>
+                </a:solidFill>
+                <a:effectLst/>
+                <a:latin typeface="MajritTx"/>
+                <a:hlinkClick r:id="rId3"/>
+              </a:rPr>
+              <a:t>Explicación</a:t>
+            </a:r>
+            <a:r>
+              <a:rPr lang="en-US" sz="800" b="1" i="0" dirty="0">
+                <a:solidFill>
+                  <a:srgbClr val="111111"/>
+                </a:solidFill>
+                <a:effectLst/>
+                <a:latin typeface="MajritTx"/>
+                <a:hlinkClick r:id="rId3"/>
+              </a:rPr>
+              <a:t> visual y breve de lo que </a:t>
+            </a:r>
+            <a:r>
+              <a:rPr lang="en-US" sz="800" b="1" i="0" dirty="0" err="1">
+                <a:solidFill>
+                  <a:srgbClr val="111111"/>
+                </a:solidFill>
+                <a:effectLst/>
+                <a:latin typeface="MajritTx"/>
+                <a:hlinkClick r:id="rId3"/>
+              </a:rPr>
+              <a:t>sabemos</a:t>
+            </a:r>
+            <a:r>
+              <a:rPr lang="en-US" sz="800" b="1" i="0" dirty="0">
+                <a:solidFill>
+                  <a:srgbClr val="111111"/>
+                </a:solidFill>
+                <a:effectLst/>
+                <a:latin typeface="MajritTx"/>
+                <a:hlinkClick r:id="rId3"/>
+              </a:rPr>
+              <a:t>”</a:t>
+            </a:r>
+            <a:endParaRPr lang="en-US" sz="800" b="1" i="0" dirty="0">
+              <a:solidFill>
+                <a:srgbClr val="111111"/>
+              </a:solidFill>
+              <a:effectLst/>
+              <a:latin typeface="MajritTx"/>
+            </a:endParaRPr>
+          </a:p>
+        </p:txBody>
+      </p:sp>
+      <p:sp>
+        <p:nvSpPr>
+          <p:cNvPr id="8" name="TextBox 7">
+            <a:extLst>
+              <a:ext uri="{FF2B5EF4-FFF2-40B4-BE49-F238E27FC236}">
+                <a16:creationId xmlns:a16="http://schemas.microsoft.com/office/drawing/2014/main" id="{ED49347D-8AD7-1F85-1E00-4166C037F424}"/>
+              </a:ext>
+            </a:extLst>
+          </p:cNvPr>
+          <p:cNvSpPr txBox="1"/>
+          <p:nvPr/>
+        </p:nvSpPr>
+        <p:spPr>
+          <a:xfrm>
+            <a:off x="1647645" y="4278383"/>
+            <a:ext cx="2743201" cy="646331"/>
+          </a:xfrm>
+          <a:prstGeom prst="rect">
+            <a:avLst/>
+          </a:prstGeom>
+          <a:solidFill>
+            <a:srgbClr val="E9E9E9"/>
+          </a:solidFill>
+        </p:spPr>
+        <p:txBody>
+          <a:bodyPr wrap="square" rtlCol="0">
+            <a:spAutoFit/>
+          </a:bodyPr>
+          <a:lstStyle/>
+          <a:p>
+            <a:pPr algn="ctr"/>
+            <a:r>
+              <a:rPr lang="en-US" dirty="0"/>
+              <a:t>Iberian connection to France is relatively weak.</a:t>
+            </a:r>
+          </a:p>
+        </p:txBody>
+      </p:sp>
+      <p:sp>
+        <p:nvSpPr>
+          <p:cNvPr id="9" name="TextBox 8">
+            <a:extLst>
+              <a:ext uri="{FF2B5EF4-FFF2-40B4-BE49-F238E27FC236}">
+                <a16:creationId xmlns:a16="http://schemas.microsoft.com/office/drawing/2014/main" id="{E8027AA4-824C-6757-6D17-FFDEAEE29BB0}"/>
+              </a:ext>
+            </a:extLst>
+          </p:cNvPr>
+          <p:cNvSpPr txBox="1"/>
+          <p:nvPr/>
+        </p:nvSpPr>
+        <p:spPr>
+          <a:xfrm>
+            <a:off x="2142139" y="2007362"/>
+            <a:ext cx="2743201" cy="923330"/>
+          </a:xfrm>
+          <a:prstGeom prst="rect">
+            <a:avLst/>
+          </a:prstGeom>
+          <a:solidFill>
+            <a:srgbClr val="E9E9E9"/>
+          </a:solidFill>
+        </p:spPr>
+        <p:txBody>
+          <a:bodyPr wrap="square" rtlCol="0">
+            <a:spAutoFit/>
+          </a:bodyPr>
+          <a:lstStyle/>
+          <a:p>
+            <a:pPr algn="ctr"/>
+            <a:r>
+              <a:rPr lang="en-US" dirty="0"/>
+              <a:t>France, Germany, and Italy have relatively strong interchange capacity.</a:t>
+            </a:r>
+          </a:p>
+        </p:txBody>
+      </p:sp>
+    </p:spTree>
+    <p:extLst>
+      <p:ext uri="{BB962C8B-B14F-4D97-AF65-F5344CB8AC3E}">
+        <p14:creationId xmlns:p14="http://schemas.microsoft.com/office/powerpoint/2010/main" val="1892627839"/>
+      </p:ext>
+    </p:extLst>
+  </p:cSld>
+  <p:clrMapOvr>
+    <a:masterClrMapping/>
+  </p:clrMapOvr>
+</p:sld>
+</file>
+
+<file path=ppt/slides/slide22.xml><?xml version="1.0" encoding="utf-8"?>
+<p:sld xmlns:a="http://schemas.openxmlformats.org/drawingml/2006/main" xmlns:r="http://schemas.openxmlformats.org/officeDocument/2006/relationships" xmlns:p="http://schemas.openxmlformats.org/presentationml/2006/main">
+  <p:cSld>
+    <p:spTree>
+      <p:nvGrpSpPr>
+        <p:cNvPr id="1" name=""/>
+        <p:cNvGrpSpPr/>
+        <p:nvPr/>
+      </p:nvGrpSpPr>
+      <p:grpSpPr>
+        <a:xfrm>
+          <a:off x="0" y="0"/>
+          <a:ext cx="0" cy="0"/>
+          <a:chOff x="0" y="0"/>
+          <a:chExt cx="0" cy="0"/>
+        </a:xfrm>
+      </p:grpSpPr>
+      <p:sp>
+        <p:nvSpPr>
           <p:cNvPr id="2" name="Title 1">
             <a:extLst>
               <a:ext uri="{FF2B5EF4-FFF2-40B4-BE49-F238E27FC236}">
@@ -12155,7 +12901,7 @@
             <a:fld id="{D86B3D54-5C84-4380-B90C-31F636633DA2}" type="slidenum">
               <a:rPr lang="es-ES" altLang="es-ES" smtClean="0"/>
               <a:pPr/>
-              <a:t>21</a:t>
+              <a:t>22</a:t>
             </a:fld>
             <a:endParaRPr lang="es-ES" altLang="es-ES"/>
           </a:p>
@@ -12636,7 +13382,7 @@
 </p:sld>
 </file>
 
-<file path=ppt/slides/slide22.xml><?xml version="1.0" encoding="utf-8"?>
+<file path=ppt/slides/slide23.xml><?xml version="1.0" encoding="utf-8"?>
 <p:sld xmlns:a="http://schemas.openxmlformats.org/drawingml/2006/main" xmlns:r="http://schemas.openxmlformats.org/officeDocument/2006/relationships" xmlns:p="http://schemas.openxmlformats.org/presentationml/2006/main">
   <p:cSld>
     <p:spTree>
@@ -12737,7 +13483,7 @@
             <a:fld id="{D86B3D54-5C84-4380-B90C-31F636633DA2}" type="slidenum">
               <a:rPr lang="es-ES" altLang="es-ES" smtClean="0"/>
               <a:pPr/>
-              <a:t>22</a:t>
+              <a:t>23</a:t>
             </a:fld>
             <a:endParaRPr lang="es-ES" altLang="es-ES"/>
           </a:p>
@@ -12971,7 +13717,7 @@
 </p:sld>
 </file>
 
-<file path=ppt/slides/slide23.xml><?xml version="1.0" encoding="utf-8"?>
+<file path=ppt/slides/slide24.xml><?xml version="1.0" encoding="utf-8"?>
 <p:sld xmlns:a="http://schemas.openxmlformats.org/drawingml/2006/main" xmlns:r="http://schemas.openxmlformats.org/officeDocument/2006/relationships" xmlns:p="http://schemas.openxmlformats.org/presentationml/2006/main">
   <p:cSld>
     <p:spTree>
@@ -13072,7 +13818,7 @@
             <a:fld id="{D86B3D54-5C84-4380-B90C-31F636633DA2}" type="slidenum">
               <a:rPr lang="es-ES" altLang="es-ES" smtClean="0"/>
               <a:pPr/>
-              <a:t>23</a:t>
+              <a:t>24</a:t>
             </a:fld>
             <a:endParaRPr lang="es-ES" altLang="es-ES"/>
           </a:p>
@@ -13184,7 +13930,7 @@
 </p:sld>
 </file>
 
-<file path=ppt/slides/slide24.xml><?xml version="1.0" encoding="utf-8"?>
+<file path=ppt/slides/slide25.xml><?xml version="1.0" encoding="utf-8"?>
 <p:sld xmlns:a="http://schemas.openxmlformats.org/drawingml/2006/main" xmlns:r="http://schemas.openxmlformats.org/officeDocument/2006/relationships" xmlns:p="http://schemas.openxmlformats.org/presentationml/2006/main">
   <p:cSld>
     <p:spTree>
@@ -13395,7 +14141,7 @@
                 <a:latin typeface="Cabin Regular" pitchFamily="2" charset="0"/>
               </a:rPr>
               <a:pPr/>
-              <a:t>24</a:t>
+              <a:t>25</a:t>
             </a:fld>
             <a:endParaRPr lang="es-ES" altLang="es-ES">
               <a:solidFill>
@@ -13663,7 +14409,7 @@
 </p:sld>
 </file>
 
-<file path=ppt/slides/slide25.xml><?xml version="1.0" encoding="utf-8"?>
+<file path=ppt/slides/slide26.xml><?xml version="1.0" encoding="utf-8"?>
 <p:sld xmlns:a="http://schemas.openxmlformats.org/drawingml/2006/main" xmlns:r="http://schemas.openxmlformats.org/officeDocument/2006/relationships" xmlns:p="http://schemas.openxmlformats.org/presentationml/2006/main">
   <p:cSld>
     <p:spTree>
@@ -13806,7 +14552,7 @@
                 <a:latin typeface="Cabin Regular" pitchFamily="2" charset="0"/>
               </a:rPr>
               <a:pPr/>
-              <a:t>25</a:t>
+              <a:t>26</a:t>
             </a:fld>
             <a:endParaRPr lang="es-ES" altLang="es-ES">
               <a:solidFill>
@@ -14684,1976 +15430,6 @@
         </p:nvPicPr>
         <p:blipFill>
           <a:blip r:embed="rId4">
-            <a:extLst>
-              <a:ext uri="{28A0092B-C50C-407E-A947-70E740481C1C}">
-                <a14:useLocalDpi xmlns:a14="http://schemas.microsoft.com/office/drawing/2010/main" val="0"/>
-              </a:ext>
-            </a:extLst>
-          </a:blip>
-          <a:srcRect/>
-          <a:stretch>
-            <a:fillRect/>
-          </a:stretch>
-        </p:blipFill>
-        <p:spPr bwMode="auto">
-          <a:xfrm>
-            <a:off x="158840" y="122503"/>
-            <a:ext cx="1097236" cy="809624"/>
-          </a:xfrm>
-          <a:prstGeom prst="rect">
-            <a:avLst/>
-          </a:prstGeom>
-          <a:noFill/>
-          <a:ln>
-            <a:noFill/>
-          </a:ln>
-          <a:extLst>
-            <a:ext uri="{909E8E84-426E-40DD-AFC4-6F175D3DCCD1}">
-              <a14:hiddenFill xmlns:a14="http://schemas.microsoft.com/office/drawing/2010/main">
-                <a:solidFill>
-                  <a:srgbClr val="FFFFFF"/>
-                </a:solidFill>
-              </a14:hiddenFill>
-            </a:ext>
-            <a:ext uri="{91240B29-F687-4F45-9708-019B960494DF}">
-              <a14:hiddenLine xmlns:a14="http://schemas.microsoft.com/office/drawing/2010/main" w="9525">
-                <a:solidFill>
-                  <a:srgbClr val="000000"/>
-                </a:solidFill>
-                <a:miter lim="800000"/>
-                <a:headEnd/>
-                <a:tailEnd/>
-              </a14:hiddenLine>
-            </a:ext>
-          </a:extLst>
-        </p:spPr>
-      </p:pic>
-    </p:spTree>
-  </p:cSld>
-  <p:clrMapOvr>
-    <a:masterClrMapping/>
-  </p:clrMapOvr>
-</p:sld>
-</file>
-
-<file path=ppt/slides/slide26.xml><?xml version="1.0" encoding="utf-8"?>
-<p:sld xmlns:a="http://schemas.openxmlformats.org/drawingml/2006/main" xmlns:r="http://schemas.openxmlformats.org/officeDocument/2006/relationships" xmlns:p="http://schemas.openxmlformats.org/presentationml/2006/main">
-  <p:cSld>
-    <p:spTree>
-      <p:nvGrpSpPr>
-        <p:cNvPr id="1" name=""/>
-        <p:cNvGrpSpPr/>
-        <p:nvPr/>
-      </p:nvGrpSpPr>
-      <p:grpSpPr>
-        <a:xfrm>
-          <a:off x="0" y="0"/>
-          <a:ext cx="0" cy="0"/>
-          <a:chOff x="0" y="0"/>
-          <a:chExt cx="0" cy="0"/>
-        </a:xfrm>
-      </p:grpSpPr>
-      <p:sp>
-        <p:nvSpPr>
-          <p:cNvPr id="3" name="Marcador de número de diapositiva 2">
-            <a:extLst>
-              <a:ext uri="{FF2B5EF4-FFF2-40B4-BE49-F238E27FC236}">
-                <a16:creationId xmlns:a16="http://schemas.microsoft.com/office/drawing/2014/main" id="{870F7993-F312-F046-A97F-903138B44A98}"/>
-              </a:ext>
-            </a:extLst>
-          </p:cNvPr>
-          <p:cNvSpPr>
-            <a:spLocks noGrp="1"/>
-          </p:cNvSpPr>
-          <p:nvPr>
-            <p:ph type="sldNum" sz="quarter" idx="12"/>
-          </p:nvPr>
-        </p:nvSpPr>
-        <p:spPr/>
-        <p:txBody>
-          <a:bodyPr/>
-          <a:lstStyle>
-            <a:lvl1pPr>
-              <a:defRPr>
-                <a:solidFill>
-                  <a:schemeClr val="tx1"/>
-                </a:solidFill>
-                <a:latin typeface="Calibri" panose="020F0502020204030204" pitchFamily="34" charset="0"/>
-              </a:defRPr>
-            </a:lvl1pPr>
-            <a:lvl2pPr marL="742950" indent="-285750">
-              <a:defRPr>
-                <a:solidFill>
-                  <a:schemeClr val="tx1"/>
-                </a:solidFill>
-                <a:latin typeface="Calibri" panose="020F0502020204030204" pitchFamily="34" charset="0"/>
-              </a:defRPr>
-            </a:lvl2pPr>
-            <a:lvl3pPr marL="1143000" indent="-228600">
-              <a:defRPr>
-                <a:solidFill>
-                  <a:schemeClr val="tx1"/>
-                </a:solidFill>
-                <a:latin typeface="Calibri" panose="020F0502020204030204" pitchFamily="34" charset="0"/>
-              </a:defRPr>
-            </a:lvl3pPr>
-            <a:lvl4pPr marL="1600200" indent="-228600">
-              <a:defRPr>
-                <a:solidFill>
-                  <a:schemeClr val="tx1"/>
-                </a:solidFill>
-                <a:latin typeface="Calibri" panose="020F0502020204030204" pitchFamily="34" charset="0"/>
-              </a:defRPr>
-            </a:lvl4pPr>
-            <a:lvl5pPr marL="2057400" indent="-228600">
-              <a:defRPr>
-                <a:solidFill>
-                  <a:schemeClr val="tx1"/>
-                </a:solidFill>
-                <a:latin typeface="Calibri" panose="020F0502020204030204" pitchFamily="34" charset="0"/>
-              </a:defRPr>
-            </a:lvl5pPr>
-            <a:lvl6pPr marL="2514600" indent="-228600" fontAlgn="base">
-              <a:spcBef>
-                <a:spcPct val="0"/>
-              </a:spcBef>
-              <a:spcAft>
-                <a:spcPct val="0"/>
-              </a:spcAft>
-              <a:defRPr>
-                <a:solidFill>
-                  <a:schemeClr val="tx1"/>
-                </a:solidFill>
-                <a:latin typeface="Calibri" panose="020F0502020204030204" pitchFamily="34" charset="0"/>
-              </a:defRPr>
-            </a:lvl6pPr>
-            <a:lvl7pPr marL="2971800" indent="-228600" fontAlgn="base">
-              <a:spcBef>
-                <a:spcPct val="0"/>
-              </a:spcBef>
-              <a:spcAft>
-                <a:spcPct val="0"/>
-              </a:spcAft>
-              <a:defRPr>
-                <a:solidFill>
-                  <a:schemeClr val="tx1"/>
-                </a:solidFill>
-                <a:latin typeface="Calibri" panose="020F0502020204030204" pitchFamily="34" charset="0"/>
-              </a:defRPr>
-            </a:lvl7pPr>
-            <a:lvl8pPr marL="3429000" indent="-228600" fontAlgn="base">
-              <a:spcBef>
-                <a:spcPct val="0"/>
-              </a:spcBef>
-              <a:spcAft>
-                <a:spcPct val="0"/>
-              </a:spcAft>
-              <a:defRPr>
-                <a:solidFill>
-                  <a:schemeClr val="tx1"/>
-                </a:solidFill>
-                <a:latin typeface="Calibri" panose="020F0502020204030204" pitchFamily="34" charset="0"/>
-              </a:defRPr>
-            </a:lvl8pPr>
-            <a:lvl9pPr marL="3886200" indent="-228600" fontAlgn="base">
-              <a:spcBef>
-                <a:spcPct val="0"/>
-              </a:spcBef>
-              <a:spcAft>
-                <a:spcPct val="0"/>
-              </a:spcAft>
-              <a:defRPr>
-                <a:solidFill>
-                  <a:schemeClr val="tx1"/>
-                </a:solidFill>
-                <a:latin typeface="Calibri" panose="020F0502020204030204" pitchFamily="34" charset="0"/>
-              </a:defRPr>
-            </a:lvl9pPr>
-          </a:lstStyle>
-          <a:p>
-            <a:fld id="{123E174A-FA13-43B4-A63C-BE86EAA1FA76}" type="slidenum">
-              <a:rPr lang="es-ES" altLang="es-ES">
-                <a:solidFill>
-                  <a:srgbClr val="898989"/>
-                </a:solidFill>
-                <a:latin typeface="Cabin Regular" pitchFamily="2" charset="0"/>
-              </a:rPr>
-              <a:pPr/>
-              <a:t>26</a:t>
-            </a:fld>
-            <a:endParaRPr lang="es-ES" altLang="es-ES">
-              <a:solidFill>
-                <a:srgbClr val="898989"/>
-              </a:solidFill>
-              <a:latin typeface="Cabin Regular" pitchFamily="2" charset="0"/>
-            </a:endParaRPr>
-          </a:p>
-        </p:txBody>
-      </p:sp>
-      <p:sp>
-        <p:nvSpPr>
-          <p:cNvPr id="4" name="CuadroTexto 3">
-            <a:extLst>
-              <a:ext uri="{FF2B5EF4-FFF2-40B4-BE49-F238E27FC236}">
-                <a16:creationId xmlns:a16="http://schemas.microsoft.com/office/drawing/2014/main" id="{E0434217-CA6C-3449-B5AA-ABFE7FEE4F43}"/>
-              </a:ext>
-            </a:extLst>
-          </p:cNvPr>
-          <p:cNvSpPr txBox="1"/>
-          <p:nvPr/>
-        </p:nvSpPr>
-        <p:spPr>
-          <a:xfrm>
-            <a:off x="747713" y="2425700"/>
-            <a:ext cx="10606087" cy="3324225"/>
-          </a:xfrm>
-          <a:prstGeom prst="rect">
-            <a:avLst/>
-          </a:prstGeom>
-          <a:noFill/>
-        </p:spPr>
-        <p:txBody>
-          <a:bodyPr>
-            <a:spAutoFit/>
-          </a:bodyPr>
-          <a:lstStyle/>
-          <a:p>
-            <a:pPr eaLnBrk="1" fontAlgn="auto" hangingPunct="1">
-              <a:spcBef>
-                <a:spcPts val="0"/>
-              </a:spcBef>
-              <a:spcAft>
-                <a:spcPts val="0"/>
-              </a:spcAft>
-              <a:defRPr/>
-            </a:pPr>
-            <a:r>
-              <a:rPr lang="es-ES" sz="1600">
-                <a:latin typeface="Cabin" pitchFamily="2" charset="77"/>
-              </a:rPr>
-              <a:t>To </a:t>
-            </a:r>
-            <a:r>
-              <a:rPr lang="es-ES" sz="1600" err="1">
-                <a:latin typeface="Cabin" pitchFamily="2" charset="77"/>
-              </a:rPr>
-              <a:t>integrate</a:t>
-            </a:r>
-            <a:r>
-              <a:rPr lang="es-ES" sz="1600">
-                <a:latin typeface="Cabin" pitchFamily="2" charset="77"/>
-              </a:rPr>
-              <a:t> in a </a:t>
-            </a:r>
-            <a:r>
-              <a:rPr lang="es-ES" sz="1600" err="1">
-                <a:latin typeface="Cabin" pitchFamily="2" charset="77"/>
-              </a:rPr>
-              <a:t>laboratory</a:t>
-            </a:r>
-            <a:r>
-              <a:rPr lang="es-ES" sz="1600">
-                <a:latin typeface="Cabin" pitchFamily="2" charset="77"/>
-              </a:rPr>
-              <a:t> </a:t>
-            </a:r>
-            <a:r>
-              <a:rPr lang="es-ES" sz="1600" err="1">
-                <a:latin typeface="Cabin" pitchFamily="2" charset="77"/>
-              </a:rPr>
-              <a:t>an</a:t>
-            </a:r>
-            <a:r>
-              <a:rPr lang="es-ES" sz="1600">
-                <a:latin typeface="Cabin" pitchFamily="2" charset="77"/>
-              </a:rPr>
-              <a:t> </a:t>
-            </a:r>
-            <a:r>
-              <a:rPr lang="es-ES" sz="1600" err="1">
-                <a:latin typeface="Cabin" pitchFamily="2" charset="77"/>
-              </a:rPr>
-              <a:t>environment</a:t>
-            </a:r>
-            <a:r>
-              <a:rPr lang="es-ES" sz="1600">
-                <a:latin typeface="Cabin" pitchFamily="2" charset="77"/>
-              </a:rPr>
-              <a:t> </a:t>
-            </a:r>
-            <a:r>
-              <a:rPr lang="es-ES" sz="1600" err="1">
-                <a:latin typeface="Cabin" pitchFamily="2" charset="77"/>
-              </a:rPr>
-              <a:t>for</a:t>
-            </a:r>
-            <a:r>
-              <a:rPr lang="es-ES" sz="1600">
-                <a:latin typeface="Cabin" pitchFamily="2" charset="77"/>
-              </a:rPr>
-              <a:t> </a:t>
-            </a:r>
-            <a:r>
-              <a:rPr lang="es-ES" sz="1600" err="1">
-                <a:latin typeface="Cabin" pitchFamily="2" charset="77"/>
-              </a:rPr>
-              <a:t>testing</a:t>
-            </a:r>
-            <a:r>
-              <a:rPr lang="es-ES" sz="1600">
-                <a:latin typeface="Cabin" pitchFamily="2" charset="77"/>
-              </a:rPr>
-              <a:t> of </a:t>
-            </a:r>
-            <a:r>
-              <a:rPr lang="es-ES" sz="1600" err="1">
-                <a:latin typeface="Cabin" pitchFamily="2" charset="77"/>
-              </a:rPr>
-              <a:t>small</a:t>
-            </a:r>
-            <a:r>
-              <a:rPr lang="es-ES" sz="1600">
-                <a:latin typeface="Cabin" pitchFamily="2" charset="77"/>
-              </a:rPr>
-              <a:t> </a:t>
-            </a:r>
-            <a:r>
-              <a:rPr lang="es-ES" sz="1600" err="1">
-                <a:latin typeface="Cabin" pitchFamily="2" charset="77"/>
-              </a:rPr>
-              <a:t>scale</a:t>
-            </a:r>
-            <a:r>
-              <a:rPr lang="es-ES" sz="1600">
-                <a:latin typeface="Cabin" pitchFamily="2" charset="77"/>
-              </a:rPr>
-              <a:t> </a:t>
-            </a:r>
-            <a:r>
-              <a:rPr lang="es-ES" sz="1600" err="1">
-                <a:latin typeface="Cabin" pitchFamily="2" charset="77"/>
-              </a:rPr>
-              <a:t>distributed</a:t>
-            </a:r>
-            <a:r>
-              <a:rPr lang="es-ES" sz="1600">
-                <a:latin typeface="Cabin" pitchFamily="2" charset="77"/>
-              </a:rPr>
-              <a:t> </a:t>
-            </a:r>
-            <a:r>
-              <a:rPr lang="es-ES" sz="1600" err="1">
-                <a:latin typeface="Cabin" pitchFamily="2" charset="77"/>
-              </a:rPr>
-              <a:t>energy</a:t>
-            </a:r>
-            <a:r>
-              <a:rPr lang="es-ES" sz="1600">
-                <a:latin typeface="Cabin" pitchFamily="2" charset="77"/>
-              </a:rPr>
-              <a:t> </a:t>
-            </a:r>
-            <a:r>
-              <a:rPr lang="es-ES" sz="1600" err="1">
-                <a:latin typeface="Cabin" pitchFamily="2" charset="77"/>
-              </a:rPr>
-              <a:t>systems</a:t>
-            </a:r>
-            <a:r>
-              <a:rPr lang="es-ES" sz="1600">
-                <a:latin typeface="Cabin" pitchFamily="2" charset="77"/>
-              </a:rPr>
-              <a:t> and </a:t>
-            </a:r>
-            <a:r>
-              <a:rPr lang="es-ES" sz="1600" err="1">
-                <a:latin typeface="Cabin" pitchFamily="2" charset="77"/>
-              </a:rPr>
-              <a:t>their</a:t>
-            </a:r>
-            <a:r>
-              <a:rPr lang="es-ES" sz="1600">
-                <a:latin typeface="Cabin" pitchFamily="2" charset="77"/>
-              </a:rPr>
-              <a:t> </a:t>
-            </a:r>
-            <a:r>
-              <a:rPr lang="es-ES" sz="1600" err="1">
-                <a:latin typeface="Cabin" pitchFamily="2" charset="77"/>
-              </a:rPr>
-              <a:t>integration</a:t>
-            </a:r>
-            <a:r>
-              <a:rPr lang="es-ES" sz="1600">
-                <a:latin typeface="Cabin" pitchFamily="2" charset="77"/>
-              </a:rPr>
-              <a:t> </a:t>
-            </a:r>
-            <a:r>
-              <a:rPr lang="es-ES" sz="1600" err="1">
-                <a:latin typeface="Cabin" pitchFamily="2" charset="77"/>
-              </a:rPr>
-              <a:t>into</a:t>
-            </a:r>
-            <a:r>
-              <a:rPr lang="es-ES" sz="1600">
-                <a:latin typeface="Cabin" pitchFamily="2" charset="77"/>
-              </a:rPr>
-              <a:t> </a:t>
-            </a:r>
-            <a:r>
-              <a:rPr lang="es-ES" sz="1600" err="1">
-                <a:latin typeface="Cabin" pitchFamily="2" charset="77"/>
-              </a:rPr>
-              <a:t>the</a:t>
-            </a:r>
-            <a:r>
-              <a:rPr lang="es-ES" sz="1600">
-                <a:latin typeface="Cabin" pitchFamily="2" charset="77"/>
-              </a:rPr>
-              <a:t> </a:t>
-            </a:r>
-            <a:r>
-              <a:rPr lang="es-ES" sz="1600" err="1">
-                <a:latin typeface="Cabin" pitchFamily="2" charset="77"/>
-              </a:rPr>
-              <a:t>electrical</a:t>
-            </a:r>
-            <a:r>
-              <a:rPr lang="es-ES" sz="1600">
-                <a:latin typeface="Cabin" pitchFamily="2" charset="77"/>
-              </a:rPr>
-              <a:t>  </a:t>
-            </a:r>
-            <a:r>
-              <a:rPr lang="es-ES" sz="1600" err="1">
-                <a:latin typeface="Cabin" pitchFamily="2" charset="77"/>
-              </a:rPr>
-              <a:t>grid</a:t>
-            </a:r>
-            <a:r>
-              <a:rPr lang="es-ES" sz="1600">
-                <a:latin typeface="Cabin" pitchFamily="2" charset="77"/>
-              </a:rPr>
-              <a:t>. </a:t>
-            </a:r>
-            <a:r>
-              <a:rPr lang="es-ES" sz="1600" err="1">
-                <a:latin typeface="Cabin" pitchFamily="2" charset="77"/>
-              </a:rPr>
-              <a:t>For</a:t>
-            </a:r>
-            <a:r>
-              <a:rPr lang="es-ES" sz="1600">
-                <a:latin typeface="Cabin" pitchFamily="2" charset="77"/>
-              </a:rPr>
-              <a:t> </a:t>
-            </a:r>
-            <a:r>
-              <a:rPr lang="es-ES" sz="1600" err="1">
-                <a:latin typeface="Cabin" pitchFamily="2" charset="77"/>
-              </a:rPr>
-              <a:t>the</a:t>
-            </a:r>
-            <a:r>
-              <a:rPr lang="es-ES" sz="1600">
-                <a:latin typeface="Cabin" pitchFamily="2" charset="77"/>
-              </a:rPr>
-              <a:t> </a:t>
-            </a:r>
-            <a:r>
-              <a:rPr lang="es-ES" sz="1600" err="1">
-                <a:latin typeface="Cabin" pitchFamily="2" charset="77"/>
-              </a:rPr>
-              <a:t>study</a:t>
-            </a:r>
-            <a:r>
-              <a:rPr lang="es-ES" sz="1600">
-                <a:latin typeface="Cabin" pitchFamily="2" charset="77"/>
-              </a:rPr>
-              <a:t> and </a:t>
-            </a:r>
-            <a:r>
-              <a:rPr lang="es-ES" sz="1600" err="1">
-                <a:latin typeface="Cabin" pitchFamily="2" charset="77"/>
-              </a:rPr>
-              <a:t>analysis</a:t>
-            </a:r>
-            <a:r>
-              <a:rPr lang="es-ES" sz="1600">
-                <a:latin typeface="Cabin" pitchFamily="2" charset="77"/>
-              </a:rPr>
-              <a:t>, a </a:t>
-            </a:r>
-            <a:r>
-              <a:rPr lang="es-ES" sz="1600" err="1">
-                <a:latin typeface="Cabin" pitchFamily="2" charset="77"/>
-              </a:rPr>
-              <a:t>four</a:t>
-            </a:r>
-            <a:r>
-              <a:rPr lang="es-ES" sz="1600">
-                <a:latin typeface="Cabin" pitchFamily="2" charset="77"/>
-              </a:rPr>
-              <a:t> </a:t>
-            </a:r>
-            <a:r>
-              <a:rPr lang="es-ES" sz="1600" err="1">
-                <a:latin typeface="Cabin" pitchFamily="2" charset="77"/>
-              </a:rPr>
-              <a:t>level</a:t>
-            </a:r>
-            <a:r>
-              <a:rPr lang="es-ES" sz="1600">
-                <a:latin typeface="Cabin" pitchFamily="2" charset="77"/>
-              </a:rPr>
-              <a:t> </a:t>
-            </a:r>
-            <a:r>
-              <a:rPr lang="es-ES" sz="1600" err="1">
-                <a:latin typeface="Cabin" pitchFamily="2" charset="77"/>
-              </a:rPr>
-              <a:t>approach</a:t>
-            </a:r>
-            <a:r>
-              <a:rPr lang="es-ES" sz="1600">
-                <a:latin typeface="Cabin" pitchFamily="2" charset="77"/>
-              </a:rPr>
-              <a:t> </a:t>
-            </a:r>
-            <a:r>
-              <a:rPr lang="es-ES" sz="1600" err="1">
-                <a:latin typeface="Cabin" pitchFamily="2" charset="77"/>
-              </a:rPr>
-              <a:t>is</a:t>
-            </a:r>
-            <a:r>
-              <a:rPr lang="es-ES" sz="1600">
-                <a:latin typeface="Cabin" pitchFamily="2" charset="77"/>
-              </a:rPr>
-              <a:t> </a:t>
-            </a:r>
-            <a:r>
-              <a:rPr lang="es-ES" sz="1600" err="1">
-                <a:latin typeface="Cabin" pitchFamily="2" charset="77"/>
-              </a:rPr>
-              <a:t>proposed</a:t>
-            </a:r>
-            <a:r>
-              <a:rPr lang="es-ES" sz="1600">
-                <a:latin typeface="Cabin" pitchFamily="2" charset="77"/>
-              </a:rPr>
-              <a:t>: </a:t>
-            </a:r>
-          </a:p>
-          <a:p>
-            <a:pPr eaLnBrk="1" fontAlgn="auto" hangingPunct="1">
-              <a:spcBef>
-                <a:spcPts val="0"/>
-              </a:spcBef>
-              <a:spcAft>
-                <a:spcPts val="0"/>
-              </a:spcAft>
-              <a:defRPr/>
-            </a:pPr>
-            <a:endParaRPr lang="es-ES" sz="1600">
-              <a:latin typeface="Cabin" pitchFamily="2" charset="77"/>
-            </a:endParaRPr>
-          </a:p>
-          <a:p>
-            <a:pPr marL="285750" indent="-285750" eaLnBrk="1" fontAlgn="auto" hangingPunct="1">
-              <a:spcBef>
-                <a:spcPts val="0"/>
-              </a:spcBef>
-              <a:spcAft>
-                <a:spcPts val="0"/>
-              </a:spcAft>
-              <a:buFont typeface="Wingdings" pitchFamily="2" charset="2"/>
-              <a:buChar char="§"/>
-              <a:defRPr/>
-            </a:pPr>
-            <a:r>
-              <a:rPr lang="es-ES" sz="1600" err="1">
-                <a:latin typeface="Cabin" pitchFamily="2" charset="77"/>
-              </a:rPr>
-              <a:t>Development</a:t>
-            </a:r>
-            <a:r>
-              <a:rPr lang="es-ES" sz="1600">
-                <a:latin typeface="Cabin" pitchFamily="2" charset="77"/>
-              </a:rPr>
-              <a:t> of </a:t>
-            </a:r>
-            <a:r>
-              <a:rPr lang="es-ES" sz="1600" err="1">
-                <a:latin typeface="Cabin" pitchFamily="2" charset="77"/>
-              </a:rPr>
-              <a:t>generation</a:t>
-            </a:r>
-            <a:r>
-              <a:rPr lang="es-ES" sz="1600">
-                <a:latin typeface="Cabin" pitchFamily="2" charset="77"/>
-              </a:rPr>
-              <a:t> </a:t>
-            </a:r>
-            <a:r>
-              <a:rPr lang="es-ES" sz="1600" err="1">
-                <a:latin typeface="Cabin" pitchFamily="2" charset="77"/>
-              </a:rPr>
-              <a:t>systems</a:t>
-            </a:r>
-            <a:r>
-              <a:rPr lang="es-ES" sz="1600">
-                <a:latin typeface="Cabin" pitchFamily="2" charset="77"/>
-              </a:rPr>
-              <a:t> and </a:t>
-            </a:r>
-            <a:r>
-              <a:rPr lang="es-ES" sz="1600" err="1">
-                <a:latin typeface="Cabin" pitchFamily="2" charset="77"/>
-              </a:rPr>
-              <a:t>power</a:t>
-            </a:r>
-            <a:r>
-              <a:rPr lang="es-ES" sz="1600">
-                <a:latin typeface="Cabin" pitchFamily="2" charset="77"/>
-              </a:rPr>
-              <a:t> </a:t>
-            </a:r>
-            <a:r>
-              <a:rPr lang="es-ES" sz="1600" err="1">
-                <a:latin typeface="Cabin" pitchFamily="2" charset="77"/>
-              </a:rPr>
-              <a:t>converters</a:t>
-            </a:r>
-            <a:r>
-              <a:rPr lang="es-ES" sz="1600">
-                <a:latin typeface="Cabin" pitchFamily="2" charset="77"/>
-              </a:rPr>
-              <a:t> </a:t>
-            </a:r>
-            <a:r>
-              <a:rPr lang="es-ES" sz="1600" err="1">
-                <a:latin typeface="Cabin" pitchFamily="2" charset="77"/>
-              </a:rPr>
-              <a:t>for</a:t>
-            </a:r>
-            <a:r>
-              <a:rPr lang="es-ES" sz="1600">
-                <a:latin typeface="Cabin" pitchFamily="2" charset="77"/>
-              </a:rPr>
-              <a:t> </a:t>
-            </a:r>
-            <a:r>
-              <a:rPr lang="es-ES" sz="1600" err="1">
-                <a:latin typeface="Cabin" pitchFamily="2" charset="77"/>
-              </a:rPr>
-              <a:t>the</a:t>
-            </a:r>
-            <a:r>
-              <a:rPr lang="es-ES" sz="1600">
-                <a:latin typeface="Cabin" pitchFamily="2" charset="77"/>
-              </a:rPr>
-              <a:t> </a:t>
-            </a:r>
-            <a:r>
-              <a:rPr lang="es-ES" sz="1600" err="1">
-                <a:latin typeface="Cabin" pitchFamily="2" charset="77"/>
-              </a:rPr>
-              <a:t>injection</a:t>
-            </a:r>
-            <a:r>
-              <a:rPr lang="es-ES" sz="1600">
-                <a:latin typeface="Cabin" pitchFamily="2" charset="77"/>
-              </a:rPr>
-              <a:t> of </a:t>
-            </a:r>
-            <a:r>
-              <a:rPr lang="es-ES" sz="1600" err="1">
-                <a:latin typeface="Cabin" pitchFamily="2" charset="77"/>
-              </a:rPr>
-              <a:t>electrical</a:t>
-            </a:r>
-            <a:r>
-              <a:rPr lang="es-ES" sz="1600">
-                <a:latin typeface="Cabin" pitchFamily="2" charset="77"/>
-              </a:rPr>
-              <a:t> </a:t>
-            </a:r>
-            <a:r>
-              <a:rPr lang="es-ES" sz="1600" err="1">
-                <a:latin typeface="Cabin" pitchFamily="2" charset="77"/>
-              </a:rPr>
-              <a:t>energy</a:t>
-            </a:r>
-            <a:r>
-              <a:rPr lang="es-ES" sz="1600">
-                <a:latin typeface="Cabin" pitchFamily="2" charset="77"/>
-              </a:rPr>
-              <a:t> </a:t>
-            </a:r>
-            <a:r>
-              <a:rPr lang="es-ES" sz="1600" err="1">
-                <a:latin typeface="Cabin" pitchFamily="2" charset="77"/>
-              </a:rPr>
-              <a:t>into</a:t>
-            </a:r>
-            <a:r>
-              <a:rPr lang="es-ES" sz="1600">
-                <a:latin typeface="Cabin" pitchFamily="2" charset="77"/>
-              </a:rPr>
-              <a:t> </a:t>
-            </a:r>
-            <a:r>
-              <a:rPr lang="es-ES" sz="1600" err="1">
-                <a:latin typeface="Cabin" pitchFamily="2" charset="77"/>
-              </a:rPr>
-              <a:t>the</a:t>
-            </a:r>
-            <a:r>
-              <a:rPr lang="es-ES" sz="1600">
-                <a:latin typeface="Cabin" pitchFamily="2" charset="77"/>
-              </a:rPr>
-              <a:t> </a:t>
-            </a:r>
-            <a:r>
-              <a:rPr lang="es-ES" sz="1600" err="1">
-                <a:latin typeface="Cabin" pitchFamily="2" charset="77"/>
-              </a:rPr>
-              <a:t>grid</a:t>
-            </a:r>
-            <a:r>
-              <a:rPr lang="es-ES" sz="1600">
-                <a:latin typeface="Cabin" pitchFamily="2" charset="77"/>
-              </a:rPr>
-              <a:t> </a:t>
-            </a:r>
-            <a:r>
-              <a:rPr lang="es-ES" sz="1600" err="1">
-                <a:latin typeface="Cabin" pitchFamily="2" charset="77"/>
-              </a:rPr>
-              <a:t>under</a:t>
-            </a:r>
-            <a:r>
-              <a:rPr lang="es-ES" sz="1600">
-                <a:latin typeface="Cabin" pitchFamily="2" charset="77"/>
-              </a:rPr>
-              <a:t> </a:t>
-            </a:r>
-            <a:r>
-              <a:rPr lang="es-ES" sz="1600" err="1">
-                <a:latin typeface="Cabin" pitchFamily="2" charset="77"/>
-              </a:rPr>
-              <a:t>efficiency</a:t>
-            </a:r>
-            <a:r>
-              <a:rPr lang="es-ES" sz="1600">
-                <a:latin typeface="Cabin" pitchFamily="2" charset="77"/>
-              </a:rPr>
-              <a:t> and </a:t>
-            </a:r>
-            <a:r>
-              <a:rPr lang="es-ES" sz="1600" err="1">
-                <a:latin typeface="Cabin" pitchFamily="2" charset="77"/>
-              </a:rPr>
-              <a:t>reliability</a:t>
-            </a:r>
-            <a:r>
-              <a:rPr lang="es-ES" sz="1600">
-                <a:latin typeface="Cabin" pitchFamily="2" charset="77"/>
-              </a:rPr>
-              <a:t> </a:t>
-            </a:r>
-            <a:r>
-              <a:rPr lang="es-ES" sz="1600" err="1">
-                <a:latin typeface="Cabin" pitchFamily="2" charset="77"/>
-              </a:rPr>
-              <a:t>constraints</a:t>
-            </a:r>
-            <a:r>
-              <a:rPr lang="es-ES" sz="1600">
-                <a:latin typeface="Cabin" pitchFamily="2" charset="77"/>
-              </a:rPr>
-              <a:t>. </a:t>
-            </a:r>
-          </a:p>
-          <a:p>
-            <a:pPr marL="285750" indent="-285750" eaLnBrk="1" fontAlgn="auto" hangingPunct="1">
-              <a:spcBef>
-                <a:spcPts val="0"/>
-              </a:spcBef>
-              <a:spcAft>
-                <a:spcPts val="0"/>
-              </a:spcAft>
-              <a:buFont typeface="Wingdings" pitchFamily="2" charset="2"/>
-              <a:buChar char="§"/>
-              <a:defRPr/>
-            </a:pPr>
-            <a:r>
-              <a:rPr lang="es-ES" sz="1600" err="1">
-                <a:latin typeface="Cabin" pitchFamily="2" charset="77"/>
-              </a:rPr>
-              <a:t>Development</a:t>
-            </a:r>
-            <a:r>
-              <a:rPr lang="es-ES" sz="1600">
-                <a:latin typeface="Cabin" pitchFamily="2" charset="77"/>
-              </a:rPr>
-              <a:t> of </a:t>
-            </a:r>
-            <a:r>
-              <a:rPr lang="es-ES" sz="1600" err="1">
-                <a:latin typeface="Cabin" pitchFamily="2" charset="77"/>
-              </a:rPr>
-              <a:t>energy</a:t>
-            </a:r>
-            <a:r>
-              <a:rPr lang="es-ES" sz="1600">
-                <a:latin typeface="Cabin" pitchFamily="2" charset="77"/>
-              </a:rPr>
-              <a:t> </a:t>
-            </a:r>
-            <a:r>
-              <a:rPr lang="es-ES" sz="1600" err="1">
-                <a:latin typeface="Cabin" pitchFamily="2" charset="77"/>
-              </a:rPr>
-              <a:t>storage</a:t>
-            </a:r>
-            <a:r>
-              <a:rPr lang="es-ES" sz="1600">
-                <a:latin typeface="Cabin" pitchFamily="2" charset="77"/>
-              </a:rPr>
-              <a:t> </a:t>
-            </a:r>
-            <a:r>
-              <a:rPr lang="es-ES" sz="1600" err="1">
-                <a:latin typeface="Cabin" pitchFamily="2" charset="77"/>
-              </a:rPr>
-              <a:t>systems</a:t>
-            </a:r>
-            <a:r>
-              <a:rPr lang="es-ES" sz="1600">
-                <a:latin typeface="Cabin" pitchFamily="2" charset="77"/>
-              </a:rPr>
-              <a:t> </a:t>
-            </a:r>
-            <a:r>
-              <a:rPr lang="es-ES" sz="1600" err="1">
-                <a:latin typeface="Cabin" pitchFamily="2" charset="77"/>
-              </a:rPr>
-              <a:t>for</a:t>
-            </a:r>
-            <a:r>
-              <a:rPr lang="es-ES" sz="1600">
-                <a:latin typeface="Cabin" pitchFamily="2" charset="77"/>
-              </a:rPr>
-              <a:t> </a:t>
-            </a:r>
-            <a:r>
-              <a:rPr lang="es-ES" sz="1600" err="1">
-                <a:latin typeface="Cabin" pitchFamily="2" charset="77"/>
-              </a:rPr>
-              <a:t>the</a:t>
-            </a:r>
-            <a:r>
-              <a:rPr lang="es-ES" sz="1600">
-                <a:latin typeface="Cabin" pitchFamily="2" charset="77"/>
-              </a:rPr>
-              <a:t> </a:t>
-            </a:r>
-            <a:r>
-              <a:rPr lang="es-ES" sz="1600" err="1">
-                <a:latin typeface="Cabin" pitchFamily="2" charset="77"/>
-              </a:rPr>
-              <a:t>compensation</a:t>
-            </a:r>
-            <a:r>
-              <a:rPr lang="es-ES" sz="1600">
-                <a:latin typeface="Cabin" pitchFamily="2" charset="77"/>
-              </a:rPr>
-              <a:t> of </a:t>
-            </a:r>
-            <a:r>
-              <a:rPr lang="es-ES" sz="1600" err="1">
-                <a:latin typeface="Cabin" pitchFamily="2" charset="77"/>
-              </a:rPr>
-              <a:t>transient</a:t>
-            </a:r>
-            <a:r>
-              <a:rPr lang="es-ES" sz="1600">
-                <a:latin typeface="Cabin" pitchFamily="2" charset="77"/>
-              </a:rPr>
-              <a:t> </a:t>
-            </a:r>
-            <a:r>
-              <a:rPr lang="es-ES" sz="1600" err="1">
-                <a:latin typeface="Cabin" pitchFamily="2" charset="77"/>
-              </a:rPr>
-              <a:t>demands</a:t>
-            </a:r>
-            <a:r>
-              <a:rPr lang="es-ES" sz="1600">
-                <a:latin typeface="Cabin" pitchFamily="2" charset="77"/>
-              </a:rPr>
-              <a:t> at </a:t>
-            </a:r>
-            <a:r>
-              <a:rPr lang="es-ES" sz="1600" err="1">
-                <a:latin typeface="Cabin" pitchFamily="2" charset="77"/>
-              </a:rPr>
-              <a:t>the</a:t>
-            </a:r>
-            <a:r>
-              <a:rPr lang="es-ES" sz="1600">
-                <a:latin typeface="Cabin" pitchFamily="2" charset="77"/>
-              </a:rPr>
-              <a:t> </a:t>
-            </a:r>
-            <a:r>
-              <a:rPr lang="es-ES" sz="1600" err="1">
-                <a:latin typeface="Cabin" pitchFamily="2" charset="77"/>
-              </a:rPr>
-              <a:t>electrical</a:t>
-            </a:r>
-            <a:r>
-              <a:rPr lang="es-ES" sz="1600">
-                <a:latin typeface="Cabin" pitchFamily="2" charset="77"/>
-              </a:rPr>
-              <a:t> </a:t>
-            </a:r>
-            <a:r>
-              <a:rPr lang="es-ES" sz="1600" err="1">
-                <a:latin typeface="Cabin" pitchFamily="2" charset="77"/>
-              </a:rPr>
-              <a:t>grid</a:t>
-            </a:r>
-            <a:r>
-              <a:rPr lang="es-ES" sz="1600">
-                <a:latin typeface="Cabin" pitchFamily="2" charset="77"/>
-              </a:rPr>
-              <a:t>, </a:t>
-            </a:r>
-            <a:r>
-              <a:rPr lang="es-ES" sz="1600" err="1">
-                <a:latin typeface="Cabin" pitchFamily="2" charset="77"/>
-              </a:rPr>
-              <a:t>including</a:t>
-            </a:r>
-            <a:r>
-              <a:rPr lang="es-ES" sz="1600">
-                <a:latin typeface="Cabin" pitchFamily="2" charset="77"/>
-              </a:rPr>
-              <a:t> </a:t>
-            </a:r>
-            <a:r>
-              <a:rPr lang="es-ES" sz="1600" err="1">
-                <a:latin typeface="Cabin" pitchFamily="2" charset="77"/>
-              </a:rPr>
-              <a:t>pulsating</a:t>
-            </a:r>
-            <a:r>
-              <a:rPr lang="es-ES" sz="1600">
-                <a:latin typeface="Cabin" pitchFamily="2" charset="77"/>
-              </a:rPr>
-              <a:t> </a:t>
-            </a:r>
-            <a:r>
-              <a:rPr lang="es-ES" sz="1600" err="1">
-                <a:latin typeface="Cabin" pitchFamily="2" charset="77"/>
-              </a:rPr>
-              <a:t>generation</a:t>
-            </a:r>
-            <a:r>
-              <a:rPr lang="es-ES" sz="1600">
-                <a:latin typeface="Cabin" pitchFamily="2" charset="77"/>
-              </a:rPr>
-              <a:t> </a:t>
-            </a:r>
-            <a:r>
-              <a:rPr lang="es-ES" sz="1600" err="1">
-                <a:latin typeface="Cabin" pitchFamily="2" charset="77"/>
-              </a:rPr>
-              <a:t>by</a:t>
-            </a:r>
-            <a:r>
-              <a:rPr lang="es-ES" sz="1600">
-                <a:latin typeface="Cabin" pitchFamily="2" charset="77"/>
-              </a:rPr>
-              <a:t> </a:t>
-            </a:r>
-            <a:r>
-              <a:rPr lang="es-ES" sz="1600" err="1">
-                <a:latin typeface="Cabin" pitchFamily="2" charset="77"/>
-              </a:rPr>
-              <a:t>renewable</a:t>
-            </a:r>
-            <a:r>
-              <a:rPr lang="es-ES" sz="1600">
-                <a:latin typeface="Cabin" pitchFamily="2" charset="77"/>
-              </a:rPr>
-              <a:t> </a:t>
-            </a:r>
-            <a:r>
-              <a:rPr lang="es-ES" sz="1600" err="1">
-                <a:latin typeface="Cabin" pitchFamily="2" charset="77"/>
-              </a:rPr>
-              <a:t>energy</a:t>
-            </a:r>
-            <a:r>
-              <a:rPr lang="es-ES" sz="1600">
-                <a:latin typeface="Cabin" pitchFamily="2" charset="77"/>
-              </a:rPr>
-              <a:t> </a:t>
-            </a:r>
-            <a:r>
-              <a:rPr lang="es-ES" sz="1600" err="1">
-                <a:latin typeface="Cabin" pitchFamily="2" charset="77"/>
-              </a:rPr>
-              <a:t>systems</a:t>
-            </a:r>
-            <a:r>
-              <a:rPr lang="es-ES" sz="1600">
-                <a:latin typeface="Cabin" pitchFamily="2" charset="77"/>
-              </a:rPr>
-              <a:t>, </a:t>
-            </a:r>
-            <a:r>
-              <a:rPr lang="es-ES" sz="1600" err="1">
-                <a:latin typeface="Cabin" pitchFamily="2" charset="77"/>
-              </a:rPr>
-              <a:t>grid</a:t>
-            </a:r>
-            <a:r>
-              <a:rPr lang="es-ES" sz="1600">
-                <a:latin typeface="Cabin" pitchFamily="2" charset="77"/>
-              </a:rPr>
-              <a:t> </a:t>
-            </a:r>
-            <a:r>
-              <a:rPr lang="es-ES" sz="1600" err="1">
-                <a:latin typeface="Cabin" pitchFamily="2" charset="77"/>
-              </a:rPr>
-              <a:t>contingencies</a:t>
-            </a:r>
-            <a:r>
-              <a:rPr lang="es-ES" sz="1600">
-                <a:latin typeface="Cabin" pitchFamily="2" charset="77"/>
-              </a:rPr>
-              <a:t> and virtual </a:t>
-            </a:r>
-            <a:r>
-              <a:rPr lang="es-ES" sz="1600" err="1">
-                <a:latin typeface="Cabin" pitchFamily="2" charset="77"/>
-              </a:rPr>
-              <a:t>zero</a:t>
-            </a:r>
-            <a:r>
-              <a:rPr lang="es-ES" sz="1600">
-                <a:latin typeface="Cabin" pitchFamily="2" charset="77"/>
-              </a:rPr>
-              <a:t> </a:t>
-            </a:r>
-            <a:r>
-              <a:rPr lang="es-ES" sz="1600" err="1">
-                <a:latin typeface="Cabin" pitchFamily="2" charset="77"/>
-              </a:rPr>
-              <a:t>demanding</a:t>
-            </a:r>
-            <a:r>
-              <a:rPr lang="es-ES" sz="1600">
-                <a:latin typeface="Cabin" pitchFamily="2" charset="77"/>
-              </a:rPr>
-              <a:t> </a:t>
-            </a:r>
-            <a:r>
-              <a:rPr lang="es-ES" sz="1600" err="1">
-                <a:latin typeface="Cabin" pitchFamily="2" charset="77"/>
-              </a:rPr>
-              <a:t>energy</a:t>
-            </a:r>
-            <a:r>
-              <a:rPr lang="es-ES" sz="1600">
-                <a:latin typeface="Cabin" pitchFamily="2" charset="77"/>
-              </a:rPr>
-              <a:t> </a:t>
-            </a:r>
-            <a:r>
-              <a:rPr lang="es-ES" sz="1600" err="1">
-                <a:latin typeface="Cabin" pitchFamily="2" charset="77"/>
-              </a:rPr>
-              <a:t>buildings</a:t>
-            </a:r>
-            <a:r>
-              <a:rPr lang="es-ES" sz="1600">
-                <a:latin typeface="Cabin" pitchFamily="2" charset="77"/>
-              </a:rPr>
-              <a:t>. </a:t>
-            </a:r>
-          </a:p>
-          <a:p>
-            <a:pPr marL="285750" indent="-285750" eaLnBrk="1" fontAlgn="auto" hangingPunct="1">
-              <a:spcBef>
-                <a:spcPts val="0"/>
-              </a:spcBef>
-              <a:spcAft>
-                <a:spcPts val="0"/>
-              </a:spcAft>
-              <a:buFont typeface="Wingdings" pitchFamily="2" charset="2"/>
-              <a:buChar char="§"/>
-              <a:defRPr/>
-            </a:pPr>
-            <a:r>
-              <a:rPr lang="es-ES" sz="1600" err="1">
-                <a:latin typeface="Cabin" pitchFamily="2" charset="77"/>
-              </a:rPr>
-              <a:t>Development</a:t>
-            </a:r>
-            <a:r>
-              <a:rPr lang="es-ES" sz="1600">
-                <a:latin typeface="Cabin" pitchFamily="2" charset="77"/>
-              </a:rPr>
-              <a:t> of </a:t>
-            </a:r>
-            <a:r>
-              <a:rPr lang="es-ES" sz="1600" err="1">
-                <a:latin typeface="Cabin" pitchFamily="2" charset="77"/>
-              </a:rPr>
-              <a:t>coordinated</a:t>
-            </a:r>
-            <a:r>
-              <a:rPr lang="es-ES" sz="1600">
-                <a:latin typeface="Cabin" pitchFamily="2" charset="77"/>
-              </a:rPr>
-              <a:t> control </a:t>
-            </a:r>
-            <a:r>
-              <a:rPr lang="es-ES" sz="1600" err="1">
-                <a:latin typeface="Cabin" pitchFamily="2" charset="77"/>
-              </a:rPr>
-              <a:t>strategies</a:t>
-            </a:r>
-            <a:r>
-              <a:rPr lang="es-ES" sz="1600">
-                <a:latin typeface="Cabin" pitchFamily="2" charset="77"/>
-              </a:rPr>
-              <a:t> </a:t>
-            </a:r>
-            <a:r>
-              <a:rPr lang="es-ES" sz="1600" err="1">
-                <a:latin typeface="Cabin" pitchFamily="2" charset="77"/>
-              </a:rPr>
-              <a:t>for</a:t>
-            </a:r>
-            <a:r>
-              <a:rPr lang="es-ES" sz="1600">
-                <a:latin typeface="Cabin" pitchFamily="2" charset="77"/>
-              </a:rPr>
-              <a:t> </a:t>
-            </a:r>
-            <a:r>
-              <a:rPr lang="es-ES" sz="1600" err="1">
-                <a:latin typeface="Cabin" pitchFamily="2" charset="77"/>
-              </a:rPr>
-              <a:t>all</a:t>
-            </a:r>
-            <a:r>
-              <a:rPr lang="es-ES" sz="1600">
-                <a:latin typeface="Cabin" pitchFamily="2" charset="77"/>
-              </a:rPr>
-              <a:t> </a:t>
-            </a:r>
-            <a:r>
-              <a:rPr lang="es-ES" sz="1600" err="1">
-                <a:latin typeface="Cabin" pitchFamily="2" charset="77"/>
-              </a:rPr>
-              <a:t>the</a:t>
-            </a:r>
-            <a:r>
-              <a:rPr lang="es-ES" sz="1600">
-                <a:latin typeface="Cabin" pitchFamily="2" charset="77"/>
-              </a:rPr>
-              <a:t> </a:t>
-            </a:r>
-            <a:r>
-              <a:rPr lang="es-ES" sz="1600" err="1">
-                <a:latin typeface="Cabin" pitchFamily="2" charset="77"/>
-              </a:rPr>
-              <a:t>small</a:t>
-            </a:r>
-            <a:r>
-              <a:rPr lang="es-ES" sz="1600">
-                <a:latin typeface="Cabin" pitchFamily="2" charset="77"/>
-              </a:rPr>
-              <a:t> </a:t>
-            </a:r>
-            <a:r>
-              <a:rPr lang="es-ES" sz="1600" err="1">
-                <a:latin typeface="Cabin" pitchFamily="2" charset="77"/>
-              </a:rPr>
-              <a:t>scale</a:t>
-            </a:r>
-            <a:r>
-              <a:rPr lang="es-ES" sz="1600">
-                <a:latin typeface="Cabin" pitchFamily="2" charset="77"/>
-              </a:rPr>
-              <a:t> </a:t>
-            </a:r>
-            <a:r>
-              <a:rPr lang="es-ES" sz="1600" err="1">
-                <a:latin typeface="Cabin" pitchFamily="2" charset="77"/>
-              </a:rPr>
-              <a:t>generators</a:t>
-            </a:r>
-            <a:r>
-              <a:rPr lang="es-ES" sz="1600">
-                <a:latin typeface="Cabin" pitchFamily="2" charset="77"/>
-              </a:rPr>
-              <a:t> </a:t>
-            </a:r>
-            <a:r>
-              <a:rPr lang="es-ES" sz="1600" err="1">
-                <a:latin typeface="Cabin" pitchFamily="2" charset="77"/>
-              </a:rPr>
-              <a:t>installed</a:t>
-            </a:r>
-            <a:r>
-              <a:rPr lang="es-ES" sz="1600">
-                <a:latin typeface="Cabin" pitchFamily="2" charset="77"/>
-              </a:rPr>
-              <a:t> at </a:t>
-            </a:r>
-            <a:r>
-              <a:rPr lang="es-ES" sz="1600" err="1">
-                <a:latin typeface="Cabin" pitchFamily="2" charset="77"/>
-              </a:rPr>
-              <a:t>the</a:t>
-            </a:r>
-            <a:r>
-              <a:rPr lang="es-ES" sz="1600">
-                <a:latin typeface="Cabin" pitchFamily="2" charset="77"/>
-              </a:rPr>
-              <a:t> </a:t>
-            </a:r>
-            <a:r>
-              <a:rPr lang="es-ES" sz="1600" err="1">
-                <a:latin typeface="Cabin" pitchFamily="2" charset="77"/>
-              </a:rPr>
-              <a:t>grid</a:t>
-            </a:r>
-            <a:r>
-              <a:rPr lang="es-ES" sz="1600">
-                <a:latin typeface="Cabin" pitchFamily="2" charset="77"/>
-              </a:rPr>
-              <a:t> in </a:t>
-            </a:r>
-            <a:r>
-              <a:rPr lang="es-ES" sz="1600" err="1">
-                <a:latin typeface="Cabin" pitchFamily="2" charset="77"/>
-              </a:rPr>
-              <a:t>order</a:t>
-            </a:r>
-            <a:r>
-              <a:rPr lang="es-ES" sz="1600">
-                <a:latin typeface="Cabin" pitchFamily="2" charset="77"/>
-              </a:rPr>
-              <a:t> </a:t>
-            </a:r>
-            <a:r>
-              <a:rPr lang="es-ES" sz="1600" err="1">
-                <a:latin typeface="Cabin" pitchFamily="2" charset="77"/>
-              </a:rPr>
-              <a:t>the</a:t>
-            </a:r>
-            <a:r>
-              <a:rPr lang="es-ES" sz="1600">
-                <a:latin typeface="Cabin" pitchFamily="2" charset="77"/>
-              </a:rPr>
-              <a:t> </a:t>
-            </a:r>
-            <a:r>
-              <a:rPr lang="es-ES" sz="1600" err="1">
-                <a:latin typeface="Cabin" pitchFamily="2" charset="77"/>
-              </a:rPr>
-              <a:t>system</a:t>
-            </a:r>
-            <a:r>
-              <a:rPr lang="es-ES" sz="1600">
-                <a:latin typeface="Cabin" pitchFamily="2" charset="77"/>
-              </a:rPr>
-              <a:t> to </a:t>
-            </a:r>
-            <a:r>
-              <a:rPr lang="es-ES" sz="1600" err="1">
-                <a:latin typeface="Cabin" pitchFamily="2" charset="77"/>
-              </a:rPr>
-              <a:t>behave</a:t>
-            </a:r>
-            <a:r>
-              <a:rPr lang="es-ES" sz="1600">
-                <a:latin typeface="Cabin" pitchFamily="2" charset="77"/>
-              </a:rPr>
-              <a:t> as a virtual </a:t>
-            </a:r>
-            <a:r>
-              <a:rPr lang="es-ES" sz="1600" err="1">
-                <a:latin typeface="Cabin" pitchFamily="2" charset="77"/>
-              </a:rPr>
-              <a:t>integrated</a:t>
-            </a:r>
-            <a:r>
-              <a:rPr lang="es-ES" sz="1600">
-                <a:latin typeface="Cabin" pitchFamily="2" charset="77"/>
-              </a:rPr>
-              <a:t> </a:t>
-            </a:r>
-            <a:r>
-              <a:rPr lang="es-ES" sz="1600" err="1">
-                <a:latin typeface="Cabin" pitchFamily="2" charset="77"/>
-              </a:rPr>
-              <a:t>power</a:t>
-            </a:r>
-            <a:r>
-              <a:rPr lang="es-ES" sz="1600">
-                <a:latin typeface="Cabin" pitchFamily="2" charset="77"/>
-              </a:rPr>
-              <a:t> </a:t>
-            </a:r>
-            <a:r>
-              <a:rPr lang="es-ES" sz="1600" err="1">
-                <a:latin typeface="Cabin" pitchFamily="2" charset="77"/>
-              </a:rPr>
-              <a:t>plant</a:t>
-            </a:r>
-            <a:r>
-              <a:rPr lang="es-ES" sz="1600">
-                <a:latin typeface="Cabin" pitchFamily="2" charset="77"/>
-              </a:rPr>
-              <a:t>. </a:t>
-            </a:r>
-            <a:r>
-              <a:rPr lang="es-ES" sz="1600" err="1">
-                <a:latin typeface="Cabin" pitchFamily="2" charset="77"/>
-              </a:rPr>
-              <a:t>Development</a:t>
-            </a:r>
-            <a:r>
-              <a:rPr lang="es-ES" sz="1600">
-                <a:latin typeface="Cabin" pitchFamily="2" charset="77"/>
-              </a:rPr>
-              <a:t> of new </a:t>
-            </a:r>
-            <a:r>
-              <a:rPr lang="es-ES" sz="1600" err="1">
-                <a:latin typeface="Cabin" pitchFamily="2" charset="77"/>
-              </a:rPr>
-              <a:t>power</a:t>
-            </a:r>
-            <a:r>
-              <a:rPr lang="es-ES" sz="1600">
-                <a:latin typeface="Cabin" pitchFamily="2" charset="77"/>
-              </a:rPr>
-              <a:t> </a:t>
-            </a:r>
-            <a:r>
-              <a:rPr lang="es-ES" sz="1600" err="1">
-                <a:latin typeface="Cabin" pitchFamily="2" charset="77"/>
-              </a:rPr>
-              <a:t>flow</a:t>
-            </a:r>
-            <a:r>
-              <a:rPr lang="es-ES" sz="1600">
-                <a:latin typeface="Cabin" pitchFamily="2" charset="77"/>
-              </a:rPr>
-              <a:t> </a:t>
-            </a:r>
-            <a:r>
-              <a:rPr lang="es-ES" sz="1600" err="1">
-                <a:latin typeface="Cabin" pitchFamily="2" charset="77"/>
-              </a:rPr>
-              <a:t>algorithms</a:t>
-            </a:r>
-            <a:r>
-              <a:rPr lang="es-ES" sz="1600">
-                <a:latin typeface="Cabin" pitchFamily="2" charset="77"/>
-              </a:rPr>
-              <a:t> </a:t>
-            </a:r>
-            <a:r>
-              <a:rPr lang="es-ES" sz="1600" err="1">
-                <a:latin typeface="Cabin" pitchFamily="2" charset="77"/>
-              </a:rPr>
-              <a:t>for</a:t>
-            </a:r>
-            <a:r>
-              <a:rPr lang="es-ES" sz="1600">
-                <a:latin typeface="Cabin" pitchFamily="2" charset="77"/>
-              </a:rPr>
-              <a:t> </a:t>
-            </a:r>
-            <a:r>
-              <a:rPr lang="es-ES" sz="1600" err="1">
-                <a:latin typeface="Cabin" pitchFamily="2" charset="77"/>
-              </a:rPr>
-              <a:t>considering</a:t>
-            </a:r>
-            <a:r>
-              <a:rPr lang="es-ES" sz="1600">
-                <a:latin typeface="Cabin" pitchFamily="2" charset="77"/>
-              </a:rPr>
-              <a:t> </a:t>
-            </a:r>
-            <a:r>
-              <a:rPr lang="es-ES" sz="1600" err="1">
-                <a:latin typeface="Cabin" pitchFamily="2" charset="77"/>
-              </a:rPr>
-              <a:t>the</a:t>
-            </a:r>
-            <a:r>
-              <a:rPr lang="es-ES" sz="1600">
-                <a:latin typeface="Cabin" pitchFamily="2" charset="77"/>
-              </a:rPr>
-              <a:t> </a:t>
-            </a:r>
-            <a:r>
-              <a:rPr lang="es-ES" sz="1600" err="1">
-                <a:latin typeface="Cabin" pitchFamily="2" charset="77"/>
-              </a:rPr>
-              <a:t>unbalanced</a:t>
-            </a:r>
-            <a:r>
-              <a:rPr lang="es-ES" sz="1600">
-                <a:latin typeface="Cabin" pitchFamily="2" charset="77"/>
-              </a:rPr>
-              <a:t> </a:t>
-            </a:r>
-            <a:r>
-              <a:rPr lang="es-ES" sz="1600" err="1">
-                <a:latin typeface="Cabin" pitchFamily="2" charset="77"/>
-              </a:rPr>
-              <a:t>conditions</a:t>
-            </a:r>
-            <a:r>
-              <a:rPr lang="es-ES" sz="1600">
-                <a:latin typeface="Cabin" pitchFamily="2" charset="77"/>
-              </a:rPr>
-              <a:t> at </a:t>
-            </a:r>
-            <a:r>
-              <a:rPr lang="es-ES" sz="1600" err="1">
-                <a:latin typeface="Cabin" pitchFamily="2" charset="77"/>
-              </a:rPr>
-              <a:t>weak</a:t>
-            </a:r>
-            <a:r>
-              <a:rPr lang="es-ES" sz="1600">
-                <a:latin typeface="Cabin" pitchFamily="2" charset="77"/>
-              </a:rPr>
-              <a:t> </a:t>
-            </a:r>
-            <a:r>
-              <a:rPr lang="es-ES" sz="1600" err="1">
-                <a:latin typeface="Cabin" pitchFamily="2" charset="77"/>
-              </a:rPr>
-              <a:t>grids</a:t>
-            </a:r>
-            <a:r>
-              <a:rPr lang="es-ES" sz="1600">
-                <a:latin typeface="Cabin" pitchFamily="2" charset="77"/>
-              </a:rPr>
-              <a:t> (single </a:t>
-            </a:r>
-            <a:r>
-              <a:rPr lang="es-ES" sz="1600" err="1">
-                <a:latin typeface="Cabin" pitchFamily="2" charset="77"/>
-              </a:rPr>
-              <a:t>phase</a:t>
-            </a:r>
-            <a:r>
-              <a:rPr lang="es-ES" sz="1600">
-                <a:latin typeface="Cabin" pitchFamily="2" charset="77"/>
-              </a:rPr>
-              <a:t> </a:t>
-            </a:r>
-            <a:r>
-              <a:rPr lang="es-ES" sz="1600" err="1">
-                <a:latin typeface="Cabin" pitchFamily="2" charset="77"/>
-              </a:rPr>
-              <a:t>loads</a:t>
-            </a:r>
-            <a:r>
-              <a:rPr lang="es-ES" sz="1600">
-                <a:latin typeface="Cabin" pitchFamily="2" charset="77"/>
-              </a:rPr>
-              <a:t> and </a:t>
-            </a:r>
-            <a:r>
-              <a:rPr lang="es-ES" sz="1600" err="1">
-                <a:latin typeface="Cabin" pitchFamily="2" charset="77"/>
-              </a:rPr>
-              <a:t>generation</a:t>
-            </a:r>
-            <a:r>
-              <a:rPr lang="es-ES" sz="1600">
-                <a:latin typeface="Cabin" pitchFamily="2" charset="77"/>
-              </a:rPr>
-              <a:t> </a:t>
-            </a:r>
-            <a:r>
-              <a:rPr lang="es-ES" sz="1600" err="1">
-                <a:latin typeface="Cabin" pitchFamily="2" charset="77"/>
-              </a:rPr>
-              <a:t>systems</a:t>
-            </a:r>
-            <a:r>
-              <a:rPr lang="es-ES" sz="1600">
-                <a:latin typeface="Cabin" pitchFamily="2" charset="77"/>
-              </a:rPr>
-              <a:t>). </a:t>
-            </a:r>
-          </a:p>
-          <a:p>
-            <a:pPr marL="285750" indent="-285750" eaLnBrk="1" fontAlgn="auto" hangingPunct="1">
-              <a:spcBef>
-                <a:spcPts val="0"/>
-              </a:spcBef>
-              <a:spcAft>
-                <a:spcPts val="0"/>
-              </a:spcAft>
-              <a:buFont typeface="Wingdings" pitchFamily="2" charset="2"/>
-              <a:buChar char="§"/>
-              <a:defRPr/>
-            </a:pPr>
-            <a:r>
-              <a:rPr lang="es-ES" sz="1600" err="1">
-                <a:latin typeface="Cabin" pitchFamily="2" charset="77"/>
-              </a:rPr>
-              <a:t>Study</a:t>
-            </a:r>
-            <a:r>
-              <a:rPr lang="es-ES" sz="1600">
-                <a:latin typeface="Cabin" pitchFamily="2" charset="77"/>
-              </a:rPr>
-              <a:t> of new </a:t>
-            </a:r>
-            <a:r>
-              <a:rPr lang="es-ES" sz="1600" err="1">
-                <a:latin typeface="Cabin" pitchFamily="2" charset="77"/>
-              </a:rPr>
-              <a:t>economic</a:t>
-            </a:r>
-            <a:r>
-              <a:rPr lang="es-ES" sz="1600">
-                <a:latin typeface="Cabin" pitchFamily="2" charset="77"/>
-              </a:rPr>
-              <a:t> and </a:t>
-            </a:r>
-            <a:r>
-              <a:rPr lang="es-ES" sz="1600" err="1">
-                <a:latin typeface="Cabin" pitchFamily="2" charset="77"/>
-              </a:rPr>
-              <a:t>infrastructure</a:t>
-            </a:r>
-            <a:r>
-              <a:rPr lang="es-ES" sz="1600">
-                <a:latin typeface="Cabin" pitchFamily="2" charset="77"/>
-              </a:rPr>
-              <a:t> </a:t>
-            </a:r>
-            <a:r>
-              <a:rPr lang="es-ES" sz="1600" err="1">
-                <a:latin typeface="Cabin" pitchFamily="2" charset="77"/>
-              </a:rPr>
-              <a:t>models</a:t>
-            </a:r>
-            <a:r>
-              <a:rPr lang="es-ES" sz="1600">
-                <a:latin typeface="Cabin" pitchFamily="2" charset="77"/>
-              </a:rPr>
-              <a:t> </a:t>
-            </a:r>
-            <a:r>
-              <a:rPr lang="es-ES" sz="1600" err="1">
-                <a:latin typeface="Cabin" pitchFamily="2" charset="77"/>
-              </a:rPr>
-              <a:t>relying</a:t>
-            </a:r>
-            <a:r>
-              <a:rPr lang="es-ES" sz="1600">
-                <a:latin typeface="Cabin" pitchFamily="2" charset="77"/>
-              </a:rPr>
-              <a:t> </a:t>
-            </a:r>
-            <a:r>
-              <a:rPr lang="es-ES" sz="1600" err="1">
-                <a:latin typeface="Cabin" pitchFamily="2" charset="77"/>
-              </a:rPr>
-              <a:t>on</a:t>
-            </a:r>
-            <a:r>
-              <a:rPr lang="es-ES" sz="1600">
-                <a:latin typeface="Cabin" pitchFamily="2" charset="77"/>
-              </a:rPr>
-              <a:t> </a:t>
-            </a:r>
-            <a:r>
-              <a:rPr lang="es-ES" sz="1600" err="1">
-                <a:latin typeface="Cabin" pitchFamily="2" charset="77"/>
-              </a:rPr>
-              <a:t>the</a:t>
-            </a:r>
-            <a:r>
-              <a:rPr lang="es-ES" sz="1600">
-                <a:latin typeface="Cabin" pitchFamily="2" charset="77"/>
-              </a:rPr>
-              <a:t> </a:t>
-            </a:r>
-            <a:r>
-              <a:rPr lang="es-ES" sz="1600" err="1">
-                <a:latin typeface="Cabin" pitchFamily="2" charset="77"/>
-              </a:rPr>
-              <a:t>distributed</a:t>
-            </a:r>
-            <a:r>
-              <a:rPr lang="es-ES" sz="1600">
-                <a:latin typeface="Cabin" pitchFamily="2" charset="77"/>
-              </a:rPr>
-              <a:t> </a:t>
-            </a:r>
-            <a:r>
-              <a:rPr lang="es-ES" sz="1600" err="1">
-                <a:latin typeface="Cabin" pitchFamily="2" charset="77"/>
-              </a:rPr>
-              <a:t>generation</a:t>
-            </a:r>
-            <a:r>
-              <a:rPr lang="es-ES" sz="1600">
-                <a:latin typeface="Cabin" pitchFamily="2" charset="77"/>
-              </a:rPr>
-              <a:t>, </a:t>
-            </a:r>
-            <a:r>
-              <a:rPr lang="es-ES" sz="1600" err="1">
-                <a:latin typeface="Cabin" pitchFamily="2" charset="77"/>
-              </a:rPr>
-              <a:t>which</a:t>
-            </a:r>
-            <a:r>
-              <a:rPr lang="es-ES" sz="1600">
-                <a:latin typeface="Cabin" pitchFamily="2" charset="77"/>
-              </a:rPr>
-              <a:t> </a:t>
-            </a:r>
-            <a:r>
-              <a:rPr lang="es-ES" sz="1600" err="1">
-                <a:latin typeface="Cabin" pitchFamily="2" charset="77"/>
-              </a:rPr>
-              <a:t>allow</a:t>
-            </a:r>
-            <a:r>
-              <a:rPr lang="es-ES" sz="1600">
-                <a:latin typeface="Cabin" pitchFamily="2" charset="77"/>
-              </a:rPr>
-              <a:t> to </a:t>
-            </a:r>
-            <a:r>
-              <a:rPr lang="es-ES" sz="1600" err="1">
-                <a:latin typeface="Cabin" pitchFamily="2" charset="77"/>
-              </a:rPr>
-              <a:t>maximize</a:t>
-            </a:r>
-            <a:r>
-              <a:rPr lang="es-ES" sz="1600">
-                <a:latin typeface="Cabin" pitchFamily="2" charset="77"/>
-              </a:rPr>
-              <a:t> </a:t>
-            </a:r>
-            <a:r>
-              <a:rPr lang="es-ES" sz="1600" err="1">
-                <a:latin typeface="Cabin" pitchFamily="2" charset="77"/>
-              </a:rPr>
-              <a:t>the</a:t>
-            </a:r>
-            <a:r>
-              <a:rPr lang="es-ES" sz="1600">
-                <a:latin typeface="Cabin" pitchFamily="2" charset="77"/>
-              </a:rPr>
-              <a:t> </a:t>
-            </a:r>
-            <a:r>
-              <a:rPr lang="es-ES" sz="1600" err="1">
-                <a:latin typeface="Cabin" pitchFamily="2" charset="77"/>
-              </a:rPr>
-              <a:t>benefits</a:t>
-            </a:r>
-            <a:r>
-              <a:rPr lang="es-ES" sz="1600">
-                <a:latin typeface="Cabin" pitchFamily="2" charset="77"/>
-              </a:rPr>
-              <a:t> </a:t>
-            </a:r>
-            <a:r>
-              <a:rPr lang="es-ES" sz="1600" err="1">
-                <a:latin typeface="Cabin" pitchFamily="2" charset="77"/>
-              </a:rPr>
-              <a:t>considering</a:t>
-            </a:r>
-            <a:r>
-              <a:rPr lang="es-ES" sz="1600">
-                <a:latin typeface="Cabin" pitchFamily="2" charset="77"/>
-              </a:rPr>
-              <a:t> </a:t>
-            </a:r>
-            <a:r>
-              <a:rPr lang="es-ES" sz="1600" err="1">
-                <a:latin typeface="Cabin" pitchFamily="2" charset="77"/>
-              </a:rPr>
-              <a:t>the</a:t>
-            </a:r>
-            <a:r>
-              <a:rPr lang="es-ES" sz="1600">
-                <a:latin typeface="Cabin" pitchFamily="2" charset="77"/>
-              </a:rPr>
-              <a:t> </a:t>
-            </a:r>
-            <a:r>
-              <a:rPr lang="es-ES" sz="1600" err="1">
-                <a:latin typeface="Cabin" pitchFamily="2" charset="77"/>
-              </a:rPr>
-              <a:t>existing</a:t>
-            </a:r>
-            <a:r>
-              <a:rPr lang="es-ES" sz="1600">
-                <a:latin typeface="Cabin" pitchFamily="2" charset="77"/>
-              </a:rPr>
-              <a:t> and </a:t>
-            </a:r>
-            <a:r>
-              <a:rPr lang="es-ES" sz="1600" err="1">
-                <a:latin typeface="Cabin" pitchFamily="2" charset="77"/>
-              </a:rPr>
-              <a:t>future</a:t>
-            </a:r>
-            <a:r>
-              <a:rPr lang="es-ES" sz="1600">
-                <a:latin typeface="Cabin" pitchFamily="2" charset="77"/>
-              </a:rPr>
-              <a:t> </a:t>
-            </a:r>
-            <a:r>
-              <a:rPr lang="es-ES" sz="1600" err="1">
-                <a:latin typeface="Cabin" pitchFamily="2" charset="77"/>
-              </a:rPr>
-              <a:t>regulations</a:t>
-            </a:r>
-            <a:r>
-              <a:rPr lang="es-ES" sz="1600">
-                <a:latin typeface="Cabin" pitchFamily="2" charset="77"/>
-              </a:rPr>
-              <a:t>. </a:t>
-            </a:r>
-          </a:p>
-          <a:p>
-            <a:pPr eaLnBrk="1" fontAlgn="auto" hangingPunct="1">
-              <a:spcBef>
-                <a:spcPts val="0"/>
-              </a:spcBef>
-              <a:spcAft>
-                <a:spcPts val="0"/>
-              </a:spcAft>
-              <a:defRPr/>
-            </a:pPr>
-            <a:endParaRPr lang="es-ES">
-              <a:latin typeface="Cabin Regular" pitchFamily="2" charset="77"/>
-            </a:endParaRPr>
-          </a:p>
-        </p:txBody>
-      </p:sp>
-      <p:sp>
-        <p:nvSpPr>
-          <p:cNvPr id="5" name="CuadroTexto 4">
-            <a:extLst>
-              <a:ext uri="{FF2B5EF4-FFF2-40B4-BE49-F238E27FC236}">
-                <a16:creationId xmlns:a16="http://schemas.microsoft.com/office/drawing/2014/main" id="{F020C799-E239-A148-ADF3-3681DDC4490E}"/>
-              </a:ext>
-            </a:extLst>
-          </p:cNvPr>
-          <p:cNvSpPr txBox="1"/>
-          <p:nvPr/>
-        </p:nvSpPr>
-        <p:spPr>
-          <a:xfrm>
-            <a:off x="747713" y="1725613"/>
-            <a:ext cx="5106987" cy="461962"/>
-          </a:xfrm>
-          <a:prstGeom prst="rect">
-            <a:avLst/>
-          </a:prstGeom>
-          <a:noFill/>
-        </p:spPr>
-        <p:txBody>
-          <a:bodyPr>
-            <a:spAutoFit/>
-          </a:bodyPr>
-          <a:lstStyle/>
-          <a:p>
-            <a:pPr eaLnBrk="1" fontAlgn="auto" hangingPunct="1">
-              <a:spcBef>
-                <a:spcPts val="0"/>
-              </a:spcBef>
-              <a:spcAft>
-                <a:spcPts val="0"/>
-              </a:spcAft>
-              <a:defRPr/>
-            </a:pPr>
-            <a:r>
-              <a:rPr lang="es-ES" sz="2400" b="1" spc="300">
-                <a:latin typeface="Open Sans Extrabold" panose="020B0606030504020204" pitchFamily="34" charset="0"/>
-                <a:ea typeface="Open Sans Extrabold" panose="020B0606030504020204" pitchFamily="34" charset="0"/>
-                <a:cs typeface="Open Sans Extrabold" panose="020B0606030504020204" pitchFamily="34" charset="0"/>
-              </a:rPr>
-              <a:t>OUR VISION</a:t>
-            </a:r>
-          </a:p>
-        </p:txBody>
-      </p:sp>
-      <p:sp>
-        <p:nvSpPr>
-          <p:cNvPr id="6" name="Rectángulo 5">
-            <a:extLst>
-              <a:ext uri="{FF2B5EF4-FFF2-40B4-BE49-F238E27FC236}">
-                <a16:creationId xmlns:a16="http://schemas.microsoft.com/office/drawing/2014/main" id="{4D37A48B-ED06-684C-B584-66BF4D12E5C0}"/>
-              </a:ext>
-            </a:extLst>
-          </p:cNvPr>
-          <p:cNvSpPr/>
-          <p:nvPr/>
-        </p:nvSpPr>
-        <p:spPr>
-          <a:xfrm flipV="1">
-            <a:off x="3295650" y="2008188"/>
-            <a:ext cx="7808913" cy="46037"/>
-          </a:xfrm>
-          <a:prstGeom prst="rect">
-            <a:avLst/>
-          </a:prstGeom>
-          <a:solidFill>
-            <a:srgbClr val="FFCC28"/>
-          </a:solidFill>
-          <a:ln>
-            <a:noFill/>
-          </a:ln>
-        </p:spPr>
-        <p:style>
-          <a:lnRef idx="2">
-            <a:schemeClr val="accent1">
-              <a:shade val="50000"/>
-            </a:schemeClr>
-          </a:lnRef>
-          <a:fillRef idx="1">
-            <a:schemeClr val="accent1"/>
-          </a:fillRef>
-          <a:effectRef idx="0">
-            <a:schemeClr val="accent1"/>
-          </a:effectRef>
-          <a:fontRef idx="minor">
-            <a:schemeClr val="lt1"/>
-          </a:fontRef>
-        </p:style>
-        <p:txBody>
-          <a:bodyPr anchor="ctr"/>
-          <a:lstStyle/>
-          <a:p>
-            <a:pPr algn="ctr" eaLnBrk="1" fontAlgn="auto" hangingPunct="1">
-              <a:spcBef>
-                <a:spcPts val="0"/>
-              </a:spcBef>
-              <a:spcAft>
-                <a:spcPts val="0"/>
-              </a:spcAft>
-              <a:defRPr/>
-            </a:pPr>
-            <a:endParaRPr lang="es-ES">
-              <a:latin typeface="Cabin Regular" pitchFamily="2" charset="77"/>
-            </a:endParaRPr>
-          </a:p>
-        </p:txBody>
-      </p:sp>
-      <p:pic>
-        <p:nvPicPr>
-          <p:cNvPr id="11" name="Imagen 5">
-            <a:extLst>
-              <a:ext uri="{FF2B5EF4-FFF2-40B4-BE49-F238E27FC236}">
-                <a16:creationId xmlns:a16="http://schemas.microsoft.com/office/drawing/2014/main" id="{0691187F-7426-2E50-268E-DAD0E153A36F}"/>
-              </a:ext>
-            </a:extLst>
-          </p:cNvPr>
-          <p:cNvPicPr>
-            <a:picLocks noChangeAspect="1" noChangeArrowheads="1"/>
-          </p:cNvPicPr>
-          <p:nvPr/>
-        </p:nvPicPr>
-        <p:blipFill>
-          <a:blip r:embed="rId2">
-            <a:extLst>
-              <a:ext uri="{28A0092B-C50C-407E-A947-70E740481C1C}">
-                <a14:useLocalDpi xmlns:a14="http://schemas.microsoft.com/office/drawing/2010/main" val="0"/>
-              </a:ext>
-            </a:extLst>
-          </a:blip>
-          <a:srcRect/>
-          <a:stretch>
-            <a:fillRect/>
-          </a:stretch>
-        </p:blipFill>
-        <p:spPr bwMode="auto">
-          <a:xfrm>
-            <a:off x="11129080" y="122503"/>
-            <a:ext cx="904080" cy="809624"/>
-          </a:xfrm>
-          <a:prstGeom prst="rect">
-            <a:avLst/>
-          </a:prstGeom>
-          <a:noFill/>
-          <a:ln>
-            <a:noFill/>
-          </a:ln>
-          <a:extLst>
-            <a:ext uri="{909E8E84-426E-40DD-AFC4-6F175D3DCCD1}">
-              <a14:hiddenFill xmlns:a14="http://schemas.microsoft.com/office/drawing/2010/main">
-                <a:solidFill>
-                  <a:srgbClr val="FFFFFF"/>
-                </a:solidFill>
-              </a14:hiddenFill>
-            </a:ext>
-            <a:ext uri="{91240B29-F687-4F45-9708-019B960494DF}">
-              <a14:hiddenLine xmlns:a14="http://schemas.microsoft.com/office/drawing/2010/main" w="9525">
-                <a:solidFill>
-                  <a:srgbClr val="000000"/>
-                </a:solidFill>
-                <a:miter lim="800000"/>
-                <a:headEnd/>
-                <a:tailEnd/>
-              </a14:hiddenLine>
-            </a:ext>
-          </a:extLst>
-        </p:spPr>
-      </p:pic>
-      <p:pic>
-        <p:nvPicPr>
-          <p:cNvPr id="12" name="Picture 2">
-            <a:extLst>
-              <a:ext uri="{FF2B5EF4-FFF2-40B4-BE49-F238E27FC236}">
-                <a16:creationId xmlns:a16="http://schemas.microsoft.com/office/drawing/2014/main" id="{E64C7E90-E453-BCEB-4D85-7A78E5BB0436}"/>
-              </a:ext>
-            </a:extLst>
-          </p:cNvPr>
-          <p:cNvPicPr>
-            <a:picLocks noChangeAspect="1" noChangeArrowheads="1"/>
-          </p:cNvPicPr>
-          <p:nvPr/>
-        </p:nvPicPr>
-        <p:blipFill>
-          <a:blip r:embed="rId3">
             <a:extLst>
               <a:ext uri="{28A0092B-C50C-407E-A947-70E740481C1C}">
                 <a14:useLocalDpi xmlns:a14="http://schemas.microsoft.com/office/drawing/2010/main" val="0"/>
@@ -16728,7 +15504,7 @@
           <p:cNvPr id="3" name="Marcador de número de diapositiva 2">
             <a:extLst>
               <a:ext uri="{FF2B5EF4-FFF2-40B4-BE49-F238E27FC236}">
-                <a16:creationId xmlns:a16="http://schemas.microsoft.com/office/drawing/2014/main" id="{161E976B-3C33-384A-A0AE-D160C204AFAC}"/>
+                <a16:creationId xmlns:a16="http://schemas.microsoft.com/office/drawing/2014/main" id="{870F7993-F312-F046-A97F-903138B44A98}"/>
               </a:ext>
             </a:extLst>
           </p:cNvPr>
@@ -16841,7 +15617,7 @@
             </a:lvl9pPr>
           </a:lstStyle>
           <a:p>
-            <a:fld id="{4BBE97E3-8C9F-42E3-9D89-BE392B084C60}" type="slidenum">
+            <a:fld id="{123E174A-FA13-43B4-A63C-BE86EAA1FA76}" type="slidenum">
               <a:rPr lang="es-ES" altLang="es-ES">
                 <a:solidFill>
                   <a:srgbClr val="898989"/>
@@ -16865,7 +15641,7 @@
           <p:cNvPr id="4" name="CuadroTexto 3">
             <a:extLst>
               <a:ext uri="{FF2B5EF4-FFF2-40B4-BE49-F238E27FC236}">
-                <a16:creationId xmlns:a16="http://schemas.microsoft.com/office/drawing/2014/main" id="{24A2567D-D3EE-1448-8A0B-D571F1852224}"/>
+                <a16:creationId xmlns:a16="http://schemas.microsoft.com/office/drawing/2014/main" id="{E0434217-CA6C-3449-B5AA-ABFE7FEE4F43}"/>
               </a:ext>
             </a:extLst>
           </p:cNvPr>
@@ -16874,8 +15650,8 @@
         </p:nvSpPr>
         <p:spPr>
           <a:xfrm>
-            <a:off x="-1419225" y="1725613"/>
-            <a:ext cx="5106988" cy="831850"/>
+            <a:off x="747713" y="2425700"/>
+            <a:ext cx="10606087" cy="3324225"/>
           </a:xfrm>
           <a:prstGeom prst="rect">
             <a:avLst/>
@@ -16888,7 +15664,7 @@
           </a:bodyPr>
           <a:lstStyle/>
           <a:p>
-            <a:pPr algn="r" eaLnBrk="1" fontAlgn="auto" hangingPunct="1">
+            <a:pPr eaLnBrk="1" fontAlgn="auto" hangingPunct="1">
               <a:spcBef>
                 <a:spcPts val="0"/>
               </a:spcBef>
@@ -16898,16 +15674,326 @@
               <a:defRPr/>
             </a:pPr>
             <a:r>
-              <a:rPr lang="es-ES" sz="2400" b="1" spc="300">
-                <a:latin typeface="Open Sans Extrabold" panose="020B0606030504020204" pitchFamily="34" charset="0"/>
-                <a:ea typeface="Open Sans Extrabold" panose="020B0606030504020204" pitchFamily="34" charset="0"/>
-                <a:cs typeface="Open Sans Extrabold" panose="020B0606030504020204" pitchFamily="34" charset="0"/>
-              </a:rPr>
-              <a:t>OUR RESEARCH </a:t>
-            </a:r>
-          </a:p>
-          <a:p>
-            <a:pPr algn="r" eaLnBrk="1" fontAlgn="auto" hangingPunct="1">
+              <a:rPr lang="es-ES" sz="1600">
+                <a:latin typeface="Cabin" pitchFamily="2" charset="77"/>
+              </a:rPr>
+              <a:t>To </a:t>
+            </a:r>
+            <a:r>
+              <a:rPr lang="es-ES" sz="1600" err="1">
+                <a:latin typeface="Cabin" pitchFamily="2" charset="77"/>
+              </a:rPr>
+              <a:t>integrate</a:t>
+            </a:r>
+            <a:r>
+              <a:rPr lang="es-ES" sz="1600">
+                <a:latin typeface="Cabin" pitchFamily="2" charset="77"/>
+              </a:rPr>
+              <a:t> in a </a:t>
+            </a:r>
+            <a:r>
+              <a:rPr lang="es-ES" sz="1600" err="1">
+                <a:latin typeface="Cabin" pitchFamily="2" charset="77"/>
+              </a:rPr>
+              <a:t>laboratory</a:t>
+            </a:r>
+            <a:r>
+              <a:rPr lang="es-ES" sz="1600">
+                <a:latin typeface="Cabin" pitchFamily="2" charset="77"/>
+              </a:rPr>
+              <a:t> </a:t>
+            </a:r>
+            <a:r>
+              <a:rPr lang="es-ES" sz="1600" err="1">
+                <a:latin typeface="Cabin" pitchFamily="2" charset="77"/>
+              </a:rPr>
+              <a:t>an</a:t>
+            </a:r>
+            <a:r>
+              <a:rPr lang="es-ES" sz="1600">
+                <a:latin typeface="Cabin" pitchFamily="2" charset="77"/>
+              </a:rPr>
+              <a:t> </a:t>
+            </a:r>
+            <a:r>
+              <a:rPr lang="es-ES" sz="1600" err="1">
+                <a:latin typeface="Cabin" pitchFamily="2" charset="77"/>
+              </a:rPr>
+              <a:t>environment</a:t>
+            </a:r>
+            <a:r>
+              <a:rPr lang="es-ES" sz="1600">
+                <a:latin typeface="Cabin" pitchFamily="2" charset="77"/>
+              </a:rPr>
+              <a:t> </a:t>
+            </a:r>
+            <a:r>
+              <a:rPr lang="es-ES" sz="1600" err="1">
+                <a:latin typeface="Cabin" pitchFamily="2" charset="77"/>
+              </a:rPr>
+              <a:t>for</a:t>
+            </a:r>
+            <a:r>
+              <a:rPr lang="es-ES" sz="1600">
+                <a:latin typeface="Cabin" pitchFamily="2" charset="77"/>
+              </a:rPr>
+              <a:t> </a:t>
+            </a:r>
+            <a:r>
+              <a:rPr lang="es-ES" sz="1600" err="1">
+                <a:latin typeface="Cabin" pitchFamily="2" charset="77"/>
+              </a:rPr>
+              <a:t>testing</a:t>
+            </a:r>
+            <a:r>
+              <a:rPr lang="es-ES" sz="1600">
+                <a:latin typeface="Cabin" pitchFamily="2" charset="77"/>
+              </a:rPr>
+              <a:t> of </a:t>
+            </a:r>
+            <a:r>
+              <a:rPr lang="es-ES" sz="1600" err="1">
+                <a:latin typeface="Cabin" pitchFamily="2" charset="77"/>
+              </a:rPr>
+              <a:t>small</a:t>
+            </a:r>
+            <a:r>
+              <a:rPr lang="es-ES" sz="1600">
+                <a:latin typeface="Cabin" pitchFamily="2" charset="77"/>
+              </a:rPr>
+              <a:t> </a:t>
+            </a:r>
+            <a:r>
+              <a:rPr lang="es-ES" sz="1600" err="1">
+                <a:latin typeface="Cabin" pitchFamily="2" charset="77"/>
+              </a:rPr>
+              <a:t>scale</a:t>
+            </a:r>
+            <a:r>
+              <a:rPr lang="es-ES" sz="1600">
+                <a:latin typeface="Cabin" pitchFamily="2" charset="77"/>
+              </a:rPr>
+              <a:t> </a:t>
+            </a:r>
+            <a:r>
+              <a:rPr lang="es-ES" sz="1600" err="1">
+                <a:latin typeface="Cabin" pitchFamily="2" charset="77"/>
+              </a:rPr>
+              <a:t>distributed</a:t>
+            </a:r>
+            <a:r>
+              <a:rPr lang="es-ES" sz="1600">
+                <a:latin typeface="Cabin" pitchFamily="2" charset="77"/>
+              </a:rPr>
+              <a:t> </a:t>
+            </a:r>
+            <a:r>
+              <a:rPr lang="es-ES" sz="1600" err="1">
+                <a:latin typeface="Cabin" pitchFamily="2" charset="77"/>
+              </a:rPr>
+              <a:t>energy</a:t>
+            </a:r>
+            <a:r>
+              <a:rPr lang="es-ES" sz="1600">
+                <a:latin typeface="Cabin" pitchFamily="2" charset="77"/>
+              </a:rPr>
+              <a:t> </a:t>
+            </a:r>
+            <a:r>
+              <a:rPr lang="es-ES" sz="1600" err="1">
+                <a:latin typeface="Cabin" pitchFamily="2" charset="77"/>
+              </a:rPr>
+              <a:t>systems</a:t>
+            </a:r>
+            <a:r>
+              <a:rPr lang="es-ES" sz="1600">
+                <a:latin typeface="Cabin" pitchFamily="2" charset="77"/>
+              </a:rPr>
+              <a:t> and </a:t>
+            </a:r>
+            <a:r>
+              <a:rPr lang="es-ES" sz="1600" err="1">
+                <a:latin typeface="Cabin" pitchFamily="2" charset="77"/>
+              </a:rPr>
+              <a:t>their</a:t>
+            </a:r>
+            <a:r>
+              <a:rPr lang="es-ES" sz="1600">
+                <a:latin typeface="Cabin" pitchFamily="2" charset="77"/>
+              </a:rPr>
+              <a:t> </a:t>
+            </a:r>
+            <a:r>
+              <a:rPr lang="es-ES" sz="1600" err="1">
+                <a:latin typeface="Cabin" pitchFamily="2" charset="77"/>
+              </a:rPr>
+              <a:t>integration</a:t>
+            </a:r>
+            <a:r>
+              <a:rPr lang="es-ES" sz="1600">
+                <a:latin typeface="Cabin" pitchFamily="2" charset="77"/>
+              </a:rPr>
+              <a:t> </a:t>
+            </a:r>
+            <a:r>
+              <a:rPr lang="es-ES" sz="1600" err="1">
+                <a:latin typeface="Cabin" pitchFamily="2" charset="77"/>
+              </a:rPr>
+              <a:t>into</a:t>
+            </a:r>
+            <a:r>
+              <a:rPr lang="es-ES" sz="1600">
+                <a:latin typeface="Cabin" pitchFamily="2" charset="77"/>
+              </a:rPr>
+              <a:t> </a:t>
+            </a:r>
+            <a:r>
+              <a:rPr lang="es-ES" sz="1600" err="1">
+                <a:latin typeface="Cabin" pitchFamily="2" charset="77"/>
+              </a:rPr>
+              <a:t>the</a:t>
+            </a:r>
+            <a:r>
+              <a:rPr lang="es-ES" sz="1600">
+                <a:latin typeface="Cabin" pitchFamily="2" charset="77"/>
+              </a:rPr>
+              <a:t> </a:t>
+            </a:r>
+            <a:r>
+              <a:rPr lang="es-ES" sz="1600" err="1">
+                <a:latin typeface="Cabin" pitchFamily="2" charset="77"/>
+              </a:rPr>
+              <a:t>electrical</a:t>
+            </a:r>
+            <a:r>
+              <a:rPr lang="es-ES" sz="1600">
+                <a:latin typeface="Cabin" pitchFamily="2" charset="77"/>
+              </a:rPr>
+              <a:t>  </a:t>
+            </a:r>
+            <a:r>
+              <a:rPr lang="es-ES" sz="1600" err="1">
+                <a:latin typeface="Cabin" pitchFamily="2" charset="77"/>
+              </a:rPr>
+              <a:t>grid</a:t>
+            </a:r>
+            <a:r>
+              <a:rPr lang="es-ES" sz="1600">
+                <a:latin typeface="Cabin" pitchFamily="2" charset="77"/>
+              </a:rPr>
+              <a:t>. </a:t>
+            </a:r>
+            <a:r>
+              <a:rPr lang="es-ES" sz="1600" err="1">
+                <a:latin typeface="Cabin" pitchFamily="2" charset="77"/>
+              </a:rPr>
+              <a:t>For</a:t>
+            </a:r>
+            <a:r>
+              <a:rPr lang="es-ES" sz="1600">
+                <a:latin typeface="Cabin" pitchFamily="2" charset="77"/>
+              </a:rPr>
+              <a:t> </a:t>
+            </a:r>
+            <a:r>
+              <a:rPr lang="es-ES" sz="1600" err="1">
+                <a:latin typeface="Cabin" pitchFamily="2" charset="77"/>
+              </a:rPr>
+              <a:t>the</a:t>
+            </a:r>
+            <a:r>
+              <a:rPr lang="es-ES" sz="1600">
+                <a:latin typeface="Cabin" pitchFamily="2" charset="77"/>
+              </a:rPr>
+              <a:t> </a:t>
+            </a:r>
+            <a:r>
+              <a:rPr lang="es-ES" sz="1600" err="1">
+                <a:latin typeface="Cabin" pitchFamily="2" charset="77"/>
+              </a:rPr>
+              <a:t>study</a:t>
+            </a:r>
+            <a:r>
+              <a:rPr lang="es-ES" sz="1600">
+                <a:latin typeface="Cabin" pitchFamily="2" charset="77"/>
+              </a:rPr>
+              <a:t> and </a:t>
+            </a:r>
+            <a:r>
+              <a:rPr lang="es-ES" sz="1600" err="1">
+                <a:latin typeface="Cabin" pitchFamily="2" charset="77"/>
+              </a:rPr>
+              <a:t>analysis</a:t>
+            </a:r>
+            <a:r>
+              <a:rPr lang="es-ES" sz="1600">
+                <a:latin typeface="Cabin" pitchFamily="2" charset="77"/>
+              </a:rPr>
+              <a:t>, a </a:t>
+            </a:r>
+            <a:r>
+              <a:rPr lang="es-ES" sz="1600" err="1">
+                <a:latin typeface="Cabin" pitchFamily="2" charset="77"/>
+              </a:rPr>
+              <a:t>four</a:t>
+            </a:r>
+            <a:r>
+              <a:rPr lang="es-ES" sz="1600">
+                <a:latin typeface="Cabin" pitchFamily="2" charset="77"/>
+              </a:rPr>
+              <a:t> </a:t>
+            </a:r>
+            <a:r>
+              <a:rPr lang="es-ES" sz="1600" err="1">
+                <a:latin typeface="Cabin" pitchFamily="2" charset="77"/>
+              </a:rPr>
+              <a:t>level</a:t>
+            </a:r>
+            <a:r>
+              <a:rPr lang="es-ES" sz="1600">
+                <a:latin typeface="Cabin" pitchFamily="2" charset="77"/>
+              </a:rPr>
+              <a:t> </a:t>
+            </a:r>
+            <a:r>
+              <a:rPr lang="es-ES" sz="1600" err="1">
+                <a:latin typeface="Cabin" pitchFamily="2" charset="77"/>
+              </a:rPr>
+              <a:t>approach</a:t>
+            </a:r>
+            <a:r>
+              <a:rPr lang="es-ES" sz="1600">
+                <a:latin typeface="Cabin" pitchFamily="2" charset="77"/>
+              </a:rPr>
+              <a:t> </a:t>
+            </a:r>
+            <a:r>
+              <a:rPr lang="es-ES" sz="1600" err="1">
+                <a:latin typeface="Cabin" pitchFamily="2" charset="77"/>
+              </a:rPr>
+              <a:t>is</a:t>
+            </a:r>
+            <a:r>
+              <a:rPr lang="es-ES" sz="1600">
+                <a:latin typeface="Cabin" pitchFamily="2" charset="77"/>
+              </a:rPr>
+              <a:t> </a:t>
+            </a:r>
+            <a:r>
+              <a:rPr lang="es-ES" sz="1600" err="1">
+                <a:latin typeface="Cabin" pitchFamily="2" charset="77"/>
+              </a:rPr>
+              <a:t>proposed</a:t>
+            </a:r>
+            <a:r>
+              <a:rPr lang="es-ES" sz="1600">
+                <a:latin typeface="Cabin" pitchFamily="2" charset="77"/>
+              </a:rPr>
+              <a:t>: </a:t>
+            </a:r>
+          </a:p>
+          <a:p>
+            <a:pPr eaLnBrk="1" fontAlgn="auto" hangingPunct="1">
               <a:spcBef>
                 <a:spcPts val="0"/>
               </a:spcBef>
@@ -16916,23 +16002,1272 @@
               </a:spcAft>
               <a:defRPr/>
             </a:pPr>
+            <a:endParaRPr lang="es-ES" sz="1600">
+              <a:latin typeface="Cabin" pitchFamily="2" charset="77"/>
+            </a:endParaRPr>
+          </a:p>
+          <a:p>
+            <a:pPr marL="285750" indent="-285750" eaLnBrk="1" fontAlgn="auto" hangingPunct="1">
+              <a:spcBef>
+                <a:spcPts val="0"/>
+              </a:spcBef>
+              <a:spcAft>
+                <a:spcPts val="0"/>
+              </a:spcAft>
+              <a:buFont typeface="Wingdings" pitchFamily="2" charset="2"/>
+              <a:buChar char="§"/>
+              <a:defRPr/>
+            </a:pPr>
+            <a:r>
+              <a:rPr lang="es-ES" sz="1600" err="1">
+                <a:latin typeface="Cabin" pitchFamily="2" charset="77"/>
+              </a:rPr>
+              <a:t>Development</a:t>
+            </a:r>
+            <a:r>
+              <a:rPr lang="es-ES" sz="1600">
+                <a:latin typeface="Cabin" pitchFamily="2" charset="77"/>
+              </a:rPr>
+              <a:t> of </a:t>
+            </a:r>
+            <a:r>
+              <a:rPr lang="es-ES" sz="1600" err="1">
+                <a:latin typeface="Cabin" pitchFamily="2" charset="77"/>
+              </a:rPr>
+              <a:t>generation</a:t>
+            </a:r>
+            <a:r>
+              <a:rPr lang="es-ES" sz="1600">
+                <a:latin typeface="Cabin" pitchFamily="2" charset="77"/>
+              </a:rPr>
+              <a:t> </a:t>
+            </a:r>
+            <a:r>
+              <a:rPr lang="es-ES" sz="1600" err="1">
+                <a:latin typeface="Cabin" pitchFamily="2" charset="77"/>
+              </a:rPr>
+              <a:t>systems</a:t>
+            </a:r>
+            <a:r>
+              <a:rPr lang="es-ES" sz="1600">
+                <a:latin typeface="Cabin" pitchFamily="2" charset="77"/>
+              </a:rPr>
+              <a:t> and </a:t>
+            </a:r>
+            <a:r>
+              <a:rPr lang="es-ES" sz="1600" err="1">
+                <a:latin typeface="Cabin" pitchFamily="2" charset="77"/>
+              </a:rPr>
+              <a:t>power</a:t>
+            </a:r>
+            <a:r>
+              <a:rPr lang="es-ES" sz="1600">
+                <a:latin typeface="Cabin" pitchFamily="2" charset="77"/>
+              </a:rPr>
+              <a:t> </a:t>
+            </a:r>
+            <a:r>
+              <a:rPr lang="es-ES" sz="1600" err="1">
+                <a:latin typeface="Cabin" pitchFamily="2" charset="77"/>
+              </a:rPr>
+              <a:t>converters</a:t>
+            </a:r>
+            <a:r>
+              <a:rPr lang="es-ES" sz="1600">
+                <a:latin typeface="Cabin" pitchFamily="2" charset="77"/>
+              </a:rPr>
+              <a:t> </a:t>
+            </a:r>
+            <a:r>
+              <a:rPr lang="es-ES" sz="1600" err="1">
+                <a:latin typeface="Cabin" pitchFamily="2" charset="77"/>
+              </a:rPr>
+              <a:t>for</a:t>
+            </a:r>
+            <a:r>
+              <a:rPr lang="es-ES" sz="1600">
+                <a:latin typeface="Cabin" pitchFamily="2" charset="77"/>
+              </a:rPr>
+              <a:t> </a:t>
+            </a:r>
+            <a:r>
+              <a:rPr lang="es-ES" sz="1600" err="1">
+                <a:latin typeface="Cabin" pitchFamily="2" charset="77"/>
+              </a:rPr>
+              <a:t>the</a:t>
+            </a:r>
+            <a:r>
+              <a:rPr lang="es-ES" sz="1600">
+                <a:latin typeface="Cabin" pitchFamily="2" charset="77"/>
+              </a:rPr>
+              <a:t> </a:t>
+            </a:r>
+            <a:r>
+              <a:rPr lang="es-ES" sz="1600" err="1">
+                <a:latin typeface="Cabin" pitchFamily="2" charset="77"/>
+              </a:rPr>
+              <a:t>injection</a:t>
+            </a:r>
+            <a:r>
+              <a:rPr lang="es-ES" sz="1600">
+                <a:latin typeface="Cabin" pitchFamily="2" charset="77"/>
+              </a:rPr>
+              <a:t> of </a:t>
+            </a:r>
+            <a:r>
+              <a:rPr lang="es-ES" sz="1600" err="1">
+                <a:latin typeface="Cabin" pitchFamily="2" charset="77"/>
+              </a:rPr>
+              <a:t>electrical</a:t>
+            </a:r>
+            <a:r>
+              <a:rPr lang="es-ES" sz="1600">
+                <a:latin typeface="Cabin" pitchFamily="2" charset="77"/>
+              </a:rPr>
+              <a:t> </a:t>
+            </a:r>
+            <a:r>
+              <a:rPr lang="es-ES" sz="1600" err="1">
+                <a:latin typeface="Cabin" pitchFamily="2" charset="77"/>
+              </a:rPr>
+              <a:t>energy</a:t>
+            </a:r>
+            <a:r>
+              <a:rPr lang="es-ES" sz="1600">
+                <a:latin typeface="Cabin" pitchFamily="2" charset="77"/>
+              </a:rPr>
+              <a:t> </a:t>
+            </a:r>
+            <a:r>
+              <a:rPr lang="es-ES" sz="1600" err="1">
+                <a:latin typeface="Cabin" pitchFamily="2" charset="77"/>
+              </a:rPr>
+              <a:t>into</a:t>
+            </a:r>
+            <a:r>
+              <a:rPr lang="es-ES" sz="1600">
+                <a:latin typeface="Cabin" pitchFamily="2" charset="77"/>
+              </a:rPr>
+              <a:t> </a:t>
+            </a:r>
+            <a:r>
+              <a:rPr lang="es-ES" sz="1600" err="1">
+                <a:latin typeface="Cabin" pitchFamily="2" charset="77"/>
+              </a:rPr>
+              <a:t>the</a:t>
+            </a:r>
+            <a:r>
+              <a:rPr lang="es-ES" sz="1600">
+                <a:latin typeface="Cabin" pitchFamily="2" charset="77"/>
+              </a:rPr>
+              <a:t> </a:t>
+            </a:r>
+            <a:r>
+              <a:rPr lang="es-ES" sz="1600" err="1">
+                <a:latin typeface="Cabin" pitchFamily="2" charset="77"/>
+              </a:rPr>
+              <a:t>grid</a:t>
+            </a:r>
+            <a:r>
+              <a:rPr lang="es-ES" sz="1600">
+                <a:latin typeface="Cabin" pitchFamily="2" charset="77"/>
+              </a:rPr>
+              <a:t> </a:t>
+            </a:r>
+            <a:r>
+              <a:rPr lang="es-ES" sz="1600" err="1">
+                <a:latin typeface="Cabin" pitchFamily="2" charset="77"/>
+              </a:rPr>
+              <a:t>under</a:t>
+            </a:r>
+            <a:r>
+              <a:rPr lang="es-ES" sz="1600">
+                <a:latin typeface="Cabin" pitchFamily="2" charset="77"/>
+              </a:rPr>
+              <a:t> </a:t>
+            </a:r>
+            <a:r>
+              <a:rPr lang="es-ES" sz="1600" err="1">
+                <a:latin typeface="Cabin" pitchFamily="2" charset="77"/>
+              </a:rPr>
+              <a:t>efficiency</a:t>
+            </a:r>
+            <a:r>
+              <a:rPr lang="es-ES" sz="1600">
+                <a:latin typeface="Cabin" pitchFamily="2" charset="77"/>
+              </a:rPr>
+              <a:t> and </a:t>
+            </a:r>
+            <a:r>
+              <a:rPr lang="es-ES" sz="1600" err="1">
+                <a:latin typeface="Cabin" pitchFamily="2" charset="77"/>
+              </a:rPr>
+              <a:t>reliability</a:t>
+            </a:r>
+            <a:r>
+              <a:rPr lang="es-ES" sz="1600">
+                <a:latin typeface="Cabin" pitchFamily="2" charset="77"/>
+              </a:rPr>
+              <a:t> </a:t>
+            </a:r>
+            <a:r>
+              <a:rPr lang="es-ES" sz="1600" err="1">
+                <a:latin typeface="Cabin" pitchFamily="2" charset="77"/>
+              </a:rPr>
+              <a:t>constraints</a:t>
+            </a:r>
+            <a:r>
+              <a:rPr lang="es-ES" sz="1600">
+                <a:latin typeface="Cabin" pitchFamily="2" charset="77"/>
+              </a:rPr>
+              <a:t>. </a:t>
+            </a:r>
+          </a:p>
+          <a:p>
+            <a:pPr marL="285750" indent="-285750" eaLnBrk="1" fontAlgn="auto" hangingPunct="1">
+              <a:spcBef>
+                <a:spcPts val="0"/>
+              </a:spcBef>
+              <a:spcAft>
+                <a:spcPts val="0"/>
+              </a:spcAft>
+              <a:buFont typeface="Wingdings" pitchFamily="2" charset="2"/>
+              <a:buChar char="§"/>
+              <a:defRPr/>
+            </a:pPr>
+            <a:r>
+              <a:rPr lang="es-ES" sz="1600" err="1">
+                <a:latin typeface="Cabin" pitchFamily="2" charset="77"/>
+              </a:rPr>
+              <a:t>Development</a:t>
+            </a:r>
+            <a:r>
+              <a:rPr lang="es-ES" sz="1600">
+                <a:latin typeface="Cabin" pitchFamily="2" charset="77"/>
+              </a:rPr>
+              <a:t> of </a:t>
+            </a:r>
+            <a:r>
+              <a:rPr lang="es-ES" sz="1600" err="1">
+                <a:latin typeface="Cabin" pitchFamily="2" charset="77"/>
+              </a:rPr>
+              <a:t>energy</a:t>
+            </a:r>
+            <a:r>
+              <a:rPr lang="es-ES" sz="1600">
+                <a:latin typeface="Cabin" pitchFamily="2" charset="77"/>
+              </a:rPr>
+              <a:t> </a:t>
+            </a:r>
+            <a:r>
+              <a:rPr lang="es-ES" sz="1600" err="1">
+                <a:latin typeface="Cabin" pitchFamily="2" charset="77"/>
+              </a:rPr>
+              <a:t>storage</a:t>
+            </a:r>
+            <a:r>
+              <a:rPr lang="es-ES" sz="1600">
+                <a:latin typeface="Cabin" pitchFamily="2" charset="77"/>
+              </a:rPr>
+              <a:t> </a:t>
+            </a:r>
+            <a:r>
+              <a:rPr lang="es-ES" sz="1600" err="1">
+                <a:latin typeface="Cabin" pitchFamily="2" charset="77"/>
+              </a:rPr>
+              <a:t>systems</a:t>
+            </a:r>
+            <a:r>
+              <a:rPr lang="es-ES" sz="1600">
+                <a:latin typeface="Cabin" pitchFamily="2" charset="77"/>
+              </a:rPr>
+              <a:t> </a:t>
+            </a:r>
+            <a:r>
+              <a:rPr lang="es-ES" sz="1600" err="1">
+                <a:latin typeface="Cabin" pitchFamily="2" charset="77"/>
+              </a:rPr>
+              <a:t>for</a:t>
+            </a:r>
+            <a:r>
+              <a:rPr lang="es-ES" sz="1600">
+                <a:latin typeface="Cabin" pitchFamily="2" charset="77"/>
+              </a:rPr>
+              <a:t> </a:t>
+            </a:r>
+            <a:r>
+              <a:rPr lang="es-ES" sz="1600" err="1">
+                <a:latin typeface="Cabin" pitchFamily="2" charset="77"/>
+              </a:rPr>
+              <a:t>the</a:t>
+            </a:r>
+            <a:r>
+              <a:rPr lang="es-ES" sz="1600">
+                <a:latin typeface="Cabin" pitchFamily="2" charset="77"/>
+              </a:rPr>
+              <a:t> </a:t>
+            </a:r>
+            <a:r>
+              <a:rPr lang="es-ES" sz="1600" err="1">
+                <a:latin typeface="Cabin" pitchFamily="2" charset="77"/>
+              </a:rPr>
+              <a:t>compensation</a:t>
+            </a:r>
+            <a:r>
+              <a:rPr lang="es-ES" sz="1600">
+                <a:latin typeface="Cabin" pitchFamily="2" charset="77"/>
+              </a:rPr>
+              <a:t> of </a:t>
+            </a:r>
+            <a:r>
+              <a:rPr lang="es-ES" sz="1600" err="1">
+                <a:latin typeface="Cabin" pitchFamily="2" charset="77"/>
+              </a:rPr>
+              <a:t>transient</a:t>
+            </a:r>
+            <a:r>
+              <a:rPr lang="es-ES" sz="1600">
+                <a:latin typeface="Cabin" pitchFamily="2" charset="77"/>
+              </a:rPr>
+              <a:t> </a:t>
+            </a:r>
+            <a:r>
+              <a:rPr lang="es-ES" sz="1600" err="1">
+                <a:latin typeface="Cabin" pitchFamily="2" charset="77"/>
+              </a:rPr>
+              <a:t>demands</a:t>
+            </a:r>
+            <a:r>
+              <a:rPr lang="es-ES" sz="1600">
+                <a:latin typeface="Cabin" pitchFamily="2" charset="77"/>
+              </a:rPr>
+              <a:t> at </a:t>
+            </a:r>
+            <a:r>
+              <a:rPr lang="es-ES" sz="1600" err="1">
+                <a:latin typeface="Cabin" pitchFamily="2" charset="77"/>
+              </a:rPr>
+              <a:t>the</a:t>
+            </a:r>
+            <a:r>
+              <a:rPr lang="es-ES" sz="1600">
+                <a:latin typeface="Cabin" pitchFamily="2" charset="77"/>
+              </a:rPr>
+              <a:t> </a:t>
+            </a:r>
+            <a:r>
+              <a:rPr lang="es-ES" sz="1600" err="1">
+                <a:latin typeface="Cabin" pitchFamily="2" charset="77"/>
+              </a:rPr>
+              <a:t>electrical</a:t>
+            </a:r>
+            <a:r>
+              <a:rPr lang="es-ES" sz="1600">
+                <a:latin typeface="Cabin" pitchFamily="2" charset="77"/>
+              </a:rPr>
+              <a:t> </a:t>
+            </a:r>
+            <a:r>
+              <a:rPr lang="es-ES" sz="1600" err="1">
+                <a:latin typeface="Cabin" pitchFamily="2" charset="77"/>
+              </a:rPr>
+              <a:t>grid</a:t>
+            </a:r>
+            <a:r>
+              <a:rPr lang="es-ES" sz="1600">
+                <a:latin typeface="Cabin" pitchFamily="2" charset="77"/>
+              </a:rPr>
+              <a:t>, </a:t>
+            </a:r>
+            <a:r>
+              <a:rPr lang="es-ES" sz="1600" err="1">
+                <a:latin typeface="Cabin" pitchFamily="2" charset="77"/>
+              </a:rPr>
+              <a:t>including</a:t>
+            </a:r>
+            <a:r>
+              <a:rPr lang="es-ES" sz="1600">
+                <a:latin typeface="Cabin" pitchFamily="2" charset="77"/>
+              </a:rPr>
+              <a:t> </a:t>
+            </a:r>
+            <a:r>
+              <a:rPr lang="es-ES" sz="1600" err="1">
+                <a:latin typeface="Cabin" pitchFamily="2" charset="77"/>
+              </a:rPr>
+              <a:t>pulsating</a:t>
+            </a:r>
+            <a:r>
+              <a:rPr lang="es-ES" sz="1600">
+                <a:latin typeface="Cabin" pitchFamily="2" charset="77"/>
+              </a:rPr>
+              <a:t> </a:t>
+            </a:r>
+            <a:r>
+              <a:rPr lang="es-ES" sz="1600" err="1">
+                <a:latin typeface="Cabin" pitchFamily="2" charset="77"/>
+              </a:rPr>
+              <a:t>generation</a:t>
+            </a:r>
+            <a:r>
+              <a:rPr lang="es-ES" sz="1600">
+                <a:latin typeface="Cabin" pitchFamily="2" charset="77"/>
+              </a:rPr>
+              <a:t> </a:t>
+            </a:r>
+            <a:r>
+              <a:rPr lang="es-ES" sz="1600" err="1">
+                <a:latin typeface="Cabin" pitchFamily="2" charset="77"/>
+              </a:rPr>
+              <a:t>by</a:t>
+            </a:r>
+            <a:r>
+              <a:rPr lang="es-ES" sz="1600">
+                <a:latin typeface="Cabin" pitchFamily="2" charset="77"/>
+              </a:rPr>
+              <a:t> </a:t>
+            </a:r>
+            <a:r>
+              <a:rPr lang="es-ES" sz="1600" err="1">
+                <a:latin typeface="Cabin" pitchFamily="2" charset="77"/>
+              </a:rPr>
+              <a:t>renewable</a:t>
+            </a:r>
+            <a:r>
+              <a:rPr lang="es-ES" sz="1600">
+                <a:latin typeface="Cabin" pitchFamily="2" charset="77"/>
+              </a:rPr>
+              <a:t> </a:t>
+            </a:r>
+            <a:r>
+              <a:rPr lang="es-ES" sz="1600" err="1">
+                <a:latin typeface="Cabin" pitchFamily="2" charset="77"/>
+              </a:rPr>
+              <a:t>energy</a:t>
+            </a:r>
+            <a:r>
+              <a:rPr lang="es-ES" sz="1600">
+                <a:latin typeface="Cabin" pitchFamily="2" charset="77"/>
+              </a:rPr>
+              <a:t> </a:t>
+            </a:r>
+            <a:r>
+              <a:rPr lang="es-ES" sz="1600" err="1">
+                <a:latin typeface="Cabin" pitchFamily="2" charset="77"/>
+              </a:rPr>
+              <a:t>systems</a:t>
+            </a:r>
+            <a:r>
+              <a:rPr lang="es-ES" sz="1600">
+                <a:latin typeface="Cabin" pitchFamily="2" charset="77"/>
+              </a:rPr>
+              <a:t>, </a:t>
+            </a:r>
+            <a:r>
+              <a:rPr lang="es-ES" sz="1600" err="1">
+                <a:latin typeface="Cabin" pitchFamily="2" charset="77"/>
+              </a:rPr>
+              <a:t>grid</a:t>
+            </a:r>
+            <a:r>
+              <a:rPr lang="es-ES" sz="1600">
+                <a:latin typeface="Cabin" pitchFamily="2" charset="77"/>
+              </a:rPr>
+              <a:t> </a:t>
+            </a:r>
+            <a:r>
+              <a:rPr lang="es-ES" sz="1600" err="1">
+                <a:latin typeface="Cabin" pitchFamily="2" charset="77"/>
+              </a:rPr>
+              <a:t>contingencies</a:t>
+            </a:r>
+            <a:r>
+              <a:rPr lang="es-ES" sz="1600">
+                <a:latin typeface="Cabin" pitchFamily="2" charset="77"/>
+              </a:rPr>
+              <a:t> and virtual </a:t>
+            </a:r>
+            <a:r>
+              <a:rPr lang="es-ES" sz="1600" err="1">
+                <a:latin typeface="Cabin" pitchFamily="2" charset="77"/>
+              </a:rPr>
+              <a:t>zero</a:t>
+            </a:r>
+            <a:r>
+              <a:rPr lang="es-ES" sz="1600">
+                <a:latin typeface="Cabin" pitchFamily="2" charset="77"/>
+              </a:rPr>
+              <a:t> </a:t>
+            </a:r>
+            <a:r>
+              <a:rPr lang="es-ES" sz="1600" err="1">
+                <a:latin typeface="Cabin" pitchFamily="2" charset="77"/>
+              </a:rPr>
+              <a:t>demanding</a:t>
+            </a:r>
+            <a:r>
+              <a:rPr lang="es-ES" sz="1600">
+                <a:latin typeface="Cabin" pitchFamily="2" charset="77"/>
+              </a:rPr>
+              <a:t> </a:t>
+            </a:r>
+            <a:r>
+              <a:rPr lang="es-ES" sz="1600" err="1">
+                <a:latin typeface="Cabin" pitchFamily="2" charset="77"/>
+              </a:rPr>
+              <a:t>energy</a:t>
+            </a:r>
+            <a:r>
+              <a:rPr lang="es-ES" sz="1600">
+                <a:latin typeface="Cabin" pitchFamily="2" charset="77"/>
+              </a:rPr>
+              <a:t> </a:t>
+            </a:r>
+            <a:r>
+              <a:rPr lang="es-ES" sz="1600" err="1">
+                <a:latin typeface="Cabin" pitchFamily="2" charset="77"/>
+              </a:rPr>
+              <a:t>buildings</a:t>
+            </a:r>
+            <a:r>
+              <a:rPr lang="es-ES" sz="1600">
+                <a:latin typeface="Cabin" pitchFamily="2" charset="77"/>
+              </a:rPr>
+              <a:t>. </a:t>
+            </a:r>
+          </a:p>
+          <a:p>
+            <a:pPr marL="285750" indent="-285750" eaLnBrk="1" fontAlgn="auto" hangingPunct="1">
+              <a:spcBef>
+                <a:spcPts val="0"/>
+              </a:spcBef>
+              <a:spcAft>
+                <a:spcPts val="0"/>
+              </a:spcAft>
+              <a:buFont typeface="Wingdings" pitchFamily="2" charset="2"/>
+              <a:buChar char="§"/>
+              <a:defRPr/>
+            </a:pPr>
+            <a:r>
+              <a:rPr lang="es-ES" sz="1600" err="1">
+                <a:latin typeface="Cabin" pitchFamily="2" charset="77"/>
+              </a:rPr>
+              <a:t>Development</a:t>
+            </a:r>
+            <a:r>
+              <a:rPr lang="es-ES" sz="1600">
+                <a:latin typeface="Cabin" pitchFamily="2" charset="77"/>
+              </a:rPr>
+              <a:t> of </a:t>
+            </a:r>
+            <a:r>
+              <a:rPr lang="es-ES" sz="1600" err="1">
+                <a:latin typeface="Cabin" pitchFamily="2" charset="77"/>
+              </a:rPr>
+              <a:t>coordinated</a:t>
+            </a:r>
+            <a:r>
+              <a:rPr lang="es-ES" sz="1600">
+                <a:latin typeface="Cabin" pitchFamily="2" charset="77"/>
+              </a:rPr>
+              <a:t> control </a:t>
+            </a:r>
+            <a:r>
+              <a:rPr lang="es-ES" sz="1600" err="1">
+                <a:latin typeface="Cabin" pitchFamily="2" charset="77"/>
+              </a:rPr>
+              <a:t>strategies</a:t>
+            </a:r>
+            <a:r>
+              <a:rPr lang="es-ES" sz="1600">
+                <a:latin typeface="Cabin" pitchFamily="2" charset="77"/>
+              </a:rPr>
+              <a:t> </a:t>
+            </a:r>
+            <a:r>
+              <a:rPr lang="es-ES" sz="1600" err="1">
+                <a:latin typeface="Cabin" pitchFamily="2" charset="77"/>
+              </a:rPr>
+              <a:t>for</a:t>
+            </a:r>
+            <a:r>
+              <a:rPr lang="es-ES" sz="1600">
+                <a:latin typeface="Cabin" pitchFamily="2" charset="77"/>
+              </a:rPr>
+              <a:t> </a:t>
+            </a:r>
+            <a:r>
+              <a:rPr lang="es-ES" sz="1600" err="1">
+                <a:latin typeface="Cabin" pitchFamily="2" charset="77"/>
+              </a:rPr>
+              <a:t>all</a:t>
+            </a:r>
+            <a:r>
+              <a:rPr lang="es-ES" sz="1600">
+                <a:latin typeface="Cabin" pitchFamily="2" charset="77"/>
+              </a:rPr>
+              <a:t> </a:t>
+            </a:r>
+            <a:r>
+              <a:rPr lang="es-ES" sz="1600" err="1">
+                <a:latin typeface="Cabin" pitchFamily="2" charset="77"/>
+              </a:rPr>
+              <a:t>the</a:t>
+            </a:r>
+            <a:r>
+              <a:rPr lang="es-ES" sz="1600">
+                <a:latin typeface="Cabin" pitchFamily="2" charset="77"/>
+              </a:rPr>
+              <a:t> </a:t>
+            </a:r>
+            <a:r>
+              <a:rPr lang="es-ES" sz="1600" err="1">
+                <a:latin typeface="Cabin" pitchFamily="2" charset="77"/>
+              </a:rPr>
+              <a:t>small</a:t>
+            </a:r>
+            <a:r>
+              <a:rPr lang="es-ES" sz="1600">
+                <a:latin typeface="Cabin" pitchFamily="2" charset="77"/>
+              </a:rPr>
+              <a:t> </a:t>
+            </a:r>
+            <a:r>
+              <a:rPr lang="es-ES" sz="1600" err="1">
+                <a:latin typeface="Cabin" pitchFamily="2" charset="77"/>
+              </a:rPr>
+              <a:t>scale</a:t>
+            </a:r>
+            <a:r>
+              <a:rPr lang="es-ES" sz="1600">
+                <a:latin typeface="Cabin" pitchFamily="2" charset="77"/>
+              </a:rPr>
+              <a:t> </a:t>
+            </a:r>
+            <a:r>
+              <a:rPr lang="es-ES" sz="1600" err="1">
+                <a:latin typeface="Cabin" pitchFamily="2" charset="77"/>
+              </a:rPr>
+              <a:t>generators</a:t>
+            </a:r>
+            <a:r>
+              <a:rPr lang="es-ES" sz="1600">
+                <a:latin typeface="Cabin" pitchFamily="2" charset="77"/>
+              </a:rPr>
+              <a:t> </a:t>
+            </a:r>
+            <a:r>
+              <a:rPr lang="es-ES" sz="1600" err="1">
+                <a:latin typeface="Cabin" pitchFamily="2" charset="77"/>
+              </a:rPr>
+              <a:t>installed</a:t>
+            </a:r>
+            <a:r>
+              <a:rPr lang="es-ES" sz="1600">
+                <a:latin typeface="Cabin" pitchFamily="2" charset="77"/>
+              </a:rPr>
+              <a:t> at </a:t>
+            </a:r>
+            <a:r>
+              <a:rPr lang="es-ES" sz="1600" err="1">
+                <a:latin typeface="Cabin" pitchFamily="2" charset="77"/>
+              </a:rPr>
+              <a:t>the</a:t>
+            </a:r>
+            <a:r>
+              <a:rPr lang="es-ES" sz="1600">
+                <a:latin typeface="Cabin" pitchFamily="2" charset="77"/>
+              </a:rPr>
+              <a:t> </a:t>
+            </a:r>
+            <a:r>
+              <a:rPr lang="es-ES" sz="1600" err="1">
+                <a:latin typeface="Cabin" pitchFamily="2" charset="77"/>
+              </a:rPr>
+              <a:t>grid</a:t>
+            </a:r>
+            <a:r>
+              <a:rPr lang="es-ES" sz="1600">
+                <a:latin typeface="Cabin" pitchFamily="2" charset="77"/>
+              </a:rPr>
+              <a:t> in </a:t>
+            </a:r>
+            <a:r>
+              <a:rPr lang="es-ES" sz="1600" err="1">
+                <a:latin typeface="Cabin" pitchFamily="2" charset="77"/>
+              </a:rPr>
+              <a:t>order</a:t>
+            </a:r>
+            <a:r>
+              <a:rPr lang="es-ES" sz="1600">
+                <a:latin typeface="Cabin" pitchFamily="2" charset="77"/>
+              </a:rPr>
+              <a:t> </a:t>
+            </a:r>
+            <a:r>
+              <a:rPr lang="es-ES" sz="1600" err="1">
+                <a:latin typeface="Cabin" pitchFamily="2" charset="77"/>
+              </a:rPr>
+              <a:t>the</a:t>
+            </a:r>
+            <a:r>
+              <a:rPr lang="es-ES" sz="1600">
+                <a:latin typeface="Cabin" pitchFamily="2" charset="77"/>
+              </a:rPr>
+              <a:t> </a:t>
+            </a:r>
+            <a:r>
+              <a:rPr lang="es-ES" sz="1600" err="1">
+                <a:latin typeface="Cabin" pitchFamily="2" charset="77"/>
+              </a:rPr>
+              <a:t>system</a:t>
+            </a:r>
+            <a:r>
+              <a:rPr lang="es-ES" sz="1600">
+                <a:latin typeface="Cabin" pitchFamily="2" charset="77"/>
+              </a:rPr>
+              <a:t> to </a:t>
+            </a:r>
+            <a:r>
+              <a:rPr lang="es-ES" sz="1600" err="1">
+                <a:latin typeface="Cabin" pitchFamily="2" charset="77"/>
+              </a:rPr>
+              <a:t>behave</a:t>
+            </a:r>
+            <a:r>
+              <a:rPr lang="es-ES" sz="1600">
+                <a:latin typeface="Cabin" pitchFamily="2" charset="77"/>
+              </a:rPr>
+              <a:t> as a virtual </a:t>
+            </a:r>
+            <a:r>
+              <a:rPr lang="es-ES" sz="1600" err="1">
+                <a:latin typeface="Cabin" pitchFamily="2" charset="77"/>
+              </a:rPr>
+              <a:t>integrated</a:t>
+            </a:r>
+            <a:r>
+              <a:rPr lang="es-ES" sz="1600">
+                <a:latin typeface="Cabin" pitchFamily="2" charset="77"/>
+              </a:rPr>
+              <a:t> </a:t>
+            </a:r>
+            <a:r>
+              <a:rPr lang="es-ES" sz="1600" err="1">
+                <a:latin typeface="Cabin" pitchFamily="2" charset="77"/>
+              </a:rPr>
+              <a:t>power</a:t>
+            </a:r>
+            <a:r>
+              <a:rPr lang="es-ES" sz="1600">
+                <a:latin typeface="Cabin" pitchFamily="2" charset="77"/>
+              </a:rPr>
+              <a:t> </a:t>
+            </a:r>
+            <a:r>
+              <a:rPr lang="es-ES" sz="1600" err="1">
+                <a:latin typeface="Cabin" pitchFamily="2" charset="77"/>
+              </a:rPr>
+              <a:t>plant</a:t>
+            </a:r>
+            <a:r>
+              <a:rPr lang="es-ES" sz="1600">
+                <a:latin typeface="Cabin" pitchFamily="2" charset="77"/>
+              </a:rPr>
+              <a:t>. </a:t>
+            </a:r>
+            <a:r>
+              <a:rPr lang="es-ES" sz="1600" err="1">
+                <a:latin typeface="Cabin" pitchFamily="2" charset="77"/>
+              </a:rPr>
+              <a:t>Development</a:t>
+            </a:r>
+            <a:r>
+              <a:rPr lang="es-ES" sz="1600">
+                <a:latin typeface="Cabin" pitchFamily="2" charset="77"/>
+              </a:rPr>
+              <a:t> of new </a:t>
+            </a:r>
+            <a:r>
+              <a:rPr lang="es-ES" sz="1600" err="1">
+                <a:latin typeface="Cabin" pitchFamily="2" charset="77"/>
+              </a:rPr>
+              <a:t>power</a:t>
+            </a:r>
+            <a:r>
+              <a:rPr lang="es-ES" sz="1600">
+                <a:latin typeface="Cabin" pitchFamily="2" charset="77"/>
+              </a:rPr>
+              <a:t> </a:t>
+            </a:r>
+            <a:r>
+              <a:rPr lang="es-ES" sz="1600" err="1">
+                <a:latin typeface="Cabin" pitchFamily="2" charset="77"/>
+              </a:rPr>
+              <a:t>flow</a:t>
+            </a:r>
+            <a:r>
+              <a:rPr lang="es-ES" sz="1600">
+                <a:latin typeface="Cabin" pitchFamily="2" charset="77"/>
+              </a:rPr>
+              <a:t> </a:t>
+            </a:r>
+            <a:r>
+              <a:rPr lang="es-ES" sz="1600" err="1">
+                <a:latin typeface="Cabin" pitchFamily="2" charset="77"/>
+              </a:rPr>
+              <a:t>algorithms</a:t>
+            </a:r>
+            <a:r>
+              <a:rPr lang="es-ES" sz="1600">
+                <a:latin typeface="Cabin" pitchFamily="2" charset="77"/>
+              </a:rPr>
+              <a:t> </a:t>
+            </a:r>
+            <a:r>
+              <a:rPr lang="es-ES" sz="1600" err="1">
+                <a:latin typeface="Cabin" pitchFamily="2" charset="77"/>
+              </a:rPr>
+              <a:t>for</a:t>
+            </a:r>
+            <a:r>
+              <a:rPr lang="es-ES" sz="1600">
+                <a:latin typeface="Cabin" pitchFamily="2" charset="77"/>
+              </a:rPr>
+              <a:t> </a:t>
+            </a:r>
+            <a:r>
+              <a:rPr lang="es-ES" sz="1600" err="1">
+                <a:latin typeface="Cabin" pitchFamily="2" charset="77"/>
+              </a:rPr>
+              <a:t>considering</a:t>
+            </a:r>
+            <a:r>
+              <a:rPr lang="es-ES" sz="1600">
+                <a:latin typeface="Cabin" pitchFamily="2" charset="77"/>
+              </a:rPr>
+              <a:t> </a:t>
+            </a:r>
+            <a:r>
+              <a:rPr lang="es-ES" sz="1600" err="1">
+                <a:latin typeface="Cabin" pitchFamily="2" charset="77"/>
+              </a:rPr>
+              <a:t>the</a:t>
+            </a:r>
+            <a:r>
+              <a:rPr lang="es-ES" sz="1600">
+                <a:latin typeface="Cabin" pitchFamily="2" charset="77"/>
+              </a:rPr>
+              <a:t> </a:t>
+            </a:r>
+            <a:r>
+              <a:rPr lang="es-ES" sz="1600" err="1">
+                <a:latin typeface="Cabin" pitchFamily="2" charset="77"/>
+              </a:rPr>
+              <a:t>unbalanced</a:t>
+            </a:r>
+            <a:r>
+              <a:rPr lang="es-ES" sz="1600">
+                <a:latin typeface="Cabin" pitchFamily="2" charset="77"/>
+              </a:rPr>
+              <a:t> </a:t>
+            </a:r>
+            <a:r>
+              <a:rPr lang="es-ES" sz="1600" err="1">
+                <a:latin typeface="Cabin" pitchFamily="2" charset="77"/>
+              </a:rPr>
+              <a:t>conditions</a:t>
+            </a:r>
+            <a:r>
+              <a:rPr lang="es-ES" sz="1600">
+                <a:latin typeface="Cabin" pitchFamily="2" charset="77"/>
+              </a:rPr>
+              <a:t> at </a:t>
+            </a:r>
+            <a:r>
+              <a:rPr lang="es-ES" sz="1600" err="1">
+                <a:latin typeface="Cabin" pitchFamily="2" charset="77"/>
+              </a:rPr>
+              <a:t>weak</a:t>
+            </a:r>
+            <a:r>
+              <a:rPr lang="es-ES" sz="1600">
+                <a:latin typeface="Cabin" pitchFamily="2" charset="77"/>
+              </a:rPr>
+              <a:t> </a:t>
+            </a:r>
+            <a:r>
+              <a:rPr lang="es-ES" sz="1600" err="1">
+                <a:latin typeface="Cabin" pitchFamily="2" charset="77"/>
+              </a:rPr>
+              <a:t>grids</a:t>
+            </a:r>
+            <a:r>
+              <a:rPr lang="es-ES" sz="1600">
+                <a:latin typeface="Cabin" pitchFamily="2" charset="77"/>
+              </a:rPr>
+              <a:t> (single </a:t>
+            </a:r>
+            <a:r>
+              <a:rPr lang="es-ES" sz="1600" err="1">
+                <a:latin typeface="Cabin" pitchFamily="2" charset="77"/>
+              </a:rPr>
+              <a:t>phase</a:t>
+            </a:r>
+            <a:r>
+              <a:rPr lang="es-ES" sz="1600">
+                <a:latin typeface="Cabin" pitchFamily="2" charset="77"/>
+              </a:rPr>
+              <a:t> </a:t>
+            </a:r>
+            <a:r>
+              <a:rPr lang="es-ES" sz="1600" err="1">
+                <a:latin typeface="Cabin" pitchFamily="2" charset="77"/>
+              </a:rPr>
+              <a:t>loads</a:t>
+            </a:r>
+            <a:r>
+              <a:rPr lang="es-ES" sz="1600">
+                <a:latin typeface="Cabin" pitchFamily="2" charset="77"/>
+              </a:rPr>
+              <a:t> and </a:t>
+            </a:r>
+            <a:r>
+              <a:rPr lang="es-ES" sz="1600" err="1">
+                <a:latin typeface="Cabin" pitchFamily="2" charset="77"/>
+              </a:rPr>
+              <a:t>generation</a:t>
+            </a:r>
+            <a:r>
+              <a:rPr lang="es-ES" sz="1600">
+                <a:latin typeface="Cabin" pitchFamily="2" charset="77"/>
+              </a:rPr>
+              <a:t> </a:t>
+            </a:r>
+            <a:r>
+              <a:rPr lang="es-ES" sz="1600" err="1">
+                <a:latin typeface="Cabin" pitchFamily="2" charset="77"/>
+              </a:rPr>
+              <a:t>systems</a:t>
+            </a:r>
+            <a:r>
+              <a:rPr lang="es-ES" sz="1600">
+                <a:latin typeface="Cabin" pitchFamily="2" charset="77"/>
+              </a:rPr>
+              <a:t>). </a:t>
+            </a:r>
+          </a:p>
+          <a:p>
+            <a:pPr marL="285750" indent="-285750" eaLnBrk="1" fontAlgn="auto" hangingPunct="1">
+              <a:spcBef>
+                <a:spcPts val="0"/>
+              </a:spcBef>
+              <a:spcAft>
+                <a:spcPts val="0"/>
+              </a:spcAft>
+              <a:buFont typeface="Wingdings" pitchFamily="2" charset="2"/>
+              <a:buChar char="§"/>
+              <a:defRPr/>
+            </a:pPr>
+            <a:r>
+              <a:rPr lang="es-ES" sz="1600" err="1">
+                <a:latin typeface="Cabin" pitchFamily="2" charset="77"/>
+              </a:rPr>
+              <a:t>Study</a:t>
+            </a:r>
+            <a:r>
+              <a:rPr lang="es-ES" sz="1600">
+                <a:latin typeface="Cabin" pitchFamily="2" charset="77"/>
+              </a:rPr>
+              <a:t> of new </a:t>
+            </a:r>
+            <a:r>
+              <a:rPr lang="es-ES" sz="1600" err="1">
+                <a:latin typeface="Cabin" pitchFamily="2" charset="77"/>
+              </a:rPr>
+              <a:t>economic</a:t>
+            </a:r>
+            <a:r>
+              <a:rPr lang="es-ES" sz="1600">
+                <a:latin typeface="Cabin" pitchFamily="2" charset="77"/>
+              </a:rPr>
+              <a:t> and </a:t>
+            </a:r>
+            <a:r>
+              <a:rPr lang="es-ES" sz="1600" err="1">
+                <a:latin typeface="Cabin" pitchFamily="2" charset="77"/>
+              </a:rPr>
+              <a:t>infrastructure</a:t>
+            </a:r>
+            <a:r>
+              <a:rPr lang="es-ES" sz="1600">
+                <a:latin typeface="Cabin" pitchFamily="2" charset="77"/>
+              </a:rPr>
+              <a:t> </a:t>
+            </a:r>
+            <a:r>
+              <a:rPr lang="es-ES" sz="1600" err="1">
+                <a:latin typeface="Cabin" pitchFamily="2" charset="77"/>
+              </a:rPr>
+              <a:t>models</a:t>
+            </a:r>
+            <a:r>
+              <a:rPr lang="es-ES" sz="1600">
+                <a:latin typeface="Cabin" pitchFamily="2" charset="77"/>
+              </a:rPr>
+              <a:t> </a:t>
+            </a:r>
+            <a:r>
+              <a:rPr lang="es-ES" sz="1600" err="1">
+                <a:latin typeface="Cabin" pitchFamily="2" charset="77"/>
+              </a:rPr>
+              <a:t>relying</a:t>
+            </a:r>
+            <a:r>
+              <a:rPr lang="es-ES" sz="1600">
+                <a:latin typeface="Cabin" pitchFamily="2" charset="77"/>
+              </a:rPr>
+              <a:t> </a:t>
+            </a:r>
+            <a:r>
+              <a:rPr lang="es-ES" sz="1600" err="1">
+                <a:latin typeface="Cabin" pitchFamily="2" charset="77"/>
+              </a:rPr>
+              <a:t>on</a:t>
+            </a:r>
+            <a:r>
+              <a:rPr lang="es-ES" sz="1600">
+                <a:latin typeface="Cabin" pitchFamily="2" charset="77"/>
+              </a:rPr>
+              <a:t> </a:t>
+            </a:r>
+            <a:r>
+              <a:rPr lang="es-ES" sz="1600" err="1">
+                <a:latin typeface="Cabin" pitchFamily="2" charset="77"/>
+              </a:rPr>
+              <a:t>the</a:t>
+            </a:r>
+            <a:r>
+              <a:rPr lang="es-ES" sz="1600">
+                <a:latin typeface="Cabin" pitchFamily="2" charset="77"/>
+              </a:rPr>
+              <a:t> </a:t>
+            </a:r>
+            <a:r>
+              <a:rPr lang="es-ES" sz="1600" err="1">
+                <a:latin typeface="Cabin" pitchFamily="2" charset="77"/>
+              </a:rPr>
+              <a:t>distributed</a:t>
+            </a:r>
+            <a:r>
+              <a:rPr lang="es-ES" sz="1600">
+                <a:latin typeface="Cabin" pitchFamily="2" charset="77"/>
+              </a:rPr>
+              <a:t> </a:t>
+            </a:r>
+            <a:r>
+              <a:rPr lang="es-ES" sz="1600" err="1">
+                <a:latin typeface="Cabin" pitchFamily="2" charset="77"/>
+              </a:rPr>
+              <a:t>generation</a:t>
+            </a:r>
+            <a:r>
+              <a:rPr lang="es-ES" sz="1600">
+                <a:latin typeface="Cabin" pitchFamily="2" charset="77"/>
+              </a:rPr>
+              <a:t>, </a:t>
+            </a:r>
+            <a:r>
+              <a:rPr lang="es-ES" sz="1600" err="1">
+                <a:latin typeface="Cabin" pitchFamily="2" charset="77"/>
+              </a:rPr>
+              <a:t>which</a:t>
+            </a:r>
+            <a:r>
+              <a:rPr lang="es-ES" sz="1600">
+                <a:latin typeface="Cabin" pitchFamily="2" charset="77"/>
+              </a:rPr>
+              <a:t> </a:t>
+            </a:r>
+            <a:r>
+              <a:rPr lang="es-ES" sz="1600" err="1">
+                <a:latin typeface="Cabin" pitchFamily="2" charset="77"/>
+              </a:rPr>
+              <a:t>allow</a:t>
+            </a:r>
+            <a:r>
+              <a:rPr lang="es-ES" sz="1600">
+                <a:latin typeface="Cabin" pitchFamily="2" charset="77"/>
+              </a:rPr>
+              <a:t> to </a:t>
+            </a:r>
+            <a:r>
+              <a:rPr lang="es-ES" sz="1600" err="1">
+                <a:latin typeface="Cabin" pitchFamily="2" charset="77"/>
+              </a:rPr>
+              <a:t>maximize</a:t>
+            </a:r>
+            <a:r>
+              <a:rPr lang="es-ES" sz="1600">
+                <a:latin typeface="Cabin" pitchFamily="2" charset="77"/>
+              </a:rPr>
+              <a:t> </a:t>
+            </a:r>
+            <a:r>
+              <a:rPr lang="es-ES" sz="1600" err="1">
+                <a:latin typeface="Cabin" pitchFamily="2" charset="77"/>
+              </a:rPr>
+              <a:t>the</a:t>
+            </a:r>
+            <a:r>
+              <a:rPr lang="es-ES" sz="1600">
+                <a:latin typeface="Cabin" pitchFamily="2" charset="77"/>
+              </a:rPr>
+              <a:t> </a:t>
+            </a:r>
+            <a:r>
+              <a:rPr lang="es-ES" sz="1600" err="1">
+                <a:latin typeface="Cabin" pitchFamily="2" charset="77"/>
+              </a:rPr>
+              <a:t>benefits</a:t>
+            </a:r>
+            <a:r>
+              <a:rPr lang="es-ES" sz="1600">
+                <a:latin typeface="Cabin" pitchFamily="2" charset="77"/>
+              </a:rPr>
+              <a:t> </a:t>
+            </a:r>
+            <a:r>
+              <a:rPr lang="es-ES" sz="1600" err="1">
+                <a:latin typeface="Cabin" pitchFamily="2" charset="77"/>
+              </a:rPr>
+              <a:t>considering</a:t>
+            </a:r>
+            <a:r>
+              <a:rPr lang="es-ES" sz="1600">
+                <a:latin typeface="Cabin" pitchFamily="2" charset="77"/>
+              </a:rPr>
+              <a:t> </a:t>
+            </a:r>
+            <a:r>
+              <a:rPr lang="es-ES" sz="1600" err="1">
+                <a:latin typeface="Cabin" pitchFamily="2" charset="77"/>
+              </a:rPr>
+              <a:t>the</a:t>
+            </a:r>
+            <a:r>
+              <a:rPr lang="es-ES" sz="1600">
+                <a:latin typeface="Cabin" pitchFamily="2" charset="77"/>
+              </a:rPr>
+              <a:t> </a:t>
+            </a:r>
+            <a:r>
+              <a:rPr lang="es-ES" sz="1600" err="1">
+                <a:latin typeface="Cabin" pitchFamily="2" charset="77"/>
+              </a:rPr>
+              <a:t>existing</a:t>
+            </a:r>
+            <a:r>
+              <a:rPr lang="es-ES" sz="1600">
+                <a:latin typeface="Cabin" pitchFamily="2" charset="77"/>
+              </a:rPr>
+              <a:t> and </a:t>
+            </a:r>
+            <a:r>
+              <a:rPr lang="es-ES" sz="1600" err="1">
+                <a:latin typeface="Cabin" pitchFamily="2" charset="77"/>
+              </a:rPr>
+              <a:t>future</a:t>
+            </a:r>
+            <a:r>
+              <a:rPr lang="es-ES" sz="1600">
+                <a:latin typeface="Cabin" pitchFamily="2" charset="77"/>
+              </a:rPr>
+              <a:t> </a:t>
+            </a:r>
+            <a:r>
+              <a:rPr lang="es-ES" sz="1600" err="1">
+                <a:latin typeface="Cabin" pitchFamily="2" charset="77"/>
+              </a:rPr>
+              <a:t>regulations</a:t>
+            </a:r>
+            <a:r>
+              <a:rPr lang="es-ES" sz="1600">
+                <a:latin typeface="Cabin" pitchFamily="2" charset="77"/>
+              </a:rPr>
+              <a:t>. </a:t>
+            </a:r>
+          </a:p>
+          <a:p>
+            <a:pPr eaLnBrk="1" fontAlgn="auto" hangingPunct="1">
+              <a:spcBef>
+                <a:spcPts val="0"/>
+              </a:spcBef>
+              <a:spcAft>
+                <a:spcPts val="0"/>
+              </a:spcAft>
+              <a:defRPr/>
+            </a:pPr>
+            <a:endParaRPr lang="es-ES">
+              <a:latin typeface="Cabin Regular" pitchFamily="2" charset="77"/>
+            </a:endParaRPr>
+          </a:p>
+        </p:txBody>
+      </p:sp>
+      <p:sp>
+        <p:nvSpPr>
+          <p:cNvPr id="5" name="CuadroTexto 4">
+            <a:extLst>
+              <a:ext uri="{FF2B5EF4-FFF2-40B4-BE49-F238E27FC236}">
+                <a16:creationId xmlns:a16="http://schemas.microsoft.com/office/drawing/2014/main" id="{F020C799-E239-A148-ADF3-3681DDC4490E}"/>
+              </a:ext>
+            </a:extLst>
+          </p:cNvPr>
+          <p:cNvSpPr txBox="1"/>
+          <p:nvPr/>
+        </p:nvSpPr>
+        <p:spPr>
+          <a:xfrm>
+            <a:off x="747713" y="1725613"/>
+            <a:ext cx="5106987" cy="461962"/>
+          </a:xfrm>
+          <a:prstGeom prst="rect">
+            <a:avLst/>
+          </a:prstGeom>
+          <a:noFill/>
+        </p:spPr>
+        <p:txBody>
+          <a:bodyPr>
+            <a:spAutoFit/>
+          </a:bodyPr>
+          <a:lstStyle/>
+          <a:p>
+            <a:pPr eaLnBrk="1" fontAlgn="auto" hangingPunct="1">
+              <a:spcBef>
+                <a:spcPts val="0"/>
+              </a:spcBef>
+              <a:spcAft>
+                <a:spcPts val="0"/>
+              </a:spcAft>
+              <a:defRPr/>
+            </a:pPr>
             <a:r>
               <a:rPr lang="es-ES" sz="2400" b="1" spc="300">
                 <a:latin typeface="Open Sans Extrabold" panose="020B0606030504020204" pitchFamily="34" charset="0"/>
                 <a:ea typeface="Open Sans Extrabold" panose="020B0606030504020204" pitchFamily="34" charset="0"/>
                 <a:cs typeface="Open Sans Extrabold" panose="020B0606030504020204" pitchFamily="34" charset="0"/>
               </a:rPr>
-              <a:t>LINES</a:t>
-            </a:r>
-          </a:p>
-        </p:txBody>
-      </p:sp>
-      <p:sp>
-        <p:nvSpPr>
-          <p:cNvPr id="5" name="Rectángulo 4">
-            <a:extLst>
-              <a:ext uri="{FF2B5EF4-FFF2-40B4-BE49-F238E27FC236}">
-                <a16:creationId xmlns:a16="http://schemas.microsoft.com/office/drawing/2014/main" id="{DC154507-AA8A-3D4E-97B4-EB586EF1D88C}"/>
+              <a:t>OUR VISION</a:t>
+            </a:r>
+          </a:p>
+        </p:txBody>
+      </p:sp>
+      <p:sp>
+        <p:nvSpPr>
+          <p:cNvPr id="6" name="Rectángulo 5">
+            <a:extLst>
+              <a:ext uri="{FF2B5EF4-FFF2-40B4-BE49-F238E27FC236}">
+                <a16:creationId xmlns:a16="http://schemas.microsoft.com/office/drawing/2014/main" id="{4D37A48B-ED06-684C-B584-66BF4D12E5C0}"/>
               </a:ext>
             </a:extLst>
           </p:cNvPr>
@@ -16940,9 +17275,9 @@
           <p:nvPr/>
         </p:nvSpPr>
         <p:spPr>
-          <a:xfrm rot="5400000" flipV="1">
-            <a:off x="1538288" y="3044825"/>
-            <a:ext cx="4343400" cy="44450"/>
+          <a:xfrm flipV="1">
+            <a:off x="3295650" y="2008188"/>
+            <a:ext cx="7808913" cy="46037"/>
           </a:xfrm>
           <a:prstGeom prst="rect">
             <a:avLst/>
@@ -16989,591 +17324,12 @@
           </a:p>
         </p:txBody>
       </p:sp>
-      <p:sp>
-        <p:nvSpPr>
-          <p:cNvPr id="57349" name="CuadroTexto 5">
-            <a:extLst>
-              <a:ext uri="{FF2B5EF4-FFF2-40B4-BE49-F238E27FC236}">
-                <a16:creationId xmlns:a16="http://schemas.microsoft.com/office/drawing/2014/main" id="{BABAA58F-D4B8-C419-41D7-33C20E8F8D1D}"/>
-              </a:ext>
-            </a:extLst>
-          </p:cNvPr>
-          <p:cNvSpPr txBox="1">
-            <a:spLocks noChangeArrowheads="1"/>
-          </p:cNvSpPr>
-          <p:nvPr/>
-        </p:nvSpPr>
-        <p:spPr bwMode="auto">
-          <a:xfrm>
-            <a:off x="3830638" y="895350"/>
-            <a:ext cx="5980112" cy="4710113"/>
-          </a:xfrm>
-          <a:prstGeom prst="rect">
-            <a:avLst/>
-          </a:prstGeom>
-          <a:noFill/>
-          <a:ln>
-            <a:noFill/>
-          </a:ln>
-          <a:extLst>
-            <a:ext uri="{909E8E84-426E-40DD-AFC4-6F175D3DCCD1}">
-              <a14:hiddenFill xmlns:a14="http://schemas.microsoft.com/office/drawing/2010/main">
-                <a:solidFill>
-                  <a:srgbClr val="FFFFFF"/>
-                </a:solidFill>
-              </a14:hiddenFill>
-            </a:ext>
-            <a:ext uri="{91240B29-F687-4F45-9708-019B960494DF}">
-              <a14:hiddenLine xmlns:a14="http://schemas.microsoft.com/office/drawing/2010/main" w="9525">
-                <a:solidFill>
-                  <a:srgbClr val="000000"/>
-                </a:solidFill>
-                <a:miter lim="800000"/>
-                <a:headEnd/>
-                <a:tailEnd/>
-              </a14:hiddenLine>
-            </a:ext>
-          </a:extLst>
-        </p:spPr>
-        <p:txBody>
-          <a:bodyPr>
-            <a:spAutoFit/>
-          </a:bodyPr>
-          <a:lstStyle>
-            <a:lvl1pPr>
-              <a:defRPr>
-                <a:solidFill>
-                  <a:schemeClr val="tx1"/>
-                </a:solidFill>
-                <a:latin typeface="Calibri" panose="020F0502020204030204" pitchFamily="34" charset="0"/>
-              </a:defRPr>
-            </a:lvl1pPr>
-            <a:lvl2pPr>
-              <a:defRPr>
-                <a:solidFill>
-                  <a:schemeClr val="tx1"/>
-                </a:solidFill>
-                <a:latin typeface="Calibri" panose="020F0502020204030204" pitchFamily="34" charset="0"/>
-              </a:defRPr>
-            </a:lvl2pPr>
-            <a:lvl3pPr marL="1143000" indent="-228600">
-              <a:defRPr>
-                <a:solidFill>
-                  <a:schemeClr val="tx1"/>
-                </a:solidFill>
-                <a:latin typeface="Calibri" panose="020F0502020204030204" pitchFamily="34" charset="0"/>
-              </a:defRPr>
-            </a:lvl3pPr>
-            <a:lvl4pPr marL="1600200" indent="-228600">
-              <a:defRPr>
-                <a:solidFill>
-                  <a:schemeClr val="tx1"/>
-                </a:solidFill>
-                <a:latin typeface="Calibri" panose="020F0502020204030204" pitchFamily="34" charset="0"/>
-              </a:defRPr>
-            </a:lvl4pPr>
-            <a:lvl5pPr marL="2057400" indent="-228600">
-              <a:defRPr>
-                <a:solidFill>
-                  <a:schemeClr val="tx1"/>
-                </a:solidFill>
-                <a:latin typeface="Calibri" panose="020F0502020204030204" pitchFamily="34" charset="0"/>
-              </a:defRPr>
-            </a:lvl5pPr>
-            <a:lvl6pPr marL="2514600" indent="-228600" fontAlgn="base">
-              <a:spcBef>
-                <a:spcPct val="0"/>
-              </a:spcBef>
-              <a:spcAft>
-                <a:spcPct val="0"/>
-              </a:spcAft>
-              <a:defRPr>
-                <a:solidFill>
-                  <a:schemeClr val="tx1"/>
-                </a:solidFill>
-                <a:latin typeface="Calibri" panose="020F0502020204030204" pitchFamily="34" charset="0"/>
-              </a:defRPr>
-            </a:lvl6pPr>
-            <a:lvl7pPr marL="2971800" indent="-228600" fontAlgn="base">
-              <a:spcBef>
-                <a:spcPct val="0"/>
-              </a:spcBef>
-              <a:spcAft>
-                <a:spcPct val="0"/>
-              </a:spcAft>
-              <a:defRPr>
-                <a:solidFill>
-                  <a:schemeClr val="tx1"/>
-                </a:solidFill>
-                <a:latin typeface="Calibri" panose="020F0502020204030204" pitchFamily="34" charset="0"/>
-              </a:defRPr>
-            </a:lvl7pPr>
-            <a:lvl8pPr marL="3429000" indent="-228600" fontAlgn="base">
-              <a:spcBef>
-                <a:spcPct val="0"/>
-              </a:spcBef>
-              <a:spcAft>
-                <a:spcPct val="0"/>
-              </a:spcAft>
-              <a:defRPr>
-                <a:solidFill>
-                  <a:schemeClr val="tx1"/>
-                </a:solidFill>
-                <a:latin typeface="Calibri" panose="020F0502020204030204" pitchFamily="34" charset="0"/>
-              </a:defRPr>
-            </a:lvl8pPr>
-            <a:lvl9pPr marL="3886200" indent="-228600" fontAlgn="base">
-              <a:spcBef>
-                <a:spcPct val="0"/>
-              </a:spcBef>
-              <a:spcAft>
-                <a:spcPct val="0"/>
-              </a:spcAft>
-              <a:defRPr>
-                <a:solidFill>
-                  <a:schemeClr val="tx1"/>
-                </a:solidFill>
-                <a:latin typeface="Calibri" panose="020F0502020204030204" pitchFamily="34" charset="0"/>
-              </a:defRPr>
-            </a:lvl9pPr>
-          </a:lstStyle>
-          <a:p>
-            <a:pPr eaLnBrk="1" hangingPunct="1"/>
-            <a:r>
-              <a:rPr lang="es-ES" altLang="es-ES" sz="1600" b="1">
-                <a:latin typeface="Open Sans" panose="020B0606030504020204" pitchFamily="34" charset="0"/>
-                <a:cs typeface="Open Sans" panose="020B0606030504020204" pitchFamily="34" charset="0"/>
-              </a:rPr>
-              <a:t>ANALYSIS AND DESIGN OF POWER CONVERTER TOPOLOGIES FOR ENERGY STORAGE </a:t>
-            </a:r>
-          </a:p>
-          <a:p>
-            <a:pPr lvl="1" eaLnBrk="1" hangingPunct="1"/>
-            <a:r>
-              <a:rPr lang="es-ES" altLang="es-ES" sz="1400">
-                <a:latin typeface="Cabin" pitchFamily="2" charset="0"/>
-              </a:rPr>
-              <a:t>Design of power electronics converters with an emphasis of multiport topologies for energy storage applications </a:t>
-            </a:r>
-          </a:p>
-          <a:p>
-            <a:pPr eaLnBrk="1" hangingPunct="1"/>
-            <a:endParaRPr lang="es-ES" altLang="es-ES" sz="1400">
-              <a:latin typeface="Cabin" pitchFamily="2" charset="0"/>
-            </a:endParaRPr>
-          </a:p>
-          <a:p>
-            <a:pPr eaLnBrk="1" hangingPunct="1"/>
-            <a:r>
-              <a:rPr lang="es-ES" altLang="es-ES" sz="1600" b="1">
-                <a:latin typeface="Open Sans" panose="020B0606030504020204" pitchFamily="34" charset="0"/>
-                <a:cs typeface="Open Sans" panose="020B0606030504020204" pitchFamily="34" charset="0"/>
-              </a:rPr>
-              <a:t>DYNAMIC ANALYSIS AND CONTROL OF POWER CONVERTERS FOR DISTRIBUTED RESOURCES </a:t>
-            </a:r>
-          </a:p>
-          <a:p>
-            <a:pPr lvl="1" eaLnBrk="1" hangingPunct="1"/>
-            <a:r>
-              <a:rPr lang="es-ES" altLang="es-ES" sz="1400">
-                <a:latin typeface="Cabin" pitchFamily="2" charset="0"/>
-              </a:rPr>
-              <a:t>High dynamic performance of power converters and microgrids by advanced control systems </a:t>
-            </a:r>
-          </a:p>
-          <a:p>
-            <a:pPr eaLnBrk="1" hangingPunct="1"/>
-            <a:endParaRPr lang="es-ES" altLang="es-ES" sz="1400">
-              <a:latin typeface="Cabin" pitchFamily="2" charset="0"/>
-            </a:endParaRPr>
-          </a:p>
-          <a:p>
-            <a:pPr eaLnBrk="1" hangingPunct="1"/>
-            <a:r>
-              <a:rPr lang="es-ES" altLang="es-ES" sz="1600" b="1">
-                <a:latin typeface="Open Sans" panose="020B0606030504020204" pitchFamily="34" charset="0"/>
-                <a:cs typeface="Open Sans" panose="020B0606030504020204" pitchFamily="34" charset="0"/>
-              </a:rPr>
-              <a:t>POWER FLOW ANALYSIS FOR HYBRID DC/AC GRIDS WITH HIGH PENETRATION OF DISTRIBUTED RESOURCES </a:t>
-            </a:r>
-          </a:p>
-          <a:p>
-            <a:pPr lvl="1" eaLnBrk="1" hangingPunct="1"/>
-            <a:r>
-              <a:rPr lang="es-ES" altLang="es-ES" sz="1400">
-                <a:latin typeface="Cabin" pitchFamily="2" charset="0"/>
-              </a:rPr>
-              <a:t>Impact of the integration of distributed resources in the electrical grid </a:t>
-            </a:r>
-          </a:p>
-          <a:p>
-            <a:pPr eaLnBrk="1" hangingPunct="1"/>
-            <a:endParaRPr lang="es-ES" altLang="es-ES" sz="1400">
-              <a:latin typeface="Cabin" pitchFamily="2" charset="0"/>
-            </a:endParaRPr>
-          </a:p>
-          <a:p>
-            <a:pPr eaLnBrk="1" hangingPunct="1"/>
-            <a:r>
-              <a:rPr lang="es-ES" altLang="es-ES" sz="1600" b="1">
-                <a:latin typeface="Open Sans" panose="020B0606030504020204" pitchFamily="34" charset="0"/>
-                <a:cs typeface="Open Sans" panose="020B0606030504020204" pitchFamily="34" charset="0"/>
-              </a:rPr>
-              <a:t>ENERGY DEMAND ANALYSIS AND VISUALIZATION </a:t>
-            </a:r>
-          </a:p>
-          <a:p>
-            <a:pPr lvl="1" eaLnBrk="1" hangingPunct="1"/>
-            <a:r>
-              <a:rPr lang="es-ES" altLang="es-ES" sz="1400">
-                <a:latin typeface="Cabin" pitchFamily="2" charset="0"/>
-              </a:rPr>
-              <a:t>Analytic tools and visualization strategies for energy planning </a:t>
-            </a:r>
-          </a:p>
-          <a:p>
-            <a:pPr eaLnBrk="1" hangingPunct="1"/>
-            <a:endParaRPr lang="es-ES" altLang="es-ES" sz="1400">
-              <a:latin typeface="Cabin" pitchFamily="2" charset="0"/>
-            </a:endParaRPr>
-          </a:p>
-          <a:p>
-            <a:pPr eaLnBrk="1" hangingPunct="1"/>
-            <a:r>
-              <a:rPr lang="es-ES" altLang="es-ES" sz="1600" b="1">
-                <a:latin typeface="Open Sans" panose="020B0606030504020204" pitchFamily="34" charset="0"/>
-                <a:cs typeface="Open Sans" panose="020B0606030504020204" pitchFamily="34" charset="0"/>
-              </a:rPr>
-              <a:t>APPLICATIONS</a:t>
-            </a:r>
-            <a:r>
-              <a:rPr lang="es-ES" altLang="es-ES" sz="1400">
-                <a:latin typeface="Cabin" pitchFamily="2" charset="0"/>
-              </a:rPr>
-              <a:t> </a:t>
-            </a:r>
-          </a:p>
-          <a:p>
-            <a:pPr lvl="1" eaLnBrk="1" hangingPunct="1"/>
-            <a:r>
-              <a:rPr lang="es-ES" altLang="es-ES" sz="1400">
-                <a:latin typeface="Cabin" pitchFamily="2" charset="0"/>
-              </a:rPr>
-              <a:t>Industrial applications and knowledge transfer </a:t>
-            </a:r>
-          </a:p>
-          <a:p>
-            <a:pPr eaLnBrk="1" hangingPunct="1"/>
-            <a:endParaRPr lang="en-GB" altLang="es-ES"/>
-          </a:p>
-        </p:txBody>
-      </p:sp>
-      <p:sp>
-        <p:nvSpPr>
-          <p:cNvPr id="7" name="Rectángulo 6">
-            <a:extLst>
-              <a:ext uri="{FF2B5EF4-FFF2-40B4-BE49-F238E27FC236}">
-                <a16:creationId xmlns:a16="http://schemas.microsoft.com/office/drawing/2014/main" id="{748A2B4F-64EB-6C41-BC10-98F2FA13B8DD}"/>
-              </a:ext>
-            </a:extLst>
-          </p:cNvPr>
-          <p:cNvSpPr/>
-          <p:nvPr/>
-        </p:nvSpPr>
-        <p:spPr>
-          <a:xfrm>
-            <a:off x="3959225" y="1563688"/>
-            <a:ext cx="292100" cy="46037"/>
-          </a:xfrm>
-          <a:prstGeom prst="rect">
-            <a:avLst/>
-          </a:prstGeom>
-          <a:solidFill>
-            <a:srgbClr val="FFCC28"/>
-          </a:solidFill>
-          <a:ln>
-            <a:noFill/>
-          </a:ln>
-        </p:spPr>
-        <p:style>
-          <a:lnRef idx="2">
-            <a:schemeClr val="accent1">
-              <a:shade val="50000"/>
-            </a:schemeClr>
-          </a:lnRef>
-          <a:fillRef idx="1">
-            <a:schemeClr val="accent1"/>
-          </a:fillRef>
-          <a:effectRef idx="0">
-            <a:schemeClr val="accent1"/>
-          </a:effectRef>
-          <a:fontRef idx="minor">
-            <a:schemeClr val="lt1"/>
-          </a:fontRef>
-        </p:style>
-        <p:txBody>
-          <a:bodyPr anchor="ctr"/>
-          <a:lstStyle/>
-          <a:p>
-            <a:pPr algn="ctr" eaLnBrk="1" fontAlgn="auto" hangingPunct="1">
-              <a:spcBef>
-                <a:spcPts val="0"/>
-              </a:spcBef>
-              <a:spcAft>
-                <a:spcPts val="0"/>
-              </a:spcAft>
-              <a:defRPr/>
-            </a:pPr>
-            <a:endParaRPr lang="en-GB"/>
-          </a:p>
-        </p:txBody>
-      </p:sp>
-      <p:sp>
-        <p:nvSpPr>
-          <p:cNvPr id="8" name="Rectángulo 7">
-            <a:extLst>
-              <a:ext uri="{FF2B5EF4-FFF2-40B4-BE49-F238E27FC236}">
-                <a16:creationId xmlns:a16="http://schemas.microsoft.com/office/drawing/2014/main" id="{536DAC0A-0D63-CC42-90E6-6F35343574CE}"/>
-              </a:ext>
-            </a:extLst>
-          </p:cNvPr>
-          <p:cNvSpPr/>
-          <p:nvPr/>
-        </p:nvSpPr>
-        <p:spPr>
-          <a:xfrm>
-            <a:off x="3959225" y="2670175"/>
-            <a:ext cx="292100" cy="46038"/>
-          </a:xfrm>
-          <a:prstGeom prst="rect">
-            <a:avLst/>
-          </a:prstGeom>
-          <a:solidFill>
-            <a:srgbClr val="FFCC28"/>
-          </a:solidFill>
-          <a:ln>
-            <a:noFill/>
-          </a:ln>
-        </p:spPr>
-        <p:style>
-          <a:lnRef idx="2">
-            <a:schemeClr val="accent1">
-              <a:shade val="50000"/>
-            </a:schemeClr>
-          </a:lnRef>
-          <a:fillRef idx="1">
-            <a:schemeClr val="accent1"/>
-          </a:fillRef>
-          <a:effectRef idx="0">
-            <a:schemeClr val="accent1"/>
-          </a:effectRef>
-          <a:fontRef idx="minor">
-            <a:schemeClr val="lt1"/>
-          </a:fontRef>
-        </p:style>
-        <p:txBody>
-          <a:bodyPr anchor="ctr"/>
-          <a:lstStyle/>
-          <a:p>
-            <a:pPr algn="ctr" eaLnBrk="1" fontAlgn="auto" hangingPunct="1">
-              <a:spcBef>
-                <a:spcPts val="0"/>
-              </a:spcBef>
-              <a:spcAft>
-                <a:spcPts val="0"/>
-              </a:spcAft>
-              <a:defRPr/>
-            </a:pPr>
-            <a:endParaRPr lang="en-GB"/>
-          </a:p>
-        </p:txBody>
-      </p:sp>
-      <p:sp>
-        <p:nvSpPr>
-          <p:cNvPr id="9" name="Rectángulo 8">
-            <a:extLst>
-              <a:ext uri="{FF2B5EF4-FFF2-40B4-BE49-F238E27FC236}">
-                <a16:creationId xmlns:a16="http://schemas.microsoft.com/office/drawing/2014/main" id="{8AC72E53-7808-8C46-95F3-685737430258}"/>
-              </a:ext>
-            </a:extLst>
-          </p:cNvPr>
-          <p:cNvSpPr/>
-          <p:nvPr/>
-        </p:nvSpPr>
-        <p:spPr>
-          <a:xfrm>
-            <a:off x="3959225" y="3803650"/>
-            <a:ext cx="292100" cy="46038"/>
-          </a:xfrm>
-          <a:prstGeom prst="rect">
-            <a:avLst/>
-          </a:prstGeom>
-          <a:solidFill>
-            <a:srgbClr val="FFCC28"/>
-          </a:solidFill>
-          <a:ln>
-            <a:noFill/>
-          </a:ln>
-        </p:spPr>
-        <p:style>
-          <a:lnRef idx="2">
-            <a:schemeClr val="accent1">
-              <a:shade val="50000"/>
-            </a:schemeClr>
-          </a:lnRef>
-          <a:fillRef idx="1">
-            <a:schemeClr val="accent1"/>
-          </a:fillRef>
-          <a:effectRef idx="0">
-            <a:schemeClr val="accent1"/>
-          </a:effectRef>
-          <a:fontRef idx="minor">
-            <a:schemeClr val="lt1"/>
-          </a:fontRef>
-        </p:style>
-        <p:txBody>
-          <a:bodyPr anchor="ctr"/>
-          <a:lstStyle/>
-          <a:p>
-            <a:pPr algn="ctr" eaLnBrk="1" fontAlgn="auto" hangingPunct="1">
-              <a:spcBef>
-                <a:spcPts val="0"/>
-              </a:spcBef>
-              <a:spcAft>
-                <a:spcPts val="0"/>
-              </a:spcAft>
-              <a:defRPr/>
-            </a:pPr>
-            <a:endParaRPr lang="en-GB"/>
-          </a:p>
-        </p:txBody>
-      </p:sp>
-      <p:sp>
-        <p:nvSpPr>
-          <p:cNvPr id="10" name="Rectángulo 9">
-            <a:extLst>
-              <a:ext uri="{FF2B5EF4-FFF2-40B4-BE49-F238E27FC236}">
-                <a16:creationId xmlns:a16="http://schemas.microsoft.com/office/drawing/2014/main" id="{CD52192D-C3AE-5E4D-8C94-6C23A53A6728}"/>
-              </a:ext>
-            </a:extLst>
-          </p:cNvPr>
-          <p:cNvSpPr/>
-          <p:nvPr/>
-        </p:nvSpPr>
-        <p:spPr>
-          <a:xfrm>
-            <a:off x="3959225" y="4479925"/>
-            <a:ext cx="292100" cy="46038"/>
-          </a:xfrm>
-          <a:prstGeom prst="rect">
-            <a:avLst/>
-          </a:prstGeom>
-          <a:solidFill>
-            <a:srgbClr val="FFCC28"/>
-          </a:solidFill>
-          <a:ln>
-            <a:noFill/>
-          </a:ln>
-        </p:spPr>
-        <p:style>
-          <a:lnRef idx="2">
-            <a:schemeClr val="accent1">
-              <a:shade val="50000"/>
-            </a:schemeClr>
-          </a:lnRef>
-          <a:fillRef idx="1">
-            <a:schemeClr val="accent1"/>
-          </a:fillRef>
-          <a:effectRef idx="0">
-            <a:schemeClr val="accent1"/>
-          </a:effectRef>
-          <a:fontRef idx="minor">
-            <a:schemeClr val="lt1"/>
-          </a:fontRef>
-        </p:style>
-        <p:txBody>
-          <a:bodyPr anchor="ctr"/>
-          <a:lstStyle/>
-          <a:p>
-            <a:pPr algn="ctr" eaLnBrk="1" fontAlgn="auto" hangingPunct="1">
-              <a:spcBef>
-                <a:spcPts val="0"/>
-              </a:spcBef>
-              <a:spcAft>
-                <a:spcPts val="0"/>
-              </a:spcAft>
-              <a:defRPr/>
-            </a:pPr>
-            <a:endParaRPr lang="en-GB"/>
-          </a:p>
-        </p:txBody>
-      </p:sp>
-      <p:sp>
-        <p:nvSpPr>
-          <p:cNvPr id="11" name="Rectángulo 10">
-            <a:extLst>
-              <a:ext uri="{FF2B5EF4-FFF2-40B4-BE49-F238E27FC236}">
-                <a16:creationId xmlns:a16="http://schemas.microsoft.com/office/drawing/2014/main" id="{FA1510A5-8CF1-F64C-AF37-D88839FBCCC9}"/>
-              </a:ext>
-            </a:extLst>
-          </p:cNvPr>
-          <p:cNvSpPr/>
-          <p:nvPr/>
-        </p:nvSpPr>
-        <p:spPr>
-          <a:xfrm>
-            <a:off x="3959225" y="5129213"/>
-            <a:ext cx="292100" cy="46037"/>
-          </a:xfrm>
-          <a:prstGeom prst="rect">
-            <a:avLst/>
-          </a:prstGeom>
-          <a:solidFill>
-            <a:srgbClr val="FFCC28"/>
-          </a:solidFill>
-          <a:ln>
-            <a:noFill/>
-          </a:ln>
-        </p:spPr>
-        <p:style>
-          <a:lnRef idx="2">
-            <a:schemeClr val="accent1">
-              <a:shade val="50000"/>
-            </a:schemeClr>
-          </a:lnRef>
-          <a:fillRef idx="1">
-            <a:schemeClr val="accent1"/>
-          </a:fillRef>
-          <a:effectRef idx="0">
-            <a:schemeClr val="accent1"/>
-          </a:effectRef>
-          <a:fontRef idx="minor">
-            <a:schemeClr val="lt1"/>
-          </a:fontRef>
-        </p:style>
-        <p:txBody>
-          <a:bodyPr anchor="ctr"/>
-          <a:lstStyle/>
-          <a:p>
-            <a:pPr algn="ctr" eaLnBrk="1" fontAlgn="auto" hangingPunct="1">
-              <a:spcBef>
-                <a:spcPts val="0"/>
-              </a:spcBef>
-              <a:spcAft>
-                <a:spcPts val="0"/>
-              </a:spcAft>
-              <a:defRPr/>
-            </a:pPr>
-            <a:endParaRPr lang="en-GB"/>
-          </a:p>
-        </p:txBody>
-      </p:sp>
       <p:pic>
         <p:nvPicPr>
-          <p:cNvPr id="19" name="Imagen 5">
-            <a:extLst>
-              <a:ext uri="{FF2B5EF4-FFF2-40B4-BE49-F238E27FC236}">
-                <a16:creationId xmlns:a16="http://schemas.microsoft.com/office/drawing/2014/main" id="{A24A3DB0-D8FE-BBB1-F420-60C2E13C7F05}"/>
+          <p:cNvPr id="11" name="Imagen 5">
+            <a:extLst>
+              <a:ext uri="{FF2B5EF4-FFF2-40B4-BE49-F238E27FC236}">
+                <a16:creationId xmlns:a16="http://schemas.microsoft.com/office/drawing/2014/main" id="{0691187F-7426-2E50-268E-DAD0E153A36F}"/>
               </a:ext>
             </a:extLst>
           </p:cNvPr>
@@ -17583,7 +17339,7 @@
           <p:nvPr/>
         </p:nvPicPr>
         <p:blipFill>
-          <a:blip r:embed="rId3">
+          <a:blip r:embed="rId2">
             <a:extLst>
               <a:ext uri="{28A0092B-C50C-407E-A947-70E740481C1C}">
                 <a14:useLocalDpi xmlns:a14="http://schemas.microsoft.com/office/drawing/2010/main" val="0"/>
@@ -17630,10 +17386,10 @@
       </p:pic>
       <p:pic>
         <p:nvPicPr>
-          <p:cNvPr id="20" name="Picture 2">
-            <a:extLst>
-              <a:ext uri="{FF2B5EF4-FFF2-40B4-BE49-F238E27FC236}">
-                <a16:creationId xmlns:a16="http://schemas.microsoft.com/office/drawing/2014/main" id="{E7165E5E-DFAF-3BAD-84CE-3F016C9F9FEF}"/>
+          <p:cNvPr id="12" name="Picture 2">
+            <a:extLst>
+              <a:ext uri="{FF2B5EF4-FFF2-40B4-BE49-F238E27FC236}">
+                <a16:creationId xmlns:a16="http://schemas.microsoft.com/office/drawing/2014/main" id="{E64C7E90-E453-BCEB-4D85-7A78E5BB0436}"/>
               </a:ext>
             </a:extLst>
           </p:cNvPr>
@@ -17643,7 +17399,7 @@
           <p:nvPr/>
         </p:nvPicPr>
         <p:blipFill>
-          <a:blip r:embed="rId4">
+          <a:blip r:embed="rId3">
             <a:extLst>
               <a:ext uri="{28A0092B-C50C-407E-A947-70E740481C1C}">
                 <a14:useLocalDpi xmlns:a14="http://schemas.microsoft.com/office/drawing/2010/main" val="0"/>
@@ -17715,6 +17471,996 @@
       </p:grpSpPr>
       <p:sp>
         <p:nvSpPr>
+          <p:cNvPr id="3" name="Marcador de número de diapositiva 2">
+            <a:extLst>
+              <a:ext uri="{FF2B5EF4-FFF2-40B4-BE49-F238E27FC236}">
+                <a16:creationId xmlns:a16="http://schemas.microsoft.com/office/drawing/2014/main" id="{161E976B-3C33-384A-A0AE-D160C204AFAC}"/>
+              </a:ext>
+            </a:extLst>
+          </p:cNvPr>
+          <p:cNvSpPr>
+            <a:spLocks noGrp="1"/>
+          </p:cNvSpPr>
+          <p:nvPr>
+            <p:ph type="sldNum" sz="quarter" idx="12"/>
+          </p:nvPr>
+        </p:nvSpPr>
+        <p:spPr/>
+        <p:txBody>
+          <a:bodyPr/>
+          <a:lstStyle>
+            <a:lvl1pPr>
+              <a:defRPr>
+                <a:solidFill>
+                  <a:schemeClr val="tx1"/>
+                </a:solidFill>
+                <a:latin typeface="Calibri" panose="020F0502020204030204" pitchFamily="34" charset="0"/>
+              </a:defRPr>
+            </a:lvl1pPr>
+            <a:lvl2pPr marL="742950" indent="-285750">
+              <a:defRPr>
+                <a:solidFill>
+                  <a:schemeClr val="tx1"/>
+                </a:solidFill>
+                <a:latin typeface="Calibri" panose="020F0502020204030204" pitchFamily="34" charset="0"/>
+              </a:defRPr>
+            </a:lvl2pPr>
+            <a:lvl3pPr marL="1143000" indent="-228600">
+              <a:defRPr>
+                <a:solidFill>
+                  <a:schemeClr val="tx1"/>
+                </a:solidFill>
+                <a:latin typeface="Calibri" panose="020F0502020204030204" pitchFamily="34" charset="0"/>
+              </a:defRPr>
+            </a:lvl3pPr>
+            <a:lvl4pPr marL="1600200" indent="-228600">
+              <a:defRPr>
+                <a:solidFill>
+                  <a:schemeClr val="tx1"/>
+                </a:solidFill>
+                <a:latin typeface="Calibri" panose="020F0502020204030204" pitchFamily="34" charset="0"/>
+              </a:defRPr>
+            </a:lvl4pPr>
+            <a:lvl5pPr marL="2057400" indent="-228600">
+              <a:defRPr>
+                <a:solidFill>
+                  <a:schemeClr val="tx1"/>
+                </a:solidFill>
+                <a:latin typeface="Calibri" panose="020F0502020204030204" pitchFamily="34" charset="0"/>
+              </a:defRPr>
+            </a:lvl5pPr>
+            <a:lvl6pPr marL="2514600" indent="-228600" fontAlgn="base">
+              <a:spcBef>
+                <a:spcPct val="0"/>
+              </a:spcBef>
+              <a:spcAft>
+                <a:spcPct val="0"/>
+              </a:spcAft>
+              <a:defRPr>
+                <a:solidFill>
+                  <a:schemeClr val="tx1"/>
+                </a:solidFill>
+                <a:latin typeface="Calibri" panose="020F0502020204030204" pitchFamily="34" charset="0"/>
+              </a:defRPr>
+            </a:lvl6pPr>
+            <a:lvl7pPr marL="2971800" indent="-228600" fontAlgn="base">
+              <a:spcBef>
+                <a:spcPct val="0"/>
+              </a:spcBef>
+              <a:spcAft>
+                <a:spcPct val="0"/>
+              </a:spcAft>
+              <a:defRPr>
+                <a:solidFill>
+                  <a:schemeClr val="tx1"/>
+                </a:solidFill>
+                <a:latin typeface="Calibri" panose="020F0502020204030204" pitchFamily="34" charset="0"/>
+              </a:defRPr>
+            </a:lvl7pPr>
+            <a:lvl8pPr marL="3429000" indent="-228600" fontAlgn="base">
+              <a:spcBef>
+                <a:spcPct val="0"/>
+              </a:spcBef>
+              <a:spcAft>
+                <a:spcPct val="0"/>
+              </a:spcAft>
+              <a:defRPr>
+                <a:solidFill>
+                  <a:schemeClr val="tx1"/>
+                </a:solidFill>
+                <a:latin typeface="Calibri" panose="020F0502020204030204" pitchFamily="34" charset="0"/>
+              </a:defRPr>
+            </a:lvl8pPr>
+            <a:lvl9pPr marL="3886200" indent="-228600" fontAlgn="base">
+              <a:spcBef>
+                <a:spcPct val="0"/>
+              </a:spcBef>
+              <a:spcAft>
+                <a:spcPct val="0"/>
+              </a:spcAft>
+              <a:defRPr>
+                <a:solidFill>
+                  <a:schemeClr val="tx1"/>
+                </a:solidFill>
+                <a:latin typeface="Calibri" panose="020F0502020204030204" pitchFamily="34" charset="0"/>
+              </a:defRPr>
+            </a:lvl9pPr>
+          </a:lstStyle>
+          <a:p>
+            <a:fld id="{4BBE97E3-8C9F-42E3-9D89-BE392B084C60}" type="slidenum">
+              <a:rPr lang="es-ES" altLang="es-ES">
+                <a:solidFill>
+                  <a:srgbClr val="898989"/>
+                </a:solidFill>
+                <a:latin typeface="Cabin Regular" pitchFamily="2" charset="0"/>
+              </a:rPr>
+              <a:pPr/>
+              <a:t>28</a:t>
+            </a:fld>
+            <a:endParaRPr lang="es-ES" altLang="es-ES">
+              <a:solidFill>
+                <a:srgbClr val="898989"/>
+              </a:solidFill>
+              <a:latin typeface="Cabin Regular" pitchFamily="2" charset="0"/>
+            </a:endParaRPr>
+          </a:p>
+        </p:txBody>
+      </p:sp>
+      <p:sp>
+        <p:nvSpPr>
+          <p:cNvPr id="4" name="CuadroTexto 3">
+            <a:extLst>
+              <a:ext uri="{FF2B5EF4-FFF2-40B4-BE49-F238E27FC236}">
+                <a16:creationId xmlns:a16="http://schemas.microsoft.com/office/drawing/2014/main" id="{24A2567D-D3EE-1448-8A0B-D571F1852224}"/>
+              </a:ext>
+            </a:extLst>
+          </p:cNvPr>
+          <p:cNvSpPr txBox="1"/>
+          <p:nvPr/>
+        </p:nvSpPr>
+        <p:spPr>
+          <a:xfrm>
+            <a:off x="-1419225" y="1725613"/>
+            <a:ext cx="5106988" cy="831850"/>
+          </a:xfrm>
+          <a:prstGeom prst="rect">
+            <a:avLst/>
+          </a:prstGeom>
+          <a:noFill/>
+        </p:spPr>
+        <p:txBody>
+          <a:bodyPr>
+            <a:spAutoFit/>
+          </a:bodyPr>
+          <a:lstStyle/>
+          <a:p>
+            <a:pPr algn="r" eaLnBrk="1" fontAlgn="auto" hangingPunct="1">
+              <a:spcBef>
+                <a:spcPts val="0"/>
+              </a:spcBef>
+              <a:spcAft>
+                <a:spcPts val="0"/>
+              </a:spcAft>
+              <a:defRPr/>
+            </a:pPr>
+            <a:r>
+              <a:rPr lang="es-ES" sz="2400" b="1" spc="300">
+                <a:latin typeface="Open Sans Extrabold" panose="020B0606030504020204" pitchFamily="34" charset="0"/>
+                <a:ea typeface="Open Sans Extrabold" panose="020B0606030504020204" pitchFamily="34" charset="0"/>
+                <a:cs typeface="Open Sans Extrabold" panose="020B0606030504020204" pitchFamily="34" charset="0"/>
+              </a:rPr>
+              <a:t>OUR RESEARCH </a:t>
+            </a:r>
+          </a:p>
+          <a:p>
+            <a:pPr algn="r" eaLnBrk="1" fontAlgn="auto" hangingPunct="1">
+              <a:spcBef>
+                <a:spcPts val="0"/>
+              </a:spcBef>
+              <a:spcAft>
+                <a:spcPts val="0"/>
+              </a:spcAft>
+              <a:defRPr/>
+            </a:pPr>
+            <a:r>
+              <a:rPr lang="es-ES" sz="2400" b="1" spc="300">
+                <a:latin typeface="Open Sans Extrabold" panose="020B0606030504020204" pitchFamily="34" charset="0"/>
+                <a:ea typeface="Open Sans Extrabold" panose="020B0606030504020204" pitchFamily="34" charset="0"/>
+                <a:cs typeface="Open Sans Extrabold" panose="020B0606030504020204" pitchFamily="34" charset="0"/>
+              </a:rPr>
+              <a:t>LINES</a:t>
+            </a:r>
+          </a:p>
+        </p:txBody>
+      </p:sp>
+      <p:sp>
+        <p:nvSpPr>
+          <p:cNvPr id="5" name="Rectángulo 4">
+            <a:extLst>
+              <a:ext uri="{FF2B5EF4-FFF2-40B4-BE49-F238E27FC236}">
+                <a16:creationId xmlns:a16="http://schemas.microsoft.com/office/drawing/2014/main" id="{DC154507-AA8A-3D4E-97B4-EB586EF1D88C}"/>
+              </a:ext>
+            </a:extLst>
+          </p:cNvPr>
+          <p:cNvSpPr/>
+          <p:nvPr/>
+        </p:nvSpPr>
+        <p:spPr>
+          <a:xfrm rot="5400000" flipV="1">
+            <a:off x="1538288" y="3044825"/>
+            <a:ext cx="4343400" cy="44450"/>
+          </a:xfrm>
+          <a:prstGeom prst="rect">
+            <a:avLst/>
+          </a:prstGeom>
+          <a:solidFill>
+            <a:srgbClr val="FFCC28"/>
+          </a:solidFill>
+          <a:ln>
+            <a:noFill/>
+          </a:ln>
+        </p:spPr>
+        <p:style>
+          <a:lnRef idx="2">
+            <a:schemeClr val="accent1">
+              <a:shade val="50000"/>
+            </a:schemeClr>
+          </a:lnRef>
+          <a:fillRef idx="1">
+            <a:schemeClr val="accent1"/>
+          </a:fillRef>
+          <a:effectRef idx="0">
+            <a:schemeClr val="accent1"/>
+          </a:effectRef>
+          <a:fontRef idx="minor">
+            <a:schemeClr val="lt1"/>
+          </a:fontRef>
+        </p:style>
+        <p:txBody>
+          <a:bodyPr anchor="ctr"/>
+          <a:lstStyle/>
+          <a:p>
+            <a:pPr algn="ctr" eaLnBrk="1" fontAlgn="auto" hangingPunct="1">
+              <a:spcBef>
+                <a:spcPts val="0"/>
+              </a:spcBef>
+              <a:spcAft>
+                <a:spcPts val="0"/>
+              </a:spcAft>
+              <a:defRPr/>
+            </a:pPr>
+            <a:endParaRPr lang="es-ES">
+              <a:latin typeface="Cabin Regular" pitchFamily="2" charset="77"/>
+            </a:endParaRPr>
+          </a:p>
+        </p:txBody>
+      </p:sp>
+      <p:sp>
+        <p:nvSpPr>
+          <p:cNvPr id="57349" name="CuadroTexto 5">
+            <a:extLst>
+              <a:ext uri="{FF2B5EF4-FFF2-40B4-BE49-F238E27FC236}">
+                <a16:creationId xmlns:a16="http://schemas.microsoft.com/office/drawing/2014/main" id="{BABAA58F-D4B8-C419-41D7-33C20E8F8D1D}"/>
+              </a:ext>
+            </a:extLst>
+          </p:cNvPr>
+          <p:cNvSpPr txBox="1">
+            <a:spLocks noChangeArrowheads="1"/>
+          </p:cNvSpPr>
+          <p:nvPr/>
+        </p:nvSpPr>
+        <p:spPr bwMode="auto">
+          <a:xfrm>
+            <a:off x="3830638" y="895350"/>
+            <a:ext cx="5980112" cy="4710113"/>
+          </a:xfrm>
+          <a:prstGeom prst="rect">
+            <a:avLst/>
+          </a:prstGeom>
+          <a:noFill/>
+          <a:ln>
+            <a:noFill/>
+          </a:ln>
+          <a:extLst>
+            <a:ext uri="{909E8E84-426E-40DD-AFC4-6F175D3DCCD1}">
+              <a14:hiddenFill xmlns:a14="http://schemas.microsoft.com/office/drawing/2010/main">
+                <a:solidFill>
+                  <a:srgbClr val="FFFFFF"/>
+                </a:solidFill>
+              </a14:hiddenFill>
+            </a:ext>
+            <a:ext uri="{91240B29-F687-4F45-9708-019B960494DF}">
+              <a14:hiddenLine xmlns:a14="http://schemas.microsoft.com/office/drawing/2010/main" w="9525">
+                <a:solidFill>
+                  <a:srgbClr val="000000"/>
+                </a:solidFill>
+                <a:miter lim="800000"/>
+                <a:headEnd/>
+                <a:tailEnd/>
+              </a14:hiddenLine>
+            </a:ext>
+          </a:extLst>
+        </p:spPr>
+        <p:txBody>
+          <a:bodyPr>
+            <a:spAutoFit/>
+          </a:bodyPr>
+          <a:lstStyle>
+            <a:lvl1pPr>
+              <a:defRPr>
+                <a:solidFill>
+                  <a:schemeClr val="tx1"/>
+                </a:solidFill>
+                <a:latin typeface="Calibri" panose="020F0502020204030204" pitchFamily="34" charset="0"/>
+              </a:defRPr>
+            </a:lvl1pPr>
+            <a:lvl2pPr>
+              <a:defRPr>
+                <a:solidFill>
+                  <a:schemeClr val="tx1"/>
+                </a:solidFill>
+                <a:latin typeface="Calibri" panose="020F0502020204030204" pitchFamily="34" charset="0"/>
+              </a:defRPr>
+            </a:lvl2pPr>
+            <a:lvl3pPr marL="1143000" indent="-228600">
+              <a:defRPr>
+                <a:solidFill>
+                  <a:schemeClr val="tx1"/>
+                </a:solidFill>
+                <a:latin typeface="Calibri" panose="020F0502020204030204" pitchFamily="34" charset="0"/>
+              </a:defRPr>
+            </a:lvl3pPr>
+            <a:lvl4pPr marL="1600200" indent="-228600">
+              <a:defRPr>
+                <a:solidFill>
+                  <a:schemeClr val="tx1"/>
+                </a:solidFill>
+                <a:latin typeface="Calibri" panose="020F0502020204030204" pitchFamily="34" charset="0"/>
+              </a:defRPr>
+            </a:lvl4pPr>
+            <a:lvl5pPr marL="2057400" indent="-228600">
+              <a:defRPr>
+                <a:solidFill>
+                  <a:schemeClr val="tx1"/>
+                </a:solidFill>
+                <a:latin typeface="Calibri" panose="020F0502020204030204" pitchFamily="34" charset="0"/>
+              </a:defRPr>
+            </a:lvl5pPr>
+            <a:lvl6pPr marL="2514600" indent="-228600" fontAlgn="base">
+              <a:spcBef>
+                <a:spcPct val="0"/>
+              </a:spcBef>
+              <a:spcAft>
+                <a:spcPct val="0"/>
+              </a:spcAft>
+              <a:defRPr>
+                <a:solidFill>
+                  <a:schemeClr val="tx1"/>
+                </a:solidFill>
+                <a:latin typeface="Calibri" panose="020F0502020204030204" pitchFamily="34" charset="0"/>
+              </a:defRPr>
+            </a:lvl6pPr>
+            <a:lvl7pPr marL="2971800" indent="-228600" fontAlgn="base">
+              <a:spcBef>
+                <a:spcPct val="0"/>
+              </a:spcBef>
+              <a:spcAft>
+                <a:spcPct val="0"/>
+              </a:spcAft>
+              <a:defRPr>
+                <a:solidFill>
+                  <a:schemeClr val="tx1"/>
+                </a:solidFill>
+                <a:latin typeface="Calibri" panose="020F0502020204030204" pitchFamily="34" charset="0"/>
+              </a:defRPr>
+            </a:lvl7pPr>
+            <a:lvl8pPr marL="3429000" indent="-228600" fontAlgn="base">
+              <a:spcBef>
+                <a:spcPct val="0"/>
+              </a:spcBef>
+              <a:spcAft>
+                <a:spcPct val="0"/>
+              </a:spcAft>
+              <a:defRPr>
+                <a:solidFill>
+                  <a:schemeClr val="tx1"/>
+                </a:solidFill>
+                <a:latin typeface="Calibri" panose="020F0502020204030204" pitchFamily="34" charset="0"/>
+              </a:defRPr>
+            </a:lvl8pPr>
+            <a:lvl9pPr marL="3886200" indent="-228600" fontAlgn="base">
+              <a:spcBef>
+                <a:spcPct val="0"/>
+              </a:spcBef>
+              <a:spcAft>
+                <a:spcPct val="0"/>
+              </a:spcAft>
+              <a:defRPr>
+                <a:solidFill>
+                  <a:schemeClr val="tx1"/>
+                </a:solidFill>
+                <a:latin typeface="Calibri" panose="020F0502020204030204" pitchFamily="34" charset="0"/>
+              </a:defRPr>
+            </a:lvl9pPr>
+          </a:lstStyle>
+          <a:p>
+            <a:pPr eaLnBrk="1" hangingPunct="1"/>
+            <a:r>
+              <a:rPr lang="es-ES" altLang="es-ES" sz="1600" b="1">
+                <a:latin typeface="Open Sans" panose="020B0606030504020204" pitchFamily="34" charset="0"/>
+                <a:cs typeface="Open Sans" panose="020B0606030504020204" pitchFamily="34" charset="0"/>
+              </a:rPr>
+              <a:t>ANALYSIS AND DESIGN OF POWER CONVERTER TOPOLOGIES FOR ENERGY STORAGE </a:t>
+            </a:r>
+          </a:p>
+          <a:p>
+            <a:pPr lvl="1" eaLnBrk="1" hangingPunct="1"/>
+            <a:r>
+              <a:rPr lang="es-ES" altLang="es-ES" sz="1400">
+                <a:latin typeface="Cabin" pitchFamily="2" charset="0"/>
+              </a:rPr>
+              <a:t>Design of power electronics converters with an emphasis of multiport topologies for energy storage applications </a:t>
+            </a:r>
+          </a:p>
+          <a:p>
+            <a:pPr eaLnBrk="1" hangingPunct="1"/>
+            <a:endParaRPr lang="es-ES" altLang="es-ES" sz="1400">
+              <a:latin typeface="Cabin" pitchFamily="2" charset="0"/>
+            </a:endParaRPr>
+          </a:p>
+          <a:p>
+            <a:pPr eaLnBrk="1" hangingPunct="1"/>
+            <a:r>
+              <a:rPr lang="es-ES" altLang="es-ES" sz="1600" b="1">
+                <a:latin typeface="Open Sans" panose="020B0606030504020204" pitchFamily="34" charset="0"/>
+                <a:cs typeface="Open Sans" panose="020B0606030504020204" pitchFamily="34" charset="0"/>
+              </a:rPr>
+              <a:t>DYNAMIC ANALYSIS AND CONTROL OF POWER CONVERTERS FOR DISTRIBUTED RESOURCES </a:t>
+            </a:r>
+          </a:p>
+          <a:p>
+            <a:pPr lvl="1" eaLnBrk="1" hangingPunct="1"/>
+            <a:r>
+              <a:rPr lang="es-ES" altLang="es-ES" sz="1400">
+                <a:latin typeface="Cabin" pitchFamily="2" charset="0"/>
+              </a:rPr>
+              <a:t>High dynamic performance of power converters and microgrids by advanced control systems </a:t>
+            </a:r>
+          </a:p>
+          <a:p>
+            <a:pPr eaLnBrk="1" hangingPunct="1"/>
+            <a:endParaRPr lang="es-ES" altLang="es-ES" sz="1400">
+              <a:latin typeface="Cabin" pitchFamily="2" charset="0"/>
+            </a:endParaRPr>
+          </a:p>
+          <a:p>
+            <a:pPr eaLnBrk="1" hangingPunct="1"/>
+            <a:r>
+              <a:rPr lang="es-ES" altLang="es-ES" sz="1600" b="1">
+                <a:latin typeface="Open Sans" panose="020B0606030504020204" pitchFamily="34" charset="0"/>
+                <a:cs typeface="Open Sans" panose="020B0606030504020204" pitchFamily="34" charset="0"/>
+              </a:rPr>
+              <a:t>POWER FLOW ANALYSIS FOR HYBRID DC/AC GRIDS WITH HIGH PENETRATION OF DISTRIBUTED RESOURCES </a:t>
+            </a:r>
+          </a:p>
+          <a:p>
+            <a:pPr lvl="1" eaLnBrk="1" hangingPunct="1"/>
+            <a:r>
+              <a:rPr lang="es-ES" altLang="es-ES" sz="1400">
+                <a:latin typeface="Cabin" pitchFamily="2" charset="0"/>
+              </a:rPr>
+              <a:t>Impact of the integration of distributed resources in the electrical grid </a:t>
+            </a:r>
+          </a:p>
+          <a:p>
+            <a:pPr eaLnBrk="1" hangingPunct="1"/>
+            <a:endParaRPr lang="es-ES" altLang="es-ES" sz="1400">
+              <a:latin typeface="Cabin" pitchFamily="2" charset="0"/>
+            </a:endParaRPr>
+          </a:p>
+          <a:p>
+            <a:pPr eaLnBrk="1" hangingPunct="1"/>
+            <a:r>
+              <a:rPr lang="es-ES" altLang="es-ES" sz="1600" b="1">
+                <a:latin typeface="Open Sans" panose="020B0606030504020204" pitchFamily="34" charset="0"/>
+                <a:cs typeface="Open Sans" panose="020B0606030504020204" pitchFamily="34" charset="0"/>
+              </a:rPr>
+              <a:t>ENERGY DEMAND ANALYSIS AND VISUALIZATION </a:t>
+            </a:r>
+          </a:p>
+          <a:p>
+            <a:pPr lvl="1" eaLnBrk="1" hangingPunct="1"/>
+            <a:r>
+              <a:rPr lang="es-ES" altLang="es-ES" sz="1400">
+                <a:latin typeface="Cabin" pitchFamily="2" charset="0"/>
+              </a:rPr>
+              <a:t>Analytic tools and visualization strategies for energy planning </a:t>
+            </a:r>
+          </a:p>
+          <a:p>
+            <a:pPr eaLnBrk="1" hangingPunct="1"/>
+            <a:endParaRPr lang="es-ES" altLang="es-ES" sz="1400">
+              <a:latin typeface="Cabin" pitchFamily="2" charset="0"/>
+            </a:endParaRPr>
+          </a:p>
+          <a:p>
+            <a:pPr eaLnBrk="1" hangingPunct="1"/>
+            <a:r>
+              <a:rPr lang="es-ES" altLang="es-ES" sz="1600" b="1">
+                <a:latin typeface="Open Sans" panose="020B0606030504020204" pitchFamily="34" charset="0"/>
+                <a:cs typeface="Open Sans" panose="020B0606030504020204" pitchFamily="34" charset="0"/>
+              </a:rPr>
+              <a:t>APPLICATIONS</a:t>
+            </a:r>
+            <a:r>
+              <a:rPr lang="es-ES" altLang="es-ES" sz="1400">
+                <a:latin typeface="Cabin" pitchFamily="2" charset="0"/>
+              </a:rPr>
+              <a:t> </a:t>
+            </a:r>
+          </a:p>
+          <a:p>
+            <a:pPr lvl="1" eaLnBrk="1" hangingPunct="1"/>
+            <a:r>
+              <a:rPr lang="es-ES" altLang="es-ES" sz="1400">
+                <a:latin typeface="Cabin" pitchFamily="2" charset="0"/>
+              </a:rPr>
+              <a:t>Industrial applications and knowledge transfer </a:t>
+            </a:r>
+          </a:p>
+          <a:p>
+            <a:pPr eaLnBrk="1" hangingPunct="1"/>
+            <a:endParaRPr lang="en-GB" altLang="es-ES"/>
+          </a:p>
+        </p:txBody>
+      </p:sp>
+      <p:sp>
+        <p:nvSpPr>
+          <p:cNvPr id="7" name="Rectángulo 6">
+            <a:extLst>
+              <a:ext uri="{FF2B5EF4-FFF2-40B4-BE49-F238E27FC236}">
+                <a16:creationId xmlns:a16="http://schemas.microsoft.com/office/drawing/2014/main" id="{748A2B4F-64EB-6C41-BC10-98F2FA13B8DD}"/>
+              </a:ext>
+            </a:extLst>
+          </p:cNvPr>
+          <p:cNvSpPr/>
+          <p:nvPr/>
+        </p:nvSpPr>
+        <p:spPr>
+          <a:xfrm>
+            <a:off x="3959225" y="1563688"/>
+            <a:ext cx="292100" cy="46037"/>
+          </a:xfrm>
+          <a:prstGeom prst="rect">
+            <a:avLst/>
+          </a:prstGeom>
+          <a:solidFill>
+            <a:srgbClr val="FFCC28"/>
+          </a:solidFill>
+          <a:ln>
+            <a:noFill/>
+          </a:ln>
+        </p:spPr>
+        <p:style>
+          <a:lnRef idx="2">
+            <a:schemeClr val="accent1">
+              <a:shade val="50000"/>
+            </a:schemeClr>
+          </a:lnRef>
+          <a:fillRef idx="1">
+            <a:schemeClr val="accent1"/>
+          </a:fillRef>
+          <a:effectRef idx="0">
+            <a:schemeClr val="accent1"/>
+          </a:effectRef>
+          <a:fontRef idx="minor">
+            <a:schemeClr val="lt1"/>
+          </a:fontRef>
+        </p:style>
+        <p:txBody>
+          <a:bodyPr anchor="ctr"/>
+          <a:lstStyle/>
+          <a:p>
+            <a:pPr algn="ctr" eaLnBrk="1" fontAlgn="auto" hangingPunct="1">
+              <a:spcBef>
+                <a:spcPts val="0"/>
+              </a:spcBef>
+              <a:spcAft>
+                <a:spcPts val="0"/>
+              </a:spcAft>
+              <a:defRPr/>
+            </a:pPr>
+            <a:endParaRPr lang="en-GB"/>
+          </a:p>
+        </p:txBody>
+      </p:sp>
+      <p:sp>
+        <p:nvSpPr>
+          <p:cNvPr id="8" name="Rectángulo 7">
+            <a:extLst>
+              <a:ext uri="{FF2B5EF4-FFF2-40B4-BE49-F238E27FC236}">
+                <a16:creationId xmlns:a16="http://schemas.microsoft.com/office/drawing/2014/main" id="{536DAC0A-0D63-CC42-90E6-6F35343574CE}"/>
+              </a:ext>
+            </a:extLst>
+          </p:cNvPr>
+          <p:cNvSpPr/>
+          <p:nvPr/>
+        </p:nvSpPr>
+        <p:spPr>
+          <a:xfrm>
+            <a:off x="3959225" y="2670175"/>
+            <a:ext cx="292100" cy="46038"/>
+          </a:xfrm>
+          <a:prstGeom prst="rect">
+            <a:avLst/>
+          </a:prstGeom>
+          <a:solidFill>
+            <a:srgbClr val="FFCC28"/>
+          </a:solidFill>
+          <a:ln>
+            <a:noFill/>
+          </a:ln>
+        </p:spPr>
+        <p:style>
+          <a:lnRef idx="2">
+            <a:schemeClr val="accent1">
+              <a:shade val="50000"/>
+            </a:schemeClr>
+          </a:lnRef>
+          <a:fillRef idx="1">
+            <a:schemeClr val="accent1"/>
+          </a:fillRef>
+          <a:effectRef idx="0">
+            <a:schemeClr val="accent1"/>
+          </a:effectRef>
+          <a:fontRef idx="minor">
+            <a:schemeClr val="lt1"/>
+          </a:fontRef>
+        </p:style>
+        <p:txBody>
+          <a:bodyPr anchor="ctr"/>
+          <a:lstStyle/>
+          <a:p>
+            <a:pPr algn="ctr" eaLnBrk="1" fontAlgn="auto" hangingPunct="1">
+              <a:spcBef>
+                <a:spcPts val="0"/>
+              </a:spcBef>
+              <a:spcAft>
+                <a:spcPts val="0"/>
+              </a:spcAft>
+              <a:defRPr/>
+            </a:pPr>
+            <a:endParaRPr lang="en-GB"/>
+          </a:p>
+        </p:txBody>
+      </p:sp>
+      <p:sp>
+        <p:nvSpPr>
+          <p:cNvPr id="9" name="Rectángulo 8">
+            <a:extLst>
+              <a:ext uri="{FF2B5EF4-FFF2-40B4-BE49-F238E27FC236}">
+                <a16:creationId xmlns:a16="http://schemas.microsoft.com/office/drawing/2014/main" id="{8AC72E53-7808-8C46-95F3-685737430258}"/>
+              </a:ext>
+            </a:extLst>
+          </p:cNvPr>
+          <p:cNvSpPr/>
+          <p:nvPr/>
+        </p:nvSpPr>
+        <p:spPr>
+          <a:xfrm>
+            <a:off x="3959225" y="3803650"/>
+            <a:ext cx="292100" cy="46038"/>
+          </a:xfrm>
+          <a:prstGeom prst="rect">
+            <a:avLst/>
+          </a:prstGeom>
+          <a:solidFill>
+            <a:srgbClr val="FFCC28"/>
+          </a:solidFill>
+          <a:ln>
+            <a:noFill/>
+          </a:ln>
+        </p:spPr>
+        <p:style>
+          <a:lnRef idx="2">
+            <a:schemeClr val="accent1">
+              <a:shade val="50000"/>
+            </a:schemeClr>
+          </a:lnRef>
+          <a:fillRef idx="1">
+            <a:schemeClr val="accent1"/>
+          </a:fillRef>
+          <a:effectRef idx="0">
+            <a:schemeClr val="accent1"/>
+          </a:effectRef>
+          <a:fontRef idx="minor">
+            <a:schemeClr val="lt1"/>
+          </a:fontRef>
+        </p:style>
+        <p:txBody>
+          <a:bodyPr anchor="ctr"/>
+          <a:lstStyle/>
+          <a:p>
+            <a:pPr algn="ctr" eaLnBrk="1" fontAlgn="auto" hangingPunct="1">
+              <a:spcBef>
+                <a:spcPts val="0"/>
+              </a:spcBef>
+              <a:spcAft>
+                <a:spcPts val="0"/>
+              </a:spcAft>
+              <a:defRPr/>
+            </a:pPr>
+            <a:endParaRPr lang="en-GB"/>
+          </a:p>
+        </p:txBody>
+      </p:sp>
+      <p:sp>
+        <p:nvSpPr>
+          <p:cNvPr id="10" name="Rectángulo 9">
+            <a:extLst>
+              <a:ext uri="{FF2B5EF4-FFF2-40B4-BE49-F238E27FC236}">
+                <a16:creationId xmlns:a16="http://schemas.microsoft.com/office/drawing/2014/main" id="{CD52192D-C3AE-5E4D-8C94-6C23A53A6728}"/>
+              </a:ext>
+            </a:extLst>
+          </p:cNvPr>
+          <p:cNvSpPr/>
+          <p:nvPr/>
+        </p:nvSpPr>
+        <p:spPr>
+          <a:xfrm>
+            <a:off x="3959225" y="4479925"/>
+            <a:ext cx="292100" cy="46038"/>
+          </a:xfrm>
+          <a:prstGeom prst="rect">
+            <a:avLst/>
+          </a:prstGeom>
+          <a:solidFill>
+            <a:srgbClr val="FFCC28"/>
+          </a:solidFill>
+          <a:ln>
+            <a:noFill/>
+          </a:ln>
+        </p:spPr>
+        <p:style>
+          <a:lnRef idx="2">
+            <a:schemeClr val="accent1">
+              <a:shade val="50000"/>
+            </a:schemeClr>
+          </a:lnRef>
+          <a:fillRef idx="1">
+            <a:schemeClr val="accent1"/>
+          </a:fillRef>
+          <a:effectRef idx="0">
+            <a:schemeClr val="accent1"/>
+          </a:effectRef>
+          <a:fontRef idx="minor">
+            <a:schemeClr val="lt1"/>
+          </a:fontRef>
+        </p:style>
+        <p:txBody>
+          <a:bodyPr anchor="ctr"/>
+          <a:lstStyle/>
+          <a:p>
+            <a:pPr algn="ctr" eaLnBrk="1" fontAlgn="auto" hangingPunct="1">
+              <a:spcBef>
+                <a:spcPts val="0"/>
+              </a:spcBef>
+              <a:spcAft>
+                <a:spcPts val="0"/>
+              </a:spcAft>
+              <a:defRPr/>
+            </a:pPr>
+            <a:endParaRPr lang="en-GB"/>
+          </a:p>
+        </p:txBody>
+      </p:sp>
+      <p:sp>
+        <p:nvSpPr>
+          <p:cNvPr id="11" name="Rectángulo 10">
+            <a:extLst>
+              <a:ext uri="{FF2B5EF4-FFF2-40B4-BE49-F238E27FC236}">
+                <a16:creationId xmlns:a16="http://schemas.microsoft.com/office/drawing/2014/main" id="{FA1510A5-8CF1-F64C-AF37-D88839FBCCC9}"/>
+              </a:ext>
+            </a:extLst>
+          </p:cNvPr>
+          <p:cNvSpPr/>
+          <p:nvPr/>
+        </p:nvSpPr>
+        <p:spPr>
+          <a:xfrm>
+            <a:off x="3959225" y="5129213"/>
+            <a:ext cx="292100" cy="46037"/>
+          </a:xfrm>
+          <a:prstGeom prst="rect">
+            <a:avLst/>
+          </a:prstGeom>
+          <a:solidFill>
+            <a:srgbClr val="FFCC28"/>
+          </a:solidFill>
+          <a:ln>
+            <a:noFill/>
+          </a:ln>
+        </p:spPr>
+        <p:style>
+          <a:lnRef idx="2">
+            <a:schemeClr val="accent1">
+              <a:shade val="50000"/>
+            </a:schemeClr>
+          </a:lnRef>
+          <a:fillRef idx="1">
+            <a:schemeClr val="accent1"/>
+          </a:fillRef>
+          <a:effectRef idx="0">
+            <a:schemeClr val="accent1"/>
+          </a:effectRef>
+          <a:fontRef idx="minor">
+            <a:schemeClr val="lt1"/>
+          </a:fontRef>
+        </p:style>
+        <p:txBody>
+          <a:bodyPr anchor="ctr"/>
+          <a:lstStyle/>
+          <a:p>
+            <a:pPr algn="ctr" eaLnBrk="1" fontAlgn="auto" hangingPunct="1">
+              <a:spcBef>
+                <a:spcPts val="0"/>
+              </a:spcBef>
+              <a:spcAft>
+                <a:spcPts val="0"/>
+              </a:spcAft>
+              <a:defRPr/>
+            </a:pPr>
+            <a:endParaRPr lang="en-GB"/>
+          </a:p>
+        </p:txBody>
+      </p:sp>
+      <p:pic>
+        <p:nvPicPr>
+          <p:cNvPr id="19" name="Imagen 5">
+            <a:extLst>
+              <a:ext uri="{FF2B5EF4-FFF2-40B4-BE49-F238E27FC236}">
+                <a16:creationId xmlns:a16="http://schemas.microsoft.com/office/drawing/2014/main" id="{A24A3DB0-D8FE-BBB1-F420-60C2E13C7F05}"/>
+              </a:ext>
+            </a:extLst>
+          </p:cNvPr>
+          <p:cNvPicPr>
+            <a:picLocks noChangeAspect="1" noChangeArrowheads="1"/>
+          </p:cNvPicPr>
+          <p:nvPr/>
+        </p:nvPicPr>
+        <p:blipFill>
+          <a:blip r:embed="rId3">
+            <a:extLst>
+              <a:ext uri="{28A0092B-C50C-407E-A947-70E740481C1C}">
+                <a14:useLocalDpi xmlns:a14="http://schemas.microsoft.com/office/drawing/2010/main" val="0"/>
+              </a:ext>
+            </a:extLst>
+          </a:blip>
+          <a:srcRect/>
+          <a:stretch>
+            <a:fillRect/>
+          </a:stretch>
+        </p:blipFill>
+        <p:spPr bwMode="auto">
+          <a:xfrm>
+            <a:off x="11129080" y="122503"/>
+            <a:ext cx="904080" cy="809624"/>
+          </a:xfrm>
+          <a:prstGeom prst="rect">
+            <a:avLst/>
+          </a:prstGeom>
+          <a:noFill/>
+          <a:ln>
+            <a:noFill/>
+          </a:ln>
+          <a:extLst>
+            <a:ext uri="{909E8E84-426E-40DD-AFC4-6F175D3DCCD1}">
+              <a14:hiddenFill xmlns:a14="http://schemas.microsoft.com/office/drawing/2010/main">
+                <a:solidFill>
+                  <a:srgbClr val="FFFFFF"/>
+                </a:solidFill>
+              </a14:hiddenFill>
+            </a:ext>
+            <a:ext uri="{91240B29-F687-4F45-9708-019B960494DF}">
+              <a14:hiddenLine xmlns:a14="http://schemas.microsoft.com/office/drawing/2010/main" w="9525">
+                <a:solidFill>
+                  <a:srgbClr val="000000"/>
+                </a:solidFill>
+                <a:miter lim="800000"/>
+                <a:headEnd/>
+                <a:tailEnd/>
+              </a14:hiddenLine>
+            </a:ext>
+          </a:extLst>
+        </p:spPr>
+      </p:pic>
+      <p:pic>
+        <p:nvPicPr>
+          <p:cNvPr id="20" name="Picture 2">
+            <a:extLst>
+              <a:ext uri="{FF2B5EF4-FFF2-40B4-BE49-F238E27FC236}">
+                <a16:creationId xmlns:a16="http://schemas.microsoft.com/office/drawing/2014/main" id="{E7165E5E-DFAF-3BAD-84CE-3F016C9F9FEF}"/>
+              </a:ext>
+            </a:extLst>
+          </p:cNvPr>
+          <p:cNvPicPr>
+            <a:picLocks noChangeAspect="1" noChangeArrowheads="1"/>
+          </p:cNvPicPr>
+          <p:nvPr/>
+        </p:nvPicPr>
+        <p:blipFill>
+          <a:blip r:embed="rId4">
+            <a:extLst>
+              <a:ext uri="{28A0092B-C50C-407E-A947-70E740481C1C}">
+                <a14:useLocalDpi xmlns:a14="http://schemas.microsoft.com/office/drawing/2010/main" val="0"/>
+              </a:ext>
+            </a:extLst>
+          </a:blip>
+          <a:srcRect/>
+          <a:stretch>
+            <a:fillRect/>
+          </a:stretch>
+        </p:blipFill>
+        <p:spPr bwMode="auto">
+          <a:xfrm>
+            <a:off x="158840" y="122503"/>
+            <a:ext cx="1097236" cy="809624"/>
+          </a:xfrm>
+          <a:prstGeom prst="rect">
+            <a:avLst/>
+          </a:prstGeom>
+          <a:noFill/>
+          <a:ln>
+            <a:noFill/>
+          </a:ln>
+          <a:extLst>
+            <a:ext uri="{909E8E84-426E-40DD-AFC4-6F175D3DCCD1}">
+              <a14:hiddenFill xmlns:a14="http://schemas.microsoft.com/office/drawing/2010/main">
+                <a:solidFill>
+                  <a:srgbClr val="FFFFFF"/>
+                </a:solidFill>
+              </a14:hiddenFill>
+            </a:ext>
+            <a:ext uri="{91240B29-F687-4F45-9708-019B960494DF}">
+              <a14:hiddenLine xmlns:a14="http://schemas.microsoft.com/office/drawing/2010/main" w="9525">
+                <a:solidFill>
+                  <a:srgbClr val="000000"/>
+                </a:solidFill>
+                <a:miter lim="800000"/>
+                <a:headEnd/>
+                <a:tailEnd/>
+              </a14:hiddenLine>
+            </a:ext>
+          </a:extLst>
+        </p:spPr>
+      </p:pic>
+    </p:spTree>
+  </p:cSld>
+  <p:clrMapOvr>
+    <a:masterClrMapping/>
+  </p:clrMapOvr>
+</p:sld>
+</file>
+
+<file path=ppt/slides/slide29.xml><?xml version="1.0" encoding="utf-8"?>
+<p:sld xmlns:a="http://schemas.openxmlformats.org/drawingml/2006/main" xmlns:r="http://schemas.openxmlformats.org/officeDocument/2006/relationships" xmlns:p="http://schemas.openxmlformats.org/presentationml/2006/main">
+  <p:cSld>
+    <p:spTree>
+      <p:nvGrpSpPr>
+        <p:cNvPr id="1" name=""/>
+        <p:cNvGrpSpPr/>
+        <p:nvPr/>
+      </p:nvGrpSpPr>
+      <p:grpSpPr>
+        <a:xfrm>
+          <a:off x="0" y="0"/>
+          <a:ext cx="0" cy="0"/>
+          <a:chOff x="0" y="0"/>
+          <a:chExt cx="0" cy="0"/>
+        </a:xfrm>
+      </p:grpSpPr>
+      <p:sp>
+        <p:nvSpPr>
           <p:cNvPr id="4" name="CuadroTexto 3">
             <a:extLst>
               <a:ext uri="{FF2B5EF4-FFF2-40B4-BE49-F238E27FC236}">
@@ -18016,7 +18762,7 @@
             <a:fld id="{F80BEE8C-9BC8-4092-9420-3642836EC31C}" type="slidenum">
               <a:rPr lang="es-ES" altLang="es-ES" smtClean="0"/>
               <a:pPr/>
-              <a:t>28</a:t>
+              <a:t>29</a:t>
             </a:fld>
             <a:endParaRPr lang="es-ES" altLang="es-ES"/>
           </a:p>
@@ -21655,15 +22401,6 @@
 </file>
 
 <file path=customXml/item1.xml><?xml version="1.0" encoding="utf-8"?>
-<?mso-contentType ?>
-<FormTemplates xmlns="http://schemas.microsoft.com/sharepoint/v3/contenttype/forms">
-  <Display>DocumentLibraryForm</Display>
-  <Edit>DocumentLibraryForm</Edit>
-  <New>DocumentLibraryForm</New>
-</FormTemplates>
-</file>
-
-<file path=customXml/item2.xml><?xml version="1.0" encoding="utf-8"?>
 <ct:contentTypeSchema xmlns:ct="http://schemas.microsoft.com/office/2006/metadata/contentType" xmlns:ma="http://schemas.microsoft.com/office/2006/metadata/properties/metaAttributes" ct:_="" ma:_="" ma:contentTypeName="Documento" ma:contentTypeID="0x01010073B546F8B429F441AB517FD40C7758B9" ma:contentTypeVersion="9" ma:contentTypeDescription="Crear nuevo documento." ma:contentTypeScope="" ma:versionID="befdb5c2a76d165b7963a9516cf1ff49">
   <xsd:schema xmlns:xsd="http://www.w3.org/2001/XMLSchema" xmlns:xs="http://www.w3.org/2001/XMLSchema" xmlns:p="http://schemas.microsoft.com/office/2006/metadata/properties" xmlns:ns2="2711c295-d9dc-4290-94d2-434158111b76" targetNamespace="http://schemas.microsoft.com/office/2006/metadata/properties" ma:root="true" ma:fieldsID="ca2b8862da53eb6a9ce780760509eba3" ns2:_="">
     <xsd:import namespace="2711c295-d9dc-4290-94d2-434158111b76"/>
@@ -21841,15 +22578,16 @@
 </ct:contentTypeSchema>
 </file>
 
-<file path=customXml/itemProps1.xml><?xml version="1.0" encoding="utf-8"?>
-<ds:datastoreItem xmlns:ds="http://schemas.openxmlformats.org/officeDocument/2006/customXml" ds:itemID="{89347A6E-B2D6-4CDD-A77A-DC57154271F4}">
-  <ds:schemaRefs>
-    <ds:schemaRef ds:uri="http://schemas.microsoft.com/sharepoint/v3/contenttype/forms"/>
-  </ds:schemaRefs>
-</ds:datastoreItem>
+<file path=customXml/item2.xml><?xml version="1.0" encoding="utf-8"?>
+<?mso-contentType ?>
+<FormTemplates xmlns="http://schemas.microsoft.com/sharepoint/v3/contenttype/forms">
+  <Display>DocumentLibraryForm</Display>
+  <Edit>DocumentLibraryForm</Edit>
+  <New>DocumentLibraryForm</New>
+</FormTemplates>
 </file>
 
-<file path=customXml/itemProps2.xml><?xml version="1.0" encoding="utf-8"?>
+<file path=customXml/itemProps1.xml><?xml version="1.0" encoding="utf-8"?>
 <ds:datastoreItem xmlns:ds="http://schemas.openxmlformats.org/officeDocument/2006/customXml" ds:itemID="{F16D57E5-64C1-4DFF-BAE4-F891A5313303}">
   <ds:schemaRefs>
     <ds:schemaRef ds:uri="2711c295-d9dc-4290-94d2-434158111b76"/>
@@ -21865,4 +22603,12 @@
     <ds:schemaRef ds:uri="http://www.w3.org/2001/XMLSchema"/>
   </ds:schemaRefs>
 </ds:datastoreItem>
+</file>
+
+<file path=customXml/itemProps2.xml><?xml version="1.0" encoding="utf-8"?>
+<ds:datastoreItem xmlns:ds="http://schemas.openxmlformats.org/officeDocument/2006/customXml" ds:itemID="{89347A6E-B2D6-4CDD-A77A-DC57154271F4}">
+  <ds:schemaRefs>
+    <ds:schemaRef ds:uri="http://schemas.microsoft.com/sharepoint/v3/contenttype/forms"/>
+  </ds:schemaRefs>
+</ds:datastoreItem>
 </file>